--- a/pitch/NaijaBiz_IQ_Pitch.pptx
+++ b/pitch/NaijaBiz_IQ_Pitch.pptx
@@ -16,9 +16,12 @@
     <p:sldId id="264" r:id="rId10"/>
     <p:sldId id="265" r:id="rId11"/>
     <p:sldId id="266" r:id="rId12"/>
+    <p:sldId id="267" r:id="rId13"/>
+    <p:sldId id="268" r:id="rId14"/>
+    <p:sldId id="269" r:id="rId15"/>
   </p:sldIdLst>
   <p:notesMasterIdLst>
-    <p:notesMasterId r:id="rId13"/>
+    <p:notesMasterId r:id="rId16"/>
   </p:notesMasterIdLst>
   <p:sldSz cx="12192000" cy="6858000"/>
   <p:notesSz cx="6858000" cy="12192000"/>
@@ -117,31 +120,34 @@
   <p:extLst>
     <p:ext uri="{521415D9-36F7-43E2-AB2F-B90AF26B5E84}">
       <p14:sectionLst xmlns:p14="http://schemas.microsoft.com/office/powerpoint/2010/main">
-        <p14:section name="The problem" id="{7533a091-ca2d-636d-d6ff-c48f1b99cf78}">
+        <p14:section name="The problem" id="{9784943e-da6f-915c-ab01-b4eddce47ec4}">
           <p14:sldIdLst>
             <p14:sldId id="256"/>
             <p14:sldId id="257"/>
             <p14:sldId id="258"/>
           </p14:sldIdLst>
         </p14:section>
-        <p14:section name="The solution" id="{67b406cf-13ab-474a-37ac-4bc5a4811bc4}">
+        <p14:section name="The solution" id="{f42fab1a-f106-dae8-8595-37f5e9cba395}">
           <p14:sldIdLst>
             <p14:sldId id="259"/>
             <p14:sldId id="260"/>
+            <p14:sldId id="261"/>
           </p14:sldIdLst>
         </p14:section>
-        <p14:section name="The product" id="{bc16b28c-67a2-22d5-bf46-aedc84413d2b}">
+        <p14:section name="The product" id="{2eb6fc1c-a7fe-e324-3ee2-547f1efe6976}">
           <p14:sldIdLst>
-            <p14:sldId id="261"/>
             <p14:sldId id="262"/>
             <p14:sldId id="263"/>
-          </p14:sldIdLst>
-        </p14:section>
-        <p14:section name="Why it matters" id="{de718b54-922a-18b6-2a3e-39dcc2b48991}">
-          <p14:sldIdLst>
             <p14:sldId id="264"/>
             <p14:sldId id="265"/>
             <p14:sldId id="266"/>
+          </p14:sldIdLst>
+        </p14:section>
+        <p14:section name="Why it matters" id="{3ceb2f7b-bb32-93b7-e17e-6ad1fa998e23}">
+          <p14:sldIdLst>
+            <p14:sldId id="267"/>
+            <p14:sldId id="268"/>
+            <p14:sldId id="269"/>
           </p14:sldIdLst>
         </p14:section>
       </p14:sectionLst>
@@ -638,10 +644,11 @@
           <a:p>
             <a:r>
               <a:rPr lang="en-US" dirty="0"/>
-              <a:t>Where does this go after the hackathon?
-Next: go live — a real Wema connection with the customer's consent, transactions syncing continuously, and categorization that learns each business.
-Then: go deeper — supplier and stock insights, scenario planning like "can I afford to hire someone?", and benchmarks against similar businesses.
-Later: grow with Wema — personalized services, responsible financing pathways built on readiness, and ongoing financial coaching for small business owners.</a:t>
+              <a:t>NaijaBiz IQ doesn't wait for Aisha to open the app.
+[Live: on the Forecast screen, tap "Send this alert to my WhatsApp".]
+Three alerts: a cash alert when pressure is coming — her cash may fall to about 393 thousand around the 12th; the answer to "can I afford this?" with the safer amount; and a weekly summary.
+The engine writes every message from verified numbers, and it only ever goes to the owner's own number. It's built on Twilio. Twilio's free trial only allows its own template messages, so in this demo you see exactly what she would receive; with a paid account, live sending switches on without code changes.
+Why WhatsApp rather than SMS? Most small business owners already live in WhatsApp, and SMS in Nigeria has Do-Not-Disturb filtering that can silently drop finance messages.</a:t>
             </a:r>
             <a:endParaRPr lang="en-US" dirty="0"/>
           </a:p>
@@ -729,11 +736,9 @@
           <a:p>
             <a:r>
               <a:rPr lang="en-US" dirty="0"/>
-              <a:t>To close.
-Aisha didn't need another app to type numbers into. She needed someone to tell her what her own transactions meant: that she was buying stock faster than she was selling it, that her cash would be tight around the 12th, and that 300 thousand was too much right now but 210 was fine.
-This isn't just a dashboard. It's a financial intelligence layer that helps a small business owner understand what is happening, see what is coming, and make better decisions.
-Wema already has the transactions. NaijaBiz IQ turns those transactions into intelligence.
-Thank you — we'd love your questions. [Likely questions and answers are in DEMO.md.]</a:t>
+              <a:t>This isn't a mock-up. Everything you've seen runs on a working engine.
+It reads 247 transactions in seconds. It categorizes them 97.6% correctly on this data, and it has zero confident mistakes: whenever it isn't sure, it asks. It sees cash pressure two weeks ahead. And 100% of the numbers in its explanations are checked against the engine, so it never makes up a figure.
+It also sends WhatsApp alerts, opens in a simple mode with the full analysis one tap away, works offline, is built for phones first because that's how small business owners bank, passes an accessibility scan, and is covered by 116 automated tests.</a:t>
             </a:r>
             <a:endParaRPr lang="en-US" dirty="0"/>
           </a:p>
@@ -757,6 +762,282 @@
             <a:fld id="{F7021451-1387-4CA6-816F-3879F97B5CBC}" type="slidenum">
               <a:rPr lang="en-US"/>
               <a:t>11</a:t>
+            </a:fld>
+            <a:endParaRPr lang="en-US"/>
+          </a:p>
+        </p:txBody>
+      </p:sp>
+    </p:spTree>
+    <p:extLst>
+      <p:ext uri="{BB962C8B-B14F-4D97-AF65-F5344CB8AC3E}">
+        <p14:creationId xmlns:p14="http://schemas.microsoft.com/office/powerpoint/2010/main" val="1024086991"/>
+      </p:ext>
+    </p:extLst>
+  </p:cSld>
+  <p:clrMapOvr>
+    <a:masterClrMapping/>
+  </p:clrMapOvr>
+</p:notes>
+</file>
+
+<file path=ppt/notesSlides/notesSlide12.xml><?xml version="1.0" encoding="utf-8"?>
+<p:notes xmlns:a="http://schemas.openxmlformats.org/drawingml/2006/main" xmlns:r="http://schemas.openxmlformats.org/officeDocument/2006/relationships" xmlns:p="http://schemas.openxmlformats.org/presentationml/2006/main">
+  <p:cSld>
+    <p:spTree>
+      <p:nvGrpSpPr>
+        <p:cNvPr id="1" name=""/>
+        <p:cNvGrpSpPr/>
+        <p:nvPr/>
+      </p:nvGrpSpPr>
+      <p:grpSpPr>
+        <a:xfrm>
+          <a:off x="0" y="0"/>
+          <a:ext cx="0" cy="0"/>
+          <a:chOff x="0" y="0"/>
+          <a:chExt cx="0" cy="0"/>
+        </a:xfrm>
+      </p:grpSpPr>
+      <p:sp>
+        <p:nvSpPr>
+          <p:cNvPr id="2" name="Slide Image Placeholder 1"/>
+          <p:cNvSpPr>
+            <a:spLocks noGrp="1" noRot="1" noChangeAspect="1"/>
+          </p:cNvSpPr>
+          <p:nvPr>
+            <p:ph type="sldImg"/>
+          </p:nvPr>
+        </p:nvSpPr>
+        <p:spPr/>
+      </p:sp>
+      <p:sp>
+        <p:nvSpPr>
+          <p:cNvPr id="3" name="Notes Placeholder 2"/>
+          <p:cNvSpPr>
+            <a:spLocks noGrp="1"/>
+          </p:cNvSpPr>
+          <p:nvPr>
+            <p:ph type="body" idx="1"/>
+          </p:nvPr>
+        </p:nvSpPr>
+        <p:spPr/>
+        <p:txBody>
+          <a:bodyPr/>
+          <a:lstStyle/>
+          <a:p>
+            <a:r>
+              <a:rPr lang="en-US" dirty="0"/>
+              <a:t>Why does this matter to Wema?
+First, engagement: a balance is something you check; answers are something you come back for every week.
+Second, healthier customers: an owner who sees cash pressure two weeks early can act before it becomes a crisis.
+Third, with the customer's consent, Wema gets a clearer picture of how its small business customers are really doing.
+And fourth, a responsible path to products. The readiness profile shows healthy financial habits. It never approves a loan by itself, but it can show when a business is ready for a conversation about more.
+To be clear about the prototype: the Wema connection is simulated with demo data. In production, Aisha connects her account once, with consent, and NaijaBiz IQ stays up to date.</a:t>
+            </a:r>
+            <a:endParaRPr lang="en-US" dirty="0"/>
+          </a:p>
+        </p:txBody>
+      </p:sp>
+      <p:sp>
+        <p:nvSpPr>
+          <p:cNvPr id="4" name="Slide Number Placeholder 3"/>
+          <p:cNvSpPr>
+            <a:spLocks noGrp="1"/>
+          </p:cNvSpPr>
+          <p:nvPr>
+            <p:ph type="sldNum" sz="quarter" idx="10"/>
+          </p:nvPr>
+        </p:nvSpPr>
+        <p:spPr/>
+        <p:txBody>
+          <a:bodyPr/>
+          <a:lstStyle/>
+          <a:p>
+            <a:fld id="{F7021451-1387-4CA6-816F-3879F97B5CBC}" type="slidenum">
+              <a:rPr lang="en-US"/>
+              <a:t>12</a:t>
+            </a:fld>
+            <a:endParaRPr lang="en-US"/>
+          </a:p>
+        </p:txBody>
+      </p:sp>
+    </p:spTree>
+    <p:extLst>
+      <p:ext uri="{BB962C8B-B14F-4D97-AF65-F5344CB8AC3E}">
+        <p14:creationId xmlns:p14="http://schemas.microsoft.com/office/powerpoint/2010/main" val="1024086991"/>
+      </p:ext>
+    </p:extLst>
+  </p:cSld>
+  <p:clrMapOvr>
+    <a:masterClrMapping/>
+  </p:clrMapOvr>
+</p:notes>
+</file>
+
+<file path=ppt/notesSlides/notesSlide13.xml><?xml version="1.0" encoding="utf-8"?>
+<p:notes xmlns:a="http://schemas.openxmlformats.org/drawingml/2006/main" xmlns:r="http://schemas.openxmlformats.org/officeDocument/2006/relationships" xmlns:p="http://schemas.openxmlformats.org/presentationml/2006/main">
+  <p:cSld>
+    <p:spTree>
+      <p:nvGrpSpPr>
+        <p:cNvPr id="1" name=""/>
+        <p:cNvGrpSpPr/>
+        <p:nvPr/>
+      </p:nvGrpSpPr>
+      <p:grpSpPr>
+        <a:xfrm>
+          <a:off x="0" y="0"/>
+          <a:ext cx="0" cy="0"/>
+          <a:chOff x="0" y="0"/>
+          <a:chExt cx="0" cy="0"/>
+        </a:xfrm>
+      </p:grpSpPr>
+      <p:sp>
+        <p:nvSpPr>
+          <p:cNvPr id="2" name="Slide Image Placeholder 1"/>
+          <p:cNvSpPr>
+            <a:spLocks noGrp="1" noRot="1" noChangeAspect="1"/>
+          </p:cNvSpPr>
+          <p:nvPr>
+            <p:ph type="sldImg"/>
+          </p:nvPr>
+        </p:nvSpPr>
+        <p:spPr/>
+      </p:sp>
+      <p:sp>
+        <p:nvSpPr>
+          <p:cNvPr id="3" name="Notes Placeholder 2"/>
+          <p:cNvSpPr>
+            <a:spLocks noGrp="1"/>
+          </p:cNvSpPr>
+          <p:nvPr>
+            <p:ph type="body" idx="1"/>
+          </p:nvPr>
+        </p:nvSpPr>
+        <p:spPr/>
+        <p:txBody>
+          <a:bodyPr/>
+          <a:lstStyle/>
+          <a:p>
+            <a:r>
+              <a:rPr lang="en-US" dirty="0"/>
+              <a:t>Where does this go after the hackathon?
+Next: go live — a real Wema connection with the customer's consent, WhatsApp alerts sending live, and a USSD menu so owners without a smartphone or data get the same answers.
+Then: go deeper — machine-learning models trained on real Wema data across many businesses, "Ask NaijaBiz IQ", a chat that can only quote the engine's verified numbers, and supplier and stock insights.
+Later: grow with Wema — the same insights in Pidgin, Yoruba, Hausa and Igbo, personalized Wema services, and responsible financing pathways built on readiness, where a Wema officer always decides.</a:t>
+            </a:r>
+            <a:endParaRPr lang="en-US" dirty="0"/>
+          </a:p>
+        </p:txBody>
+      </p:sp>
+      <p:sp>
+        <p:nvSpPr>
+          <p:cNvPr id="4" name="Slide Number Placeholder 3"/>
+          <p:cNvSpPr>
+            <a:spLocks noGrp="1"/>
+          </p:cNvSpPr>
+          <p:nvPr>
+            <p:ph type="sldNum" sz="quarter" idx="10"/>
+          </p:nvPr>
+        </p:nvSpPr>
+        <p:spPr/>
+        <p:txBody>
+          <a:bodyPr/>
+          <a:lstStyle/>
+          <a:p>
+            <a:fld id="{F7021451-1387-4CA6-816F-3879F97B5CBC}" type="slidenum">
+              <a:rPr lang="en-US"/>
+              <a:t>13</a:t>
+            </a:fld>
+            <a:endParaRPr lang="en-US"/>
+          </a:p>
+        </p:txBody>
+      </p:sp>
+    </p:spTree>
+    <p:extLst>
+      <p:ext uri="{BB962C8B-B14F-4D97-AF65-F5344CB8AC3E}">
+        <p14:creationId xmlns:p14="http://schemas.microsoft.com/office/powerpoint/2010/main" val="1024086991"/>
+      </p:ext>
+    </p:extLst>
+  </p:cSld>
+  <p:clrMapOvr>
+    <a:masterClrMapping/>
+  </p:clrMapOvr>
+</p:notes>
+</file>
+
+<file path=ppt/notesSlides/notesSlide14.xml><?xml version="1.0" encoding="utf-8"?>
+<p:notes xmlns:a="http://schemas.openxmlformats.org/drawingml/2006/main" xmlns:r="http://schemas.openxmlformats.org/officeDocument/2006/relationships" xmlns:p="http://schemas.openxmlformats.org/presentationml/2006/main">
+  <p:cSld>
+    <p:spTree>
+      <p:nvGrpSpPr>
+        <p:cNvPr id="1" name=""/>
+        <p:cNvGrpSpPr/>
+        <p:nvPr/>
+      </p:nvGrpSpPr>
+      <p:grpSpPr>
+        <a:xfrm>
+          <a:off x="0" y="0"/>
+          <a:ext cx="0" cy="0"/>
+          <a:chOff x="0" y="0"/>
+          <a:chExt cx="0" cy="0"/>
+        </a:xfrm>
+      </p:grpSpPr>
+      <p:sp>
+        <p:nvSpPr>
+          <p:cNvPr id="2" name="Slide Image Placeholder 1"/>
+          <p:cNvSpPr>
+            <a:spLocks noGrp="1" noRot="1" noChangeAspect="1"/>
+          </p:cNvSpPr>
+          <p:nvPr>
+            <p:ph type="sldImg"/>
+          </p:nvPr>
+        </p:nvSpPr>
+        <p:spPr/>
+      </p:sp>
+      <p:sp>
+        <p:nvSpPr>
+          <p:cNvPr id="3" name="Notes Placeholder 2"/>
+          <p:cNvSpPr>
+            <a:spLocks noGrp="1"/>
+          </p:cNvSpPr>
+          <p:nvPr>
+            <p:ph type="body" idx="1"/>
+          </p:nvPr>
+        </p:nvSpPr>
+        <p:spPr/>
+        <p:txBody>
+          <a:bodyPr/>
+          <a:lstStyle/>
+          <a:p>
+            <a:r>
+              <a:rPr lang="en-US" dirty="0"/>
+              <a:t>To close.
+Aisha didn't need another app to type numbers into. She needed someone to tell her what her own transactions meant: that she was buying stock faster than she was selling it, that her cash would be tight around the 12th, and that 300 thousand was too much right now but 210 was fine.
+This isn't just a dashboard. It's a financial intelligence layer that helps a small business owner understand what is happening, see what is coming, and make better decisions.
+Wema already has the transactions. NaijaBiz IQ turns those transactions into intelligence.
+Thank you — we'd love your questions. [Likely questions and answers are in DEMO.md.]</a:t>
+            </a:r>
+            <a:endParaRPr lang="en-US" dirty="0"/>
+          </a:p>
+        </p:txBody>
+      </p:sp>
+      <p:sp>
+        <p:nvSpPr>
+          <p:cNvPr id="4" name="Slide Number Placeholder 3"/>
+          <p:cNvSpPr>
+            <a:spLocks noGrp="1"/>
+          </p:cNvSpPr>
+          <p:nvPr>
+            <p:ph type="sldNum" sz="quarter" idx="10"/>
+          </p:nvPr>
+        </p:nvSpPr>
+        <p:spPr/>
+        <p:txBody>
+          <a:bodyPr/>
+          <a:lstStyle/>
+          <a:p>
+            <a:fld id="{F7021451-1387-4CA6-816F-3879F97B5CBC}" type="slidenum">
+              <a:rPr lang="en-US"/>
+              <a:t>14</a:t>
             </a:fld>
             <a:endParaRPr lang="en-US"/>
           </a:p>
@@ -1182,11 +1463,10 @@
           <a:p>
             <a:r>
               <a:rPr lang="en-US" dirty="0"/>
-              <a:t>[Switch to the live demo here if possible — DEMO.md steps 2 to 6. If not, use this slide.]
-This is what Aisha sees. The first thing on her screen is not a table of numbers; it's the answer to "why is my cash going down?": her sales grew 12%, but her stock purchases grew 31%. She's buying stock faster than she sells it.
-Her Business Health Score has fallen from 84 at the end of June to 66 today — still healthy, but slipping, and it tells her which areas are weakest.
-The forecast warns that her cash will likely be at its lowest, about 393 thousand naira, around 12 October, when two supplier payments fall due.
-And it learns: seven transactions it couldn't identify; she answers one — "that card purchase was generator fuel" — and it recognises four similar ones on its own.</a:t>
+              <a:t>Judges often ask: what kind of AI is this?
+It's explainable AI. Categorizing is a scoring model: every transaction collects evidence from six signals — the description, who was paid, how that counterparty was categorized before, the channel, the amount, and the timing and repetition. It learns from Aisha's answers. The forecast is statistical: it finds her regular payments from their timing and amounts and projects her cash day by day. The scores are weighted models with a reason for every part. Recommendations are rules that fire on measured signals and show the number behind them. And the plain-English layer is template-based, with a checker that rejects any number the engine didn't produce.
+We chose this over a chatbot on purpose: every number is calculated, never generated, so a bank can audit why the app said something. With real Wema data, the next step is machine-learning models trained across many businesses.
+(Don't claim machine learning, neural networks or an LLM in the current prototype.)</a:t>
             </a:r>
             <a:endParaRPr lang="en-US" dirty="0"/>
           </a:p>
@@ -1274,11 +1554,11 @@
           <a:p>
             <a:r>
               <a:rPr lang="en-US" dirty="0"/>
-              <a:t>This is the moment that matters most. Aisha wants to buy 300 thousand naira of stock. Can she afford it?
-[Live: type 300000, tap Check.]
-NaijaBiz IQ says: you can, but be careful. Here's why, in plain sums: she has 580 thousand today. The purchase takes 300. Based on her regular payments and recent spending, she's expected to need another 187 thousand over the next two weeks. That leaves 93 thousand — below the 180 thousand we suggest she keeps for ten days of running costs.
-So it doesn't just say yes or no; it gives her a safer amount: 180 to 210 thousand. [Tap "Check ₦210K instead".] At 210, the answer is: yes, comfortably.
-That's the whole pipeline — transactions, analysis, forecast, risk, recommendation — ending in a business decision.</a:t>
+              <a:t>[Switch to the live demo here if possible — DEMO.md steps 2 to 6. If not, use this slide.]
+This is what Aisha sees. The first thing on her screen is not a table of numbers; it's the answer to "why is my cash going down?": her sales grew 12%, but her stock purchases grew 31%. She's buying stock faster than she sells it.
+Her Business Health Score has fallen from 84 at the end of June to 66 today — still healthy, but slipping, and it tells her which areas are weakest.
+The forecast warns that her cash will likely be at its lowest, about 393 thousand naira, around 12 October, when two supplier payments fall due.
+And it learns: seven transactions it couldn't identify; she answers one — "that card purchase was generator fuel" — and it recognises four similar ones on its own.</a:t>
             </a:r>
             <a:endParaRPr lang="en-US" dirty="0"/>
           </a:p>
@@ -1366,9 +1646,9 @@
           <a:p>
             <a:r>
               <a:rPr lang="en-US" dirty="0"/>
-              <a:t>This isn't a mock-up. Everything you've seen runs on a working engine.
-It reads 247 transactions in seconds. It categorizes them 97.6% correctly on this data, and it has zero confident mistakes: whenever it isn't sure, it asks. It sees cash pressure two weeks ahead. And 100% of the numbers in its explanations are checked against the engine, so it never makes up a figure.
-It also works offline, it's built for phones first because that's how small business owners bank, it passes an accessibility scan, and it's covered by 94 automated tests.</a:t>
+              <a:t>[Live: flip the Simple / In-depth switch on the dashboard.]
+A shop owner doesn't want a wall of statistics. So NaijaBiz IQ opens in Simple mode: plain sentences — in September Aisha earned 2.76 million and spent 2.92 million, so she spent 160 thousand more than she earned; she has 580 thousand in the bank; her Business Health is 66, down from 84.
+One tap on In-depth and everything is there: the stat tiles, the six-month chart, every part of the Health Score, the confidence on each transaction. Same numbers, different depth — for Aisha, her accountant, or a Wema relationship officer.</a:t>
             </a:r>
             <a:endParaRPr lang="en-US" dirty="0"/>
           </a:p>
@@ -1456,12 +1736,11 @@
           <a:p>
             <a:r>
               <a:rPr lang="en-US" dirty="0"/>
-              <a:t>Why does this matter to Wema?
-First, engagement: a balance is something you check; answers are something you come back for every week.
-Second, healthier customers: an owner who sees cash pressure two weeks early can act before it becomes a crisis.
-Third, with the customer's consent, Wema gets a clearer picture of how its small business customers are really doing.
-And fourth, a responsible path to products. The readiness profile shows healthy financial habits. It never approves a loan by itself, but it can show when a business is ready for a conversation about more.
-To be clear about the prototype: the Wema connection is simulated with demo data. In production, Aisha connects her account once, with consent, and NaijaBiz IQ stays up to date.</a:t>
+              <a:t>This is the moment that matters most. Aisha wants to buy 300 thousand naira of stock. Can she afford it?
+[Live: type 300000, tap Check.]
+NaijaBiz IQ says: you can, but be careful. Here's why, in plain sums: she has 580 thousand today. The purchase takes 300. Based on her regular payments and recent spending, she's expected to need another 187 thousand over the next two weeks. That leaves 93 thousand — below the 180 thousand we suggest she keeps for ten days of running costs.
+So it doesn't just say yes or no; it gives her a safer amount: 180 to 210 thousand. [Tap "Check ₦210K instead".] At 210, the answer is: yes, comfortably.
+That's the whole pipeline — transactions, analysis, forecast, risk, recommendation — ending in a business decision.</a:t>
             </a:r>
             <a:endParaRPr lang="en-US" dirty="0"/>
           </a:p>
@@ -3393,7 +3672,7 @@
                   <a:schemeClr val="accent1"/>
                 </a:solidFill>
               </a:rPr>
-              <a:t>WHAT'S NEXT</a:t>
+              <a:t>WHATSAPP ALERTS</a:t>
             </a:r>
             <a:endParaRPr lang="en-US" sz="1400" dirty="0"/>
           </a:p>
@@ -3434,49 +3713,53 @@
                 <a:ea typeface="Century Gothic" pitchFamily="34" charset="-122"/>
                 <a:cs typeface="Century Gothic" pitchFamily="34" charset="-120"/>
               </a:rPr>
-              <a:t>From prototype to product</a:t>
+              <a:t>Alerts where Aisha already is</a:t>
             </a:r>
             <a:endParaRPr lang="en-US" sz="3400" dirty="0"/>
           </a:p>
         </p:txBody>
       </p:sp>
-      <p:sp>
-        <p:nvSpPr>
-          <p:cNvPr id="4" name="Next card"/>
-          <p:cNvSpPr/>
-          <p:nvPr/>
-        </p:nvSpPr>
-        <p:spPr>
-          <a:xfrm>
-            <a:off x="685800" y="1965960"/>
-            <a:ext cx="3454298" cy="3520440"/>
-          </a:xfrm>
-          <a:prstGeom prst="roundRect">
-            <a:avLst>
-              <a:gd name="adj" fmla="val 4235"/>
-            </a:avLst>
-          </a:prstGeom>
-          <a:solidFill>
-            <a:srgbClr val="FFFFFF"/>
-          </a:solidFill>
-          <a:ln w="12700">
-            <a:solidFill>
-              <a:srgbClr val="E7DCE5"/>
-            </a:solidFill>
-            <a:prstDash val="solid"/>
-          </a:ln>
-        </p:spPr>
-      </p:sp>
-      <p:sp>
-        <p:nvSpPr>
-          <p:cNvPr id="5" name="Next label"/>
+      <p:pic>
+        <p:nvPicPr>
+          <p:cNvPr id="4" name="WhatsApp alert screenshot" descr="Phone showing the WhatsApp cash alert: cash may fall to about ₦393K around 12 Oct">    </p:cNvPr>
+          <p:cNvPicPr>
+            <a:picLocks noChangeAspect="1"/>
+          </p:cNvPicPr>
+          <p:nvPr/>
+        </p:nvPicPr>
+        <p:blipFill>
+          <a:blip r:embed="rId1"/>
+          <a:stretch>
+            <a:fillRect/>
+          </a:stretch>
+        </p:blipFill>
+        <p:spPr>
+          <a:xfrm>
+            <a:off x="685800" y="1874520"/>
+            <a:ext cx="1880262" cy="4069080"/>
+          </a:xfrm>
+          <a:prstGeom prst="rect">
+            <a:avLst/>
+          </a:prstGeom>
+          <a:effectLst>
+            <a:outerShdw sx="100000" sy="100000" kx="0" ky="0" algn="bl" rotWithShape="0" blurRad="228600" dist="76200" dir="5400000">
+              <a:srgbClr val="3B1439">
+                <a:alpha val="18000"/>
+              </a:srgbClr>
+            </a:outerShdw>
+          </a:effectLst>
+        </p:spPr>
+      </p:pic>
+      <p:sp>
+        <p:nvSpPr>
+          <p:cNvPr id="5" name="Cash alert title"/>
           <p:cNvSpPr txBox="1"/>
           <p:nvPr/>
         </p:nvSpPr>
         <p:spPr>
           <a:xfrm>
-            <a:off x="1005840" y="2240280"/>
-            <a:ext cx="2814218" cy="274320"/>
+            <a:off x="3114702" y="1965960"/>
+            <a:ext cx="8391193" cy="365760"/>
           </a:xfrm>
           <a:prstGeom prst="rect">
             <a:avLst/>
@@ -3492,43 +3775,7 @@
               <a:buNone/>
             </a:pPr>
             <a:r>
-              <a:rPr lang="en-US" sz="1200" b="1" spc="200" kern="0" dirty="0">
-                <a:solidFill>
-                  <a:schemeClr val="accent1"/>
-                </a:solidFill>
-              </a:rPr>
-              <a:t>NEXT</a:t>
-            </a:r>
-            <a:endParaRPr lang="en-US" sz="1200" dirty="0"/>
-          </a:p>
-        </p:txBody>
-      </p:sp>
-      <p:sp>
-        <p:nvSpPr>
-          <p:cNvPr id="6" name="Next title"/>
-          <p:cNvSpPr txBox="1"/>
-          <p:nvPr/>
-        </p:nvSpPr>
-        <p:spPr>
-          <a:xfrm>
-            <a:off x="1005840" y="2560320"/>
-            <a:ext cx="2814218" cy="457200"/>
-          </a:xfrm>
-          <a:prstGeom prst="rect">
-            <a:avLst/>
-          </a:prstGeom>
-          <a:noFill/>
-          <a:ln/>
-        </p:spPr>
-        <p:txBody>
-          <a:bodyPr wrap="square" lIns="0" tIns="0" rIns="0" bIns="0" rtlCol="0" anchor="t"/>
-          <a:lstStyle/>
-          <a:p>
-            <a:pPr indent="0" marL="0">
-              <a:buNone/>
-            </a:pPr>
-            <a:r>
-              <a:rPr lang="en-US" sz="2200" b="1" dirty="0">
+              <a:rPr lang="en-US" sz="1800" b="1" dirty="0">
                 <a:solidFill>
                   <a:schemeClr val="tx1"/>
                 </a:solidFill>
@@ -3536,22 +3783,22 @@
                 <a:ea typeface="Century Gothic" pitchFamily="34" charset="-122"/>
                 <a:cs typeface="Century Gothic" pitchFamily="34" charset="-120"/>
               </a:rPr>
-              <a:t>Go live</a:t>
-            </a:r>
-            <a:endParaRPr lang="en-US" sz="2200" dirty="0"/>
-          </a:p>
-        </p:txBody>
-      </p:sp>
-      <p:sp>
-        <p:nvSpPr>
-          <p:cNvPr id="7" name="Next items"/>
+              <a:t>Cash alert</a:t>
+            </a:r>
+            <a:endParaRPr lang="en-US" sz="1800" dirty="0"/>
+          </a:p>
+        </p:txBody>
+      </p:sp>
+      <p:sp>
+        <p:nvSpPr>
+          <p:cNvPr id="6" name="Cash alert body"/>
           <p:cNvSpPr txBox="1"/>
           <p:nvPr/>
         </p:nvSpPr>
         <p:spPr>
           <a:xfrm>
-            <a:off x="1005840" y="3200400"/>
-            <a:ext cx="2814218" cy="2103120"/>
+            <a:off x="3114702" y="2331720"/>
+            <a:ext cx="8391193" cy="548640"/>
           </a:xfrm>
           <a:prstGeom prst="rect">
             <a:avLst/>
@@ -3563,98 +3810,31 @@
           <a:bodyPr wrap="square" lIns="0" tIns="0" rIns="0" bIns="0" rtlCol="0" anchor="t"/>
           <a:lstStyle/>
           <a:p>
-            <a:pPr marL="342900" indent="-342900">
-              <a:spcAft>
-                <a:spcPts val="800"/>
-              </a:spcAft>
-              <a:buSzPct val="100000"/>
-              <a:buChar char="•"/>
-            </a:pPr>
-            <a:r>
-              <a:rPr lang="en-US" sz="1600" dirty="0">
+            <a:pPr indent="0" marL="0">
+              <a:buNone/>
+            </a:pPr>
+            <a:r>
+              <a:rPr lang="en-US" sz="1500" dirty="0">
                 <a:solidFill>
                   <a:schemeClr val="accent3"/>
                 </a:solidFill>
               </a:rPr>
-              <a:t>Real Wema connection, with consent</a:t>
-            </a:r>
-            <a:endParaRPr lang="en-US" sz="1600" dirty="0"/>
-          </a:p>
-          <a:p>
-            <a:pPr marL="342900" indent="-342900">
-              <a:spcAft>
-                <a:spcPts val="800"/>
-              </a:spcAft>
-              <a:buSzPct val="100000"/>
-              <a:buChar char="•"/>
-            </a:pPr>
-            <a:r>
-              <a:rPr lang="en-US" sz="1600" dirty="0">
-                <a:solidFill>
-                  <a:schemeClr val="accent3"/>
-                </a:solidFill>
-              </a:rPr>
-              <a:t>Continuous transaction sync</a:t>
-            </a:r>
-            <a:endParaRPr lang="en-US" sz="1600" dirty="0"/>
-          </a:p>
-          <a:p>
-            <a:pPr marL="342900" indent="-342900">
-              <a:spcAft>
-                <a:spcPts val="800"/>
-              </a:spcAft>
-              <a:buSzPct val="100000"/>
-              <a:buChar char="•"/>
-            </a:pPr>
-            <a:r>
-              <a:rPr lang="en-US" sz="1600" dirty="0">
-                <a:solidFill>
-                  <a:schemeClr val="accent3"/>
-                </a:solidFill>
-              </a:rPr>
-              <a:t>Learning tuned to each business</a:t>
-            </a:r>
-            <a:endParaRPr lang="en-US" sz="1600" dirty="0"/>
-          </a:p>
-        </p:txBody>
-      </p:sp>
-      <p:sp>
-        <p:nvSpPr>
-          <p:cNvPr id="8" name="Then card"/>
-          <p:cNvSpPr/>
-          <p:nvPr/>
-        </p:nvSpPr>
-        <p:spPr>
-          <a:xfrm>
-            <a:off x="4368698" y="1965960"/>
-            <a:ext cx="3454298" cy="3520440"/>
-          </a:xfrm>
-          <a:prstGeom prst="roundRect">
-            <a:avLst>
-              <a:gd name="adj" fmla="val 4235"/>
-            </a:avLst>
-          </a:prstGeom>
-          <a:solidFill>
-            <a:srgbClr val="FFFFFF"/>
-          </a:solidFill>
-          <a:ln w="12700">
-            <a:solidFill>
-              <a:srgbClr val="E7DCE5"/>
-            </a:solidFill>
-            <a:prstDash val="solid"/>
-          </a:ln>
-        </p:spPr>
-      </p:sp>
-      <p:sp>
-        <p:nvSpPr>
-          <p:cNvPr id="9" name="Then label"/>
+              <a:t>"Medium cash pressure in the next 2 weeks. Your cash may fall to about ₦393K around 12 Oct."</a:t>
+            </a:r>
+            <a:endParaRPr lang="en-US" sz="1500" dirty="0"/>
+          </a:p>
+        </p:txBody>
+      </p:sp>
+      <p:sp>
+        <p:nvSpPr>
+          <p:cNvPr id="7" name="Can I afford this? title"/>
           <p:cNvSpPr txBox="1"/>
           <p:nvPr/>
         </p:nvSpPr>
         <p:spPr>
           <a:xfrm>
-            <a:off x="4688738" y="2240280"/>
-            <a:ext cx="2814218" cy="274320"/>
+            <a:off x="3114702" y="2926080"/>
+            <a:ext cx="8391193" cy="365760"/>
           </a:xfrm>
           <a:prstGeom prst="rect">
             <a:avLst/>
@@ -3670,43 +3850,7 @@
               <a:buNone/>
             </a:pPr>
             <a:r>
-              <a:rPr lang="en-US" sz="1200" b="1" spc="200" kern="0" dirty="0">
-                <a:solidFill>
-                  <a:schemeClr val="accent1"/>
-                </a:solidFill>
-              </a:rPr>
-              <a:t>THEN</a:t>
-            </a:r>
-            <a:endParaRPr lang="en-US" sz="1200" dirty="0"/>
-          </a:p>
-        </p:txBody>
-      </p:sp>
-      <p:sp>
-        <p:nvSpPr>
-          <p:cNvPr id="10" name="Then title"/>
-          <p:cNvSpPr txBox="1"/>
-          <p:nvPr/>
-        </p:nvSpPr>
-        <p:spPr>
-          <a:xfrm>
-            <a:off x="4688738" y="2560320"/>
-            <a:ext cx="2814218" cy="457200"/>
-          </a:xfrm>
-          <a:prstGeom prst="rect">
-            <a:avLst/>
-          </a:prstGeom>
-          <a:noFill/>
-          <a:ln/>
-        </p:spPr>
-        <p:txBody>
-          <a:bodyPr wrap="square" lIns="0" tIns="0" rIns="0" bIns="0" rtlCol="0" anchor="t"/>
-          <a:lstStyle/>
-          <a:p>
-            <a:pPr indent="0" marL="0">
-              <a:buNone/>
-            </a:pPr>
-            <a:r>
-              <a:rPr lang="en-US" sz="2200" b="1" dirty="0">
+              <a:rPr lang="en-US" sz="1800" b="1" dirty="0">
                 <a:solidFill>
                   <a:schemeClr val="tx1"/>
                 </a:solidFill>
@@ -3714,22 +3858,22 @@
                 <a:ea typeface="Century Gothic" pitchFamily="34" charset="-122"/>
                 <a:cs typeface="Century Gothic" pitchFamily="34" charset="-120"/>
               </a:rPr>
-              <a:t>Go deeper</a:t>
-            </a:r>
-            <a:endParaRPr lang="en-US" sz="2200" dirty="0"/>
-          </a:p>
-        </p:txBody>
-      </p:sp>
-      <p:sp>
-        <p:nvSpPr>
-          <p:cNvPr id="11" name="Then items"/>
+              <a:t>Can I afford this?</a:t>
+            </a:r>
+            <a:endParaRPr lang="en-US" sz="1800" dirty="0"/>
+          </a:p>
+        </p:txBody>
+      </p:sp>
+      <p:sp>
+        <p:nvSpPr>
+          <p:cNvPr id="8" name="Can I afford this? body"/>
           <p:cNvSpPr txBox="1"/>
           <p:nvPr/>
         </p:nvSpPr>
         <p:spPr>
           <a:xfrm>
-            <a:off x="4688738" y="3200400"/>
-            <a:ext cx="2814218" cy="2103120"/>
+            <a:off x="3114702" y="3291840"/>
+            <a:ext cx="8391193" cy="548640"/>
           </a:xfrm>
           <a:prstGeom prst="rect">
             <a:avLst/>
@@ -3741,98 +3885,31 @@
           <a:bodyPr wrap="square" lIns="0" tIns="0" rIns="0" bIns="0" rtlCol="0" anchor="t"/>
           <a:lstStyle/>
           <a:p>
-            <a:pPr marL="342900" indent="-342900">
-              <a:spcAft>
-                <a:spcPts val="800"/>
-              </a:spcAft>
-              <a:buSzPct val="100000"/>
-              <a:buChar char="•"/>
-            </a:pPr>
-            <a:r>
-              <a:rPr lang="en-US" sz="1600" dirty="0">
+            <a:pPr indent="0" marL="0">
+              <a:buNone/>
+            </a:pPr>
+            <a:r>
+              <a:rPr lang="en-US" sz="1500" dirty="0">
                 <a:solidFill>
                   <a:schemeClr val="accent3"/>
                 </a:solidFill>
               </a:rPr>
-              <a:t>Supplier and stock insights</a:t>
-            </a:r>
-            <a:endParaRPr lang="en-US" sz="1600" dirty="0"/>
-          </a:p>
-          <a:p>
-            <a:pPr marL="342900" indent="-342900">
-              <a:spcAft>
-                <a:spcPts val="800"/>
-              </a:spcAft>
-              <a:buSzPct val="100000"/>
-              <a:buChar char="•"/>
-            </a:pPr>
-            <a:r>
-              <a:rPr lang="en-US" sz="1600" dirty="0">
-                <a:solidFill>
-                  <a:schemeClr val="accent3"/>
-                </a:solidFill>
-              </a:rPr>
-              <a:t>Scenario planning: hire, expand, restock</a:t>
-            </a:r>
-            <a:endParaRPr lang="en-US" sz="1600" dirty="0"/>
-          </a:p>
-          <a:p>
-            <a:pPr marL="342900" indent="-342900">
-              <a:spcAft>
-                <a:spcPts val="800"/>
-              </a:spcAft>
-              <a:buSzPct val="100000"/>
-              <a:buChar char="•"/>
-            </a:pPr>
-            <a:r>
-              <a:rPr lang="en-US" sz="1600" dirty="0">
-                <a:solidFill>
-                  <a:schemeClr val="accent3"/>
-                </a:solidFill>
-              </a:rPr>
-              <a:t>Benchmarks against similar businesses</a:t>
-            </a:r>
-            <a:endParaRPr lang="en-US" sz="1600" dirty="0"/>
-          </a:p>
-        </p:txBody>
-      </p:sp>
-      <p:sp>
-        <p:nvSpPr>
-          <p:cNvPr id="12" name="Later card"/>
-          <p:cNvSpPr/>
-          <p:nvPr/>
-        </p:nvSpPr>
-        <p:spPr>
-          <a:xfrm>
-            <a:off x="8051597" y="1965960"/>
-            <a:ext cx="3454298" cy="3520440"/>
-          </a:xfrm>
-          <a:prstGeom prst="roundRect">
-            <a:avLst>
-              <a:gd name="adj" fmla="val 4235"/>
-            </a:avLst>
-          </a:prstGeom>
-          <a:solidFill>
-            <a:srgbClr val="FFFFFF"/>
-          </a:solidFill>
-          <a:ln w="12700">
-            <a:solidFill>
-              <a:srgbClr val="E7DCE5"/>
-            </a:solidFill>
-            <a:prstDash val="solid"/>
-          </a:ln>
-        </p:spPr>
-      </p:sp>
-      <p:sp>
-        <p:nvSpPr>
-          <p:cNvPr id="13" name="Later label"/>
+              <a:t>The answer and the safer amount, on her phone: "You can, but be careful. Safer: ₦180,000 – ₦210,000."</a:t>
+            </a:r>
+            <a:endParaRPr lang="en-US" sz="1500" dirty="0"/>
+          </a:p>
+        </p:txBody>
+      </p:sp>
+      <p:sp>
+        <p:nvSpPr>
+          <p:cNvPr id="9" name="Weekly summary title"/>
           <p:cNvSpPr txBox="1"/>
           <p:nvPr/>
         </p:nvSpPr>
         <p:spPr>
           <a:xfrm>
-            <a:off x="8371637" y="2240280"/>
-            <a:ext cx="2814218" cy="274320"/>
+            <a:off x="3114702" y="3886200"/>
+            <a:ext cx="8391193" cy="365760"/>
           </a:xfrm>
           <a:prstGeom prst="rect">
             <a:avLst/>
@@ -3848,43 +3925,7 @@
               <a:buNone/>
             </a:pPr>
             <a:r>
-              <a:rPr lang="en-US" sz="1200" b="1" spc="200" kern="0" dirty="0">
-                <a:solidFill>
-                  <a:schemeClr val="accent1"/>
-                </a:solidFill>
-              </a:rPr>
-              <a:t>LATER</a:t>
-            </a:r>
-            <a:endParaRPr lang="en-US" sz="1200" dirty="0"/>
-          </a:p>
-        </p:txBody>
-      </p:sp>
-      <p:sp>
-        <p:nvSpPr>
-          <p:cNvPr id="14" name="Later title"/>
-          <p:cNvSpPr txBox="1"/>
-          <p:nvPr/>
-        </p:nvSpPr>
-        <p:spPr>
-          <a:xfrm>
-            <a:off x="8371637" y="2560320"/>
-            <a:ext cx="2814218" cy="457200"/>
-          </a:xfrm>
-          <a:prstGeom prst="rect">
-            <a:avLst/>
-          </a:prstGeom>
-          <a:noFill/>
-          <a:ln/>
-        </p:spPr>
-        <p:txBody>
-          <a:bodyPr wrap="square" lIns="0" tIns="0" rIns="0" bIns="0" rtlCol="0" anchor="t"/>
-          <a:lstStyle/>
-          <a:p>
-            <a:pPr indent="0" marL="0">
-              <a:buNone/>
-            </a:pPr>
-            <a:r>
-              <a:rPr lang="en-US" sz="2200" b="1" dirty="0">
+              <a:rPr lang="en-US" sz="1800" b="1" dirty="0">
                 <a:solidFill>
                   <a:schemeClr val="tx1"/>
                 </a:solidFill>
@@ -3892,22 +3933,22 @@
                 <a:ea typeface="Century Gothic" pitchFamily="34" charset="-122"/>
                 <a:cs typeface="Century Gothic" pitchFamily="34" charset="-120"/>
               </a:rPr>
-              <a:t>Grow with Wema</a:t>
-            </a:r>
-            <a:endParaRPr lang="en-US" sz="2200" dirty="0"/>
-          </a:p>
-        </p:txBody>
-      </p:sp>
-      <p:sp>
-        <p:nvSpPr>
-          <p:cNvPr id="15" name="Later items"/>
+              <a:t>Weekly summary</a:t>
+            </a:r>
+            <a:endParaRPr lang="en-US" sz="1800" dirty="0"/>
+          </a:p>
+        </p:txBody>
+      </p:sp>
+      <p:sp>
+        <p:nvSpPr>
+          <p:cNvPr id="10" name="Weekly summary body"/>
           <p:cNvSpPr txBox="1"/>
           <p:nvPr/>
         </p:nvSpPr>
         <p:spPr>
           <a:xfrm>
-            <a:off x="8371637" y="3200400"/>
-            <a:ext cx="2814218" cy="2103120"/>
+            <a:off x="3114702" y="4251960"/>
+            <a:ext cx="8391193" cy="548640"/>
           </a:xfrm>
           <a:prstGeom prst="rect">
             <a:avLst/>
@@ -3919,58 +3960,90 @@
           <a:bodyPr wrap="square" lIns="0" tIns="0" rIns="0" bIns="0" rtlCol="0" anchor="t"/>
           <a:lstStyle/>
           <a:p>
-            <a:pPr marL="342900" indent="-342900">
-              <a:spcAft>
-                <a:spcPts val="800"/>
-              </a:spcAft>
-              <a:buSzPct val="100000"/>
-              <a:buChar char="•"/>
-            </a:pPr>
-            <a:r>
-              <a:rPr lang="en-US" sz="1600" dirty="0">
+            <a:pPr indent="0" marL="0">
+              <a:buNone/>
+            </a:pPr>
+            <a:r>
+              <a:rPr lang="en-US" sz="1500" dirty="0">
                 <a:solidFill>
                   <a:schemeClr val="accent3"/>
                 </a:solidFill>
               </a:rPr>
-              <a:t>Personalized Wema services</a:t>
-            </a:r>
-            <a:endParaRPr lang="en-US" sz="1600" dirty="0"/>
-          </a:p>
-          <a:p>
-            <a:pPr marL="342900" indent="-342900">
-              <a:spcAft>
-                <a:spcPts val="800"/>
-              </a:spcAft>
-              <a:buSzPct val="100000"/>
-              <a:buChar char="•"/>
-            </a:pPr>
-            <a:r>
-              <a:rPr lang="en-US" sz="1600" dirty="0">
-                <a:solidFill>
-                  <a:schemeClr val="accent3"/>
-                </a:solidFill>
-              </a:rPr>
-              <a:t>Responsible financing pathways</a:t>
-            </a:r>
-            <a:endParaRPr lang="en-US" sz="1600" dirty="0"/>
-          </a:p>
-          <a:p>
-            <a:pPr marL="342900" indent="-342900">
-              <a:spcAft>
-                <a:spcPts val="800"/>
-              </a:spcAft>
-              <a:buSzPct val="100000"/>
-              <a:buChar char="•"/>
-            </a:pPr>
-            <a:r>
-              <a:rPr lang="en-US" sz="1600" dirty="0">
-                <a:solidFill>
-                  <a:schemeClr val="accent3"/>
-                </a:solidFill>
-              </a:rPr>
-              <a:t>SME financial coaching</a:t>
-            </a:r>
-            <a:endParaRPr lang="en-US" sz="1600" dirty="0"/>
+              <a:t>Sales, spending, cash and Business Health in five short lines.</a:t>
+            </a:r>
+            <a:endParaRPr lang="en-US" sz="1500" dirty="0"/>
+          </a:p>
+        </p:txBody>
+      </p:sp>
+      <p:sp>
+        <p:nvSpPr>
+          <p:cNvPr id="11" name="How it&amp;apos;s sent"/>
+          <p:cNvSpPr txBox="1"/>
+          <p:nvPr/>
+        </p:nvSpPr>
+        <p:spPr>
+          <a:xfrm>
+            <a:off x="3114702" y="4983480"/>
+            <a:ext cx="8391193" cy="411480"/>
+          </a:xfrm>
+          <a:prstGeom prst="rect">
+            <a:avLst/>
+          </a:prstGeom>
+          <a:noFill/>
+          <a:ln/>
+        </p:spPr>
+        <p:txBody>
+          <a:bodyPr wrap="square" lIns="0" tIns="0" rIns="0" bIns="0" rtlCol="0" anchor="t"/>
+          <a:lstStyle/>
+          <a:p>
+            <a:pPr indent="0" marL="0">
+              <a:buNone/>
+            </a:pPr>
+            <a:r>
+              <a:rPr lang="en-US" sz="1500" dirty="0">
+                <a:solidFill>
+                  <a:schemeClr val="tx1"/>
+                </a:solidFill>
+              </a:rPr>
+              <a:t>Written by the engine from verified numbers · sent only to the owner's own number · built on Twilio</a:t>
+            </a:r>
+            <a:endParaRPr lang="en-US" sz="1500" dirty="0"/>
+          </a:p>
+        </p:txBody>
+      </p:sp>
+      <p:sp>
+        <p:nvSpPr>
+          <p:cNvPr id="12" name="Trial note"/>
+          <p:cNvSpPr txBox="1"/>
+          <p:nvPr/>
+        </p:nvSpPr>
+        <p:spPr>
+          <a:xfrm>
+            <a:off x="3114702" y="5440680"/>
+            <a:ext cx="8391193" cy="548640"/>
+          </a:xfrm>
+          <a:prstGeom prst="rect">
+            <a:avLst/>
+          </a:prstGeom>
+          <a:noFill/>
+          <a:ln/>
+        </p:spPr>
+        <p:txBody>
+          <a:bodyPr wrap="square" lIns="0" tIns="0" rIns="0" bIns="0" rtlCol="0" anchor="t"/>
+          <a:lstStyle/>
+          <a:p>
+            <a:pPr indent="0" marL="0">
+              <a:buNone/>
+            </a:pPr>
+            <a:r>
+              <a:rPr lang="en-US" sz="1200" dirty="0">
+                <a:solidFill>
+                  <a:srgbClr val="6E6370"/>
+                </a:solidFill>
+              </a:rPr>
+              <a:t>In this demo the app shows the exact alert. Twilio's free trial only allows template messages, so live sending switches on with a paid account, with no code changes.</a:t>
+            </a:r>
+            <a:endParaRPr lang="en-US" sz="1200" dirty="0"/>
           </a:p>
         </p:txBody>
       </p:sp>
@@ -4030,6 +4103,1976 @@
 <file path=ppt/slides/slide11.xml><?xml version="1.0" encoding="utf-8"?>
 <p:sld xmlns:a="http://schemas.openxmlformats.org/drawingml/2006/main" xmlns:r="http://schemas.openxmlformats.org/officeDocument/2006/relationships" xmlns:p="http://schemas.openxmlformats.org/presentationml/2006/main">
   <p:cSld name="Slide 11">
+    <p:spTree>
+      <p:nvGrpSpPr>
+        <p:cNvPr id="1" name=""/>
+        <p:cNvGrpSpPr/>
+        <p:nvPr/>
+      </p:nvGrpSpPr>
+      <p:grpSpPr>
+        <a:xfrm>
+          <a:off x="0" y="0"/>
+          <a:ext cx="0" cy="0"/>
+          <a:chOff x="0" y="0"/>
+          <a:chExt cx="0" cy="0"/>
+        </a:xfrm>
+      </p:grpSpPr>
+      <p:sp>
+        <p:nvSpPr>
+          <p:cNvPr id="2" name="Text 0"/>
+          <p:cNvSpPr/>
+          <p:nvPr>
+            <p:ph idx="100" type="body" hasCustomPrompt="1"/>
+          </p:nvPr>
+        </p:nvSpPr>
+        <p:spPr>
+          <a:xfrm>
+            <a:off x="685800" y="548640"/>
+            <a:ext cx="10820095" cy="365760"/>
+          </a:xfrm>
+          <a:prstGeom prst="rect">
+            <a:avLst/>
+          </a:prstGeom>
+          <a:noFill/>
+          <a:ln/>
+        </p:spPr>
+        <p:txBody>
+          <a:bodyPr wrap="square" lIns="0" tIns="0" rIns="0" bIns="0" rtlCol="0"/>
+          <a:lstStyle/>
+          <a:p>
+            <a:pPr indent="0" marL="0">
+              <a:buNone/>
+            </a:pPr>
+            <a:r>
+              <a:rPr lang="en-US" sz="1400" b="1" spc="200" kern="0" dirty="0">
+                <a:solidFill>
+                  <a:schemeClr val="accent1"/>
+                </a:solidFill>
+              </a:rPr>
+              <a:t>WORKING TODAY</a:t>
+            </a:r>
+            <a:endParaRPr lang="en-US" sz="1400" dirty="0"/>
+          </a:p>
+        </p:txBody>
+      </p:sp>
+      <p:sp>
+        <p:nvSpPr>
+          <p:cNvPr id="3" name="Text 0"/>
+          <p:cNvSpPr/>
+          <p:nvPr>
+            <p:ph idx="101" type="title" hasCustomPrompt="1"/>
+          </p:nvPr>
+        </p:nvSpPr>
+        <p:spPr>
+          <a:xfrm>
+            <a:off x="685800" y="914400"/>
+            <a:ext cx="10820095" cy="868680"/>
+          </a:xfrm>
+          <a:prstGeom prst="rect">
+            <a:avLst/>
+          </a:prstGeom>
+          <a:noFill/>
+          <a:ln/>
+        </p:spPr>
+        <p:txBody>
+          <a:bodyPr wrap="square" lIns="0" tIns="0" rIns="0" bIns="0" rtlCol="0" anchor="t"/>
+          <a:lstStyle/>
+          <a:p>
+            <a:pPr algn="l" indent="0" marL="0">
+              <a:buNone/>
+            </a:pPr>
+            <a:r>
+              <a:rPr lang="en-US" sz="3400" b="1" dirty="0">
+                <a:solidFill>
+                  <a:schemeClr val="tx1"/>
+                </a:solidFill>
+                <a:latin typeface="Century Gothic" pitchFamily="34" charset="0"/>
+                <a:ea typeface="Century Gothic" pitchFamily="34" charset="-122"/>
+                <a:cs typeface="Century Gothic" pitchFamily="34" charset="-120"/>
+              </a:rPr>
+              <a:t>What the prototype already does</a:t>
+            </a:r>
+            <a:endParaRPr lang="en-US" sz="3400" dirty="0"/>
+          </a:p>
+        </p:txBody>
+      </p:sp>
+      <p:sp>
+        <p:nvSpPr>
+          <p:cNvPr id="4" name="Stat 1 card"/>
+          <p:cNvSpPr/>
+          <p:nvPr/>
+        </p:nvSpPr>
+        <p:spPr>
+          <a:xfrm>
+            <a:off x="685800" y="1965960"/>
+            <a:ext cx="2533574" cy="2103120"/>
+          </a:xfrm>
+          <a:prstGeom prst="roundRect">
+            <a:avLst>
+              <a:gd name="adj" fmla="val 6957"/>
+            </a:avLst>
+          </a:prstGeom>
+          <a:solidFill>
+            <a:srgbClr val="FFFFFF"/>
+          </a:solidFill>
+          <a:ln w="12700">
+            <a:solidFill>
+              <a:srgbClr val="E7DCE5"/>
+            </a:solidFill>
+            <a:prstDash val="solid"/>
+          </a:ln>
+        </p:spPr>
+      </p:sp>
+      <p:sp>
+        <p:nvSpPr>
+          <p:cNvPr id="5" name="Stat 1 figure"/>
+          <p:cNvSpPr txBox="1"/>
+          <p:nvPr/>
+        </p:nvSpPr>
+        <p:spPr>
+          <a:xfrm>
+            <a:off x="960120" y="2240280"/>
+            <a:ext cx="1984934" cy="685800"/>
+          </a:xfrm>
+          <a:prstGeom prst="rect">
+            <a:avLst/>
+          </a:prstGeom>
+          <a:noFill/>
+          <a:ln/>
+        </p:spPr>
+        <p:txBody>
+          <a:bodyPr wrap="square" lIns="0" tIns="0" rIns="0" bIns="0" rtlCol="0" anchor="t"/>
+          <a:lstStyle/>
+          <a:p>
+            <a:pPr indent="0" marL="0">
+              <a:buNone/>
+            </a:pPr>
+            <a:r>
+              <a:rPr lang="en-US" sz="4000" b="1" dirty="0">
+                <a:solidFill>
+                  <a:schemeClr val="accent1"/>
+                </a:solidFill>
+                <a:latin typeface="Century Gothic" pitchFamily="34" charset="0"/>
+                <a:ea typeface="Century Gothic" pitchFamily="34" charset="-122"/>
+                <a:cs typeface="Century Gothic" pitchFamily="34" charset="-120"/>
+              </a:rPr>
+              <a:t>247</a:t>
+            </a:r>
+            <a:endParaRPr lang="en-US" sz="4000" dirty="0"/>
+          </a:p>
+        </p:txBody>
+      </p:sp>
+      <p:sp>
+        <p:nvSpPr>
+          <p:cNvPr id="6" name="Stat 1 label"/>
+          <p:cNvSpPr txBox="1"/>
+          <p:nvPr/>
+        </p:nvSpPr>
+        <p:spPr>
+          <a:xfrm>
+            <a:off x="960120" y="3017520"/>
+            <a:ext cx="1984934" cy="914400"/>
+          </a:xfrm>
+          <a:prstGeom prst="rect">
+            <a:avLst/>
+          </a:prstGeom>
+          <a:noFill/>
+          <a:ln/>
+        </p:spPr>
+        <p:txBody>
+          <a:bodyPr wrap="square" lIns="0" tIns="0" rIns="0" bIns="0" rtlCol="0" anchor="t"/>
+          <a:lstStyle/>
+          <a:p>
+            <a:pPr indent="0" marL="0">
+              <a:buNone/>
+            </a:pPr>
+            <a:r>
+              <a:rPr lang="en-US" sz="1600" dirty="0">
+                <a:solidFill>
+                  <a:schemeClr val="tx1"/>
+                </a:solidFill>
+              </a:rPr>
+              <a:t>transactions understood in seconds</a:t>
+            </a:r>
+            <a:endParaRPr lang="en-US" sz="1600" dirty="0"/>
+          </a:p>
+        </p:txBody>
+      </p:sp>
+      <p:sp>
+        <p:nvSpPr>
+          <p:cNvPr id="7" name="Stat 2 card"/>
+          <p:cNvSpPr/>
+          <p:nvPr/>
+        </p:nvSpPr>
+        <p:spPr>
+          <a:xfrm>
+            <a:off x="3447974" y="1965960"/>
+            <a:ext cx="2533574" cy="2103120"/>
+          </a:xfrm>
+          <a:prstGeom prst="roundRect">
+            <a:avLst>
+              <a:gd name="adj" fmla="val 6957"/>
+            </a:avLst>
+          </a:prstGeom>
+          <a:solidFill>
+            <a:srgbClr val="FFFFFF"/>
+          </a:solidFill>
+          <a:ln w="12700">
+            <a:solidFill>
+              <a:srgbClr val="E7DCE5"/>
+            </a:solidFill>
+            <a:prstDash val="solid"/>
+          </a:ln>
+        </p:spPr>
+      </p:sp>
+      <p:sp>
+        <p:nvSpPr>
+          <p:cNvPr id="8" name="Stat 2 figure"/>
+          <p:cNvSpPr txBox="1"/>
+          <p:nvPr/>
+        </p:nvSpPr>
+        <p:spPr>
+          <a:xfrm>
+            <a:off x="3722294" y="2240280"/>
+            <a:ext cx="1984934" cy="685800"/>
+          </a:xfrm>
+          <a:prstGeom prst="rect">
+            <a:avLst/>
+          </a:prstGeom>
+          <a:noFill/>
+          <a:ln/>
+        </p:spPr>
+        <p:txBody>
+          <a:bodyPr wrap="square" lIns="0" tIns="0" rIns="0" bIns="0" rtlCol="0" anchor="t"/>
+          <a:lstStyle/>
+          <a:p>
+            <a:pPr indent="0" marL="0">
+              <a:buNone/>
+            </a:pPr>
+            <a:r>
+              <a:rPr lang="en-US" sz="4000" b="1" dirty="0">
+                <a:solidFill>
+                  <a:schemeClr val="accent1"/>
+                </a:solidFill>
+                <a:latin typeface="Century Gothic" pitchFamily="34" charset="0"/>
+                <a:ea typeface="Century Gothic" pitchFamily="34" charset="-122"/>
+                <a:cs typeface="Century Gothic" pitchFamily="34" charset="-120"/>
+              </a:rPr>
+              <a:t>97.6%</a:t>
+            </a:r>
+            <a:endParaRPr lang="en-US" sz="4000" dirty="0"/>
+          </a:p>
+        </p:txBody>
+      </p:sp>
+      <p:sp>
+        <p:nvSpPr>
+          <p:cNvPr id="9" name="Stat 2 label"/>
+          <p:cNvSpPr txBox="1"/>
+          <p:nvPr/>
+        </p:nvSpPr>
+        <p:spPr>
+          <a:xfrm>
+            <a:off x="3722294" y="3017520"/>
+            <a:ext cx="1984934" cy="914400"/>
+          </a:xfrm>
+          <a:prstGeom prst="rect">
+            <a:avLst/>
+          </a:prstGeom>
+          <a:noFill/>
+          <a:ln/>
+        </p:spPr>
+        <p:txBody>
+          <a:bodyPr wrap="square" lIns="0" tIns="0" rIns="0" bIns="0" rtlCol="0" anchor="t"/>
+          <a:lstStyle/>
+          <a:p>
+            <a:pPr indent="0" marL="0">
+              <a:buNone/>
+            </a:pPr>
+            <a:r>
+              <a:rPr lang="en-US" sz="1600" dirty="0">
+                <a:solidFill>
+                  <a:schemeClr val="tx1"/>
+                </a:solidFill>
+              </a:rPr>
+              <a:t>categorized correctly, with no confident mistakes</a:t>
+            </a:r>
+            <a:endParaRPr lang="en-US" sz="1600" dirty="0"/>
+          </a:p>
+        </p:txBody>
+      </p:sp>
+      <p:sp>
+        <p:nvSpPr>
+          <p:cNvPr id="10" name="Stat 3 card"/>
+          <p:cNvSpPr/>
+          <p:nvPr/>
+        </p:nvSpPr>
+        <p:spPr>
+          <a:xfrm>
+            <a:off x="6210148" y="1965960"/>
+            <a:ext cx="2533574" cy="2103120"/>
+          </a:xfrm>
+          <a:prstGeom prst="roundRect">
+            <a:avLst>
+              <a:gd name="adj" fmla="val 6957"/>
+            </a:avLst>
+          </a:prstGeom>
+          <a:solidFill>
+            <a:srgbClr val="FFFFFF"/>
+          </a:solidFill>
+          <a:ln w="12700">
+            <a:solidFill>
+              <a:srgbClr val="E7DCE5"/>
+            </a:solidFill>
+            <a:prstDash val="solid"/>
+          </a:ln>
+        </p:spPr>
+      </p:sp>
+      <p:sp>
+        <p:nvSpPr>
+          <p:cNvPr id="11" name="Stat 3 figure"/>
+          <p:cNvSpPr txBox="1"/>
+          <p:nvPr/>
+        </p:nvSpPr>
+        <p:spPr>
+          <a:xfrm>
+            <a:off x="6484468" y="2240280"/>
+            <a:ext cx="1984934" cy="685800"/>
+          </a:xfrm>
+          <a:prstGeom prst="rect">
+            <a:avLst/>
+          </a:prstGeom>
+          <a:noFill/>
+          <a:ln/>
+        </p:spPr>
+        <p:txBody>
+          <a:bodyPr wrap="square" lIns="0" tIns="0" rIns="0" bIns="0" rtlCol="0" anchor="t"/>
+          <a:lstStyle/>
+          <a:p>
+            <a:pPr indent="0" marL="0">
+              <a:buNone/>
+            </a:pPr>
+            <a:r>
+              <a:rPr lang="en-US" sz="4000" b="1" dirty="0">
+                <a:solidFill>
+                  <a:schemeClr val="accent1"/>
+                </a:solidFill>
+                <a:latin typeface="Century Gothic" pitchFamily="34" charset="0"/>
+                <a:ea typeface="Century Gothic" pitchFamily="34" charset="-122"/>
+                <a:cs typeface="Century Gothic" pitchFamily="34" charset="-120"/>
+              </a:rPr>
+              <a:t>14 days</a:t>
+            </a:r>
+            <a:endParaRPr lang="en-US" sz="4000" dirty="0"/>
+          </a:p>
+        </p:txBody>
+      </p:sp>
+      <p:sp>
+        <p:nvSpPr>
+          <p:cNvPr id="12" name="Stat 3 label"/>
+          <p:cNvSpPr txBox="1"/>
+          <p:nvPr/>
+        </p:nvSpPr>
+        <p:spPr>
+          <a:xfrm>
+            <a:off x="6484468" y="3017520"/>
+            <a:ext cx="1984934" cy="914400"/>
+          </a:xfrm>
+          <a:prstGeom prst="rect">
+            <a:avLst/>
+          </a:prstGeom>
+          <a:noFill/>
+          <a:ln/>
+        </p:spPr>
+        <p:txBody>
+          <a:bodyPr wrap="square" lIns="0" tIns="0" rIns="0" bIns="0" rtlCol="0" anchor="t"/>
+          <a:lstStyle/>
+          <a:p>
+            <a:pPr indent="0" marL="0">
+              <a:buNone/>
+            </a:pPr>
+            <a:r>
+              <a:rPr lang="en-US" sz="1600" dirty="0">
+                <a:solidFill>
+                  <a:schemeClr val="tx1"/>
+                </a:solidFill>
+              </a:rPr>
+              <a:t>of cash pressure seen ahead</a:t>
+            </a:r>
+            <a:endParaRPr lang="en-US" sz="1600" dirty="0"/>
+          </a:p>
+        </p:txBody>
+      </p:sp>
+      <p:sp>
+        <p:nvSpPr>
+          <p:cNvPr id="13" name="Stat 4 card"/>
+          <p:cNvSpPr/>
+          <p:nvPr/>
+        </p:nvSpPr>
+        <p:spPr>
+          <a:xfrm>
+            <a:off x="8972321" y="1965960"/>
+            <a:ext cx="2533574" cy="2103120"/>
+          </a:xfrm>
+          <a:prstGeom prst="roundRect">
+            <a:avLst>
+              <a:gd name="adj" fmla="val 6957"/>
+            </a:avLst>
+          </a:prstGeom>
+          <a:solidFill>
+            <a:srgbClr val="FFFFFF"/>
+          </a:solidFill>
+          <a:ln w="12700">
+            <a:solidFill>
+              <a:srgbClr val="E7DCE5"/>
+            </a:solidFill>
+            <a:prstDash val="solid"/>
+          </a:ln>
+        </p:spPr>
+      </p:sp>
+      <p:sp>
+        <p:nvSpPr>
+          <p:cNvPr id="14" name="Stat 4 figure"/>
+          <p:cNvSpPr txBox="1"/>
+          <p:nvPr/>
+        </p:nvSpPr>
+        <p:spPr>
+          <a:xfrm>
+            <a:off x="9246641" y="2240280"/>
+            <a:ext cx="1984934" cy="685800"/>
+          </a:xfrm>
+          <a:prstGeom prst="rect">
+            <a:avLst/>
+          </a:prstGeom>
+          <a:noFill/>
+          <a:ln/>
+        </p:spPr>
+        <p:txBody>
+          <a:bodyPr wrap="square" lIns="0" tIns="0" rIns="0" bIns="0" rtlCol="0" anchor="t"/>
+          <a:lstStyle/>
+          <a:p>
+            <a:pPr indent="0" marL="0">
+              <a:buNone/>
+            </a:pPr>
+            <a:r>
+              <a:rPr lang="en-US" sz="4000" b="1" dirty="0">
+                <a:solidFill>
+                  <a:schemeClr val="accent1"/>
+                </a:solidFill>
+                <a:latin typeface="Century Gothic" pitchFamily="34" charset="0"/>
+                <a:ea typeface="Century Gothic" pitchFamily="34" charset="-122"/>
+                <a:cs typeface="Century Gothic" pitchFamily="34" charset="-120"/>
+              </a:rPr>
+              <a:t>100%</a:t>
+            </a:r>
+            <a:endParaRPr lang="en-US" sz="4000" dirty="0"/>
+          </a:p>
+        </p:txBody>
+      </p:sp>
+      <p:sp>
+        <p:nvSpPr>
+          <p:cNvPr id="15" name="Stat 4 label"/>
+          <p:cNvSpPr txBox="1"/>
+          <p:nvPr/>
+        </p:nvSpPr>
+        <p:spPr>
+          <a:xfrm>
+            <a:off x="9246641" y="3017520"/>
+            <a:ext cx="1984934" cy="914400"/>
+          </a:xfrm>
+          <a:prstGeom prst="rect">
+            <a:avLst/>
+          </a:prstGeom>
+          <a:noFill/>
+          <a:ln/>
+        </p:spPr>
+        <p:txBody>
+          <a:bodyPr wrap="square" lIns="0" tIns="0" rIns="0" bIns="0" rtlCol="0" anchor="t"/>
+          <a:lstStyle/>
+          <a:p>
+            <a:pPr indent="0" marL="0">
+              <a:buNone/>
+            </a:pPr>
+            <a:r>
+              <a:rPr lang="en-US" sz="1600" dirty="0">
+                <a:solidFill>
+                  <a:schemeClr val="tx1"/>
+                </a:solidFill>
+              </a:rPr>
+              <a:t>of numbers in explanations checked against the engine</a:t>
+            </a:r>
+            <a:endParaRPr lang="en-US" sz="1600" dirty="0"/>
+          </a:p>
+        </p:txBody>
+      </p:sp>
+      <p:sp>
+        <p:nvSpPr>
+          <p:cNvPr id="16" name="Also built"/>
+          <p:cNvSpPr txBox="1"/>
+          <p:nvPr/>
+        </p:nvSpPr>
+        <p:spPr>
+          <a:xfrm>
+            <a:off x="685800" y="4434840"/>
+            <a:ext cx="10820095" cy="731520"/>
+          </a:xfrm>
+          <a:prstGeom prst="rect">
+            <a:avLst/>
+          </a:prstGeom>
+          <a:noFill/>
+          <a:ln/>
+        </p:spPr>
+        <p:txBody>
+          <a:bodyPr wrap="square" lIns="0" tIns="0" rIns="0" bIns="0" rtlCol="0" anchor="t"/>
+          <a:lstStyle/>
+          <a:p>
+            <a:pPr indent="0" marL="0">
+              <a:buNone/>
+            </a:pPr>
+            <a:r>
+              <a:rPr lang="en-US" sz="1700" dirty="0">
+                <a:solidFill>
+                  <a:schemeClr val="accent3"/>
+                </a:solidFill>
+              </a:rPr>
+              <a:t>Also built in: WhatsApp alerts · simple and in-depth modes · works offline · phones first</a:t>
+            </a:r>
+            <a:endParaRPr lang="en-US" sz="1700" dirty="0"/>
+          </a:p>
+          <a:p>
+            <a:pPr indent="0" marL="0">
+              <a:buNone/>
+            </a:pPr>
+            <a:r>
+              <a:rPr lang="en-US" sz="1700" dirty="0">
+                <a:solidFill>
+                  <a:schemeClr val="accent3"/>
+                </a:solidFill>
+              </a:rPr>
+              <a:t>WCAG 2.1 AA accessibility · 116 automated tests</a:t>
+            </a:r>
+            <a:endParaRPr lang="en-US" sz="1700" dirty="0"/>
+          </a:p>
+        </p:txBody>
+      </p:sp>
+      <p:sp>
+        <p:nvSpPr>
+          <p:cNvPr id="17" name="Source"/>
+          <p:cNvSpPr txBox="1"/>
+          <p:nvPr/>
+        </p:nvSpPr>
+        <p:spPr>
+          <a:xfrm>
+            <a:off x="685800" y="5806440"/>
+            <a:ext cx="7315200" cy="365760"/>
+          </a:xfrm>
+          <a:prstGeom prst="rect">
+            <a:avLst/>
+          </a:prstGeom>
+          <a:noFill/>
+          <a:ln/>
+        </p:spPr>
+        <p:txBody>
+          <a:bodyPr wrap="square" lIns="0" tIns="0" rIns="0" bIns="0" rtlCol="0" anchor="t"/>
+          <a:lstStyle/>
+          <a:p>
+            <a:pPr indent="0" marL="0">
+              <a:buNone/>
+            </a:pPr>
+            <a:r>
+              <a:rPr lang="en-US" sz="1200" dirty="0">
+                <a:solidFill>
+                  <a:srgbClr val="6E6370"/>
+                </a:solidFill>
+              </a:rPr>
+              <a:t>Figures measured on the 6-month demo dataset.</a:t>
+            </a:r>
+            <a:endParaRPr lang="en-US" sz="1200" dirty="0"/>
+          </a:p>
+        </p:txBody>
+      </p:sp>
+      <p:sp>
+        <p:nvSpPr>
+          <p:cNvPr id="25" name="Slide Number Placeholder 0"/>
+          <p:cNvSpPr>
+            <a:spLocks noGrp="1"/>
+          </p:cNvSpPr>
+          <p:nvPr>
+            <p:ph type="sldNum" sz="quarter" idx="4294967295"/>
+          </p:nvPr>
+        </p:nvSpPr>
+        <p:spPr>
+          <a:xfrm>
+            <a:off x="10972800" y="6263640"/>
+            <a:ext cx="530352" cy="320040"/>
+          </a:xfrm>
+          <a:prstGeom prst="rect">
+            <a:avLst/>
+          </a:prstGeom>
+          <a:extLst>
+            <a:ext uri="{C572A759-6A51-4108-AA02-DFA0A04FC94B}">
+              <ma14:wrappingTextBoxFlag xmlns:ma14="http://schemas.microsoft.com/office/mac/drawingml/2011/main" val="0"/>
+            </a:ext>
+          </a:extLst>
+        </p:spPr>
+        <p:txBody>
+          <a:bodyPr/>
+          <a:lstStyle>
+            <a:lvl1pPr>
+              <a:defRPr sz="1200">
+                <a:solidFill>
+                  <a:srgbClr val="6E6370"/>
+                </a:solidFill>
+              </a:defRPr>
+            </a:lvl1pPr>
+          </a:lstStyle>
+          <a:p>
+            <a:pPr algn="r"/>
+            <a:fld id="{F7021451-1387-4CA6-816F-3879F97B5CBC}" type="slidenum">
+              <a:rPr b="0" lang="en-US"/>
+              <a:t>11</a:t>
+            </a:fld>
+            <a:endParaRPr lang="en-US"/>
+          </a:p>
+        </p:txBody>
+      </p:sp>
+    </p:spTree>
+  </p:cSld>
+  <p:clrMapOvr>
+    <a:masterClrMapping/>
+  </p:clrMapOvr>
+</p:sld>
+</file>
+
+<file path=ppt/slides/slide12.xml><?xml version="1.0" encoding="utf-8"?>
+<p:sld xmlns:a="http://schemas.openxmlformats.org/drawingml/2006/main" xmlns:r="http://schemas.openxmlformats.org/officeDocument/2006/relationships" xmlns:p="http://schemas.openxmlformats.org/presentationml/2006/main">
+  <p:cSld name="Slide 12">
+    <p:spTree>
+      <p:nvGrpSpPr>
+        <p:cNvPr id="1" name=""/>
+        <p:cNvGrpSpPr/>
+        <p:nvPr/>
+      </p:nvGrpSpPr>
+      <p:grpSpPr>
+        <a:xfrm>
+          <a:off x="0" y="0"/>
+          <a:ext cx="0" cy="0"/>
+          <a:chOff x="0" y="0"/>
+          <a:chExt cx="0" cy="0"/>
+        </a:xfrm>
+      </p:grpSpPr>
+      <p:sp>
+        <p:nvSpPr>
+          <p:cNvPr id="2" name="Text 0"/>
+          <p:cNvSpPr/>
+          <p:nvPr>
+            <p:ph idx="100" type="body" hasCustomPrompt="1"/>
+          </p:nvPr>
+        </p:nvSpPr>
+        <p:spPr>
+          <a:xfrm>
+            <a:off x="685800" y="548640"/>
+            <a:ext cx="10820095" cy="365760"/>
+          </a:xfrm>
+          <a:prstGeom prst="rect">
+            <a:avLst/>
+          </a:prstGeom>
+          <a:noFill/>
+          <a:ln/>
+        </p:spPr>
+        <p:txBody>
+          <a:bodyPr wrap="square" lIns="0" tIns="0" rIns="0" bIns="0" rtlCol="0"/>
+          <a:lstStyle/>
+          <a:p>
+            <a:pPr indent="0" marL="0">
+              <a:buNone/>
+            </a:pPr>
+            <a:r>
+              <a:rPr lang="en-US" sz="1400" b="1" spc="200" kern="0" dirty="0">
+                <a:solidFill>
+                  <a:schemeClr val="accent1"/>
+                </a:solidFill>
+              </a:rPr>
+              <a:t>WHY IT MATTERS TO WEMA</a:t>
+            </a:r>
+            <a:endParaRPr lang="en-US" sz="1400" dirty="0"/>
+          </a:p>
+        </p:txBody>
+      </p:sp>
+      <p:sp>
+        <p:nvSpPr>
+          <p:cNvPr id="3" name="Text 0"/>
+          <p:cNvSpPr/>
+          <p:nvPr>
+            <p:ph idx="101" type="title" hasCustomPrompt="1"/>
+          </p:nvPr>
+        </p:nvSpPr>
+        <p:spPr>
+          <a:xfrm>
+            <a:off x="685800" y="914400"/>
+            <a:ext cx="10820095" cy="868680"/>
+          </a:xfrm>
+          <a:prstGeom prst="rect">
+            <a:avLst/>
+          </a:prstGeom>
+          <a:noFill/>
+          <a:ln/>
+        </p:spPr>
+        <p:txBody>
+          <a:bodyPr wrap="square" lIns="0" tIns="0" rIns="0" bIns="0" rtlCol="0" anchor="t"/>
+          <a:lstStyle/>
+          <a:p>
+            <a:pPr algn="l" indent="0" marL="0">
+              <a:buNone/>
+            </a:pPr>
+            <a:r>
+              <a:rPr lang="en-US" sz="3400" b="1" dirty="0">
+                <a:solidFill>
+                  <a:schemeClr val="tx1"/>
+                </a:solidFill>
+                <a:latin typeface="Century Gothic" pitchFamily="34" charset="0"/>
+                <a:ea typeface="Century Gothic" pitchFamily="34" charset="-122"/>
+                <a:cs typeface="Century Gothic" pitchFamily="34" charset="-120"/>
+              </a:rPr>
+              <a:t>Built on data Wema already has</a:t>
+            </a:r>
+            <a:endParaRPr lang="en-US" sz="3400" dirty="0"/>
+          </a:p>
+        </p:txBody>
+      </p:sp>
+      <p:sp>
+        <p:nvSpPr>
+          <p:cNvPr id="4" name="Benefit 1 card"/>
+          <p:cNvSpPr/>
+          <p:nvPr/>
+        </p:nvSpPr>
+        <p:spPr>
+          <a:xfrm>
+            <a:off x="685800" y="1965960"/>
+            <a:ext cx="3703320" cy="1691640"/>
+          </a:xfrm>
+          <a:prstGeom prst="roundRect">
+            <a:avLst>
+              <a:gd name="adj" fmla="val 8649"/>
+            </a:avLst>
+          </a:prstGeom>
+          <a:solidFill>
+            <a:srgbClr val="FFFFFF"/>
+          </a:solidFill>
+          <a:ln w="12700">
+            <a:solidFill>
+              <a:srgbClr val="E7DCE5"/>
+            </a:solidFill>
+            <a:prstDash val="solid"/>
+          </a:ln>
+        </p:spPr>
+      </p:sp>
+      <p:sp>
+        <p:nvSpPr>
+          <p:cNvPr id="5" name="Benefit 1 title"/>
+          <p:cNvSpPr txBox="1"/>
+          <p:nvPr/>
+        </p:nvSpPr>
+        <p:spPr>
+          <a:xfrm>
+            <a:off x="960120" y="2194560"/>
+            <a:ext cx="3154680" cy="685800"/>
+          </a:xfrm>
+          <a:prstGeom prst="rect">
+            <a:avLst/>
+          </a:prstGeom>
+          <a:noFill/>
+          <a:ln/>
+        </p:spPr>
+        <p:txBody>
+          <a:bodyPr wrap="square" lIns="0" tIns="0" rIns="0" bIns="0" rtlCol="0" anchor="t"/>
+          <a:lstStyle/>
+          <a:p>
+            <a:pPr indent="0" marL="0">
+              <a:buNone/>
+            </a:pPr>
+            <a:r>
+              <a:rPr lang="en-US" sz="1800" b="1" dirty="0">
+                <a:solidFill>
+                  <a:schemeClr val="tx1"/>
+                </a:solidFill>
+                <a:latin typeface="Century Gothic" pitchFamily="34" charset="0"/>
+                <a:ea typeface="Century Gothic" pitchFamily="34" charset="-122"/>
+                <a:cs typeface="Century Gothic" pitchFamily="34" charset="-120"/>
+              </a:rPr>
+              <a:t>A reason to open the app every week</a:t>
+            </a:r>
+            <a:endParaRPr lang="en-US" sz="1800" dirty="0"/>
+          </a:p>
+        </p:txBody>
+      </p:sp>
+      <p:sp>
+        <p:nvSpPr>
+          <p:cNvPr id="6" name="Benefit 1 detail"/>
+          <p:cNvSpPr txBox="1"/>
+          <p:nvPr/>
+        </p:nvSpPr>
+        <p:spPr>
+          <a:xfrm>
+            <a:off x="960120" y="2880360"/>
+            <a:ext cx="3154680" cy="685800"/>
+          </a:xfrm>
+          <a:prstGeom prst="rect">
+            <a:avLst/>
+          </a:prstGeom>
+          <a:noFill/>
+          <a:ln/>
+        </p:spPr>
+        <p:txBody>
+          <a:bodyPr wrap="square" lIns="0" tIns="0" rIns="0" bIns="0" rtlCol="0" anchor="t"/>
+          <a:lstStyle/>
+          <a:p>
+            <a:pPr indent="0" marL="0">
+              <a:buNone/>
+            </a:pPr>
+            <a:r>
+              <a:rPr lang="en-US" sz="1400" dirty="0">
+                <a:solidFill>
+                  <a:schemeClr val="accent3"/>
+                </a:solidFill>
+              </a:rPr>
+              <a:t>Owners come back for answers, not just balances.</a:t>
+            </a:r>
+            <a:endParaRPr lang="en-US" sz="1400" dirty="0"/>
+          </a:p>
+        </p:txBody>
+      </p:sp>
+      <p:sp>
+        <p:nvSpPr>
+          <p:cNvPr id="7" name="Benefit 2 card"/>
+          <p:cNvSpPr/>
+          <p:nvPr/>
+        </p:nvSpPr>
+        <p:spPr>
+          <a:xfrm>
+            <a:off x="4617720" y="1965960"/>
+            <a:ext cx="3703320" cy="1691640"/>
+          </a:xfrm>
+          <a:prstGeom prst="roundRect">
+            <a:avLst>
+              <a:gd name="adj" fmla="val 8649"/>
+            </a:avLst>
+          </a:prstGeom>
+          <a:solidFill>
+            <a:srgbClr val="FFFFFF"/>
+          </a:solidFill>
+          <a:ln w="12700">
+            <a:solidFill>
+              <a:srgbClr val="E7DCE5"/>
+            </a:solidFill>
+            <a:prstDash val="solid"/>
+          </a:ln>
+        </p:spPr>
+      </p:sp>
+      <p:sp>
+        <p:nvSpPr>
+          <p:cNvPr id="8" name="Benefit 2 title"/>
+          <p:cNvSpPr txBox="1"/>
+          <p:nvPr/>
+        </p:nvSpPr>
+        <p:spPr>
+          <a:xfrm>
+            <a:off x="4892040" y="2194560"/>
+            <a:ext cx="3154680" cy="685800"/>
+          </a:xfrm>
+          <a:prstGeom prst="rect">
+            <a:avLst/>
+          </a:prstGeom>
+          <a:noFill/>
+          <a:ln/>
+        </p:spPr>
+        <p:txBody>
+          <a:bodyPr wrap="square" lIns="0" tIns="0" rIns="0" bIns="0" rtlCol="0" anchor="t"/>
+          <a:lstStyle/>
+          <a:p>
+            <a:pPr indent="0" marL="0">
+              <a:buNone/>
+            </a:pPr>
+            <a:r>
+              <a:rPr lang="en-US" sz="1800" b="1" dirty="0">
+                <a:solidFill>
+                  <a:schemeClr val="tx1"/>
+                </a:solidFill>
+                <a:latin typeface="Century Gothic" pitchFamily="34" charset="0"/>
+                <a:ea typeface="Century Gothic" pitchFamily="34" charset="-122"/>
+                <a:cs typeface="Century Gothic" pitchFamily="34" charset="-120"/>
+              </a:rPr>
+              <a:t>Healthier SME customers</a:t>
+            </a:r>
+            <a:endParaRPr lang="en-US" sz="1800" dirty="0"/>
+          </a:p>
+        </p:txBody>
+      </p:sp>
+      <p:sp>
+        <p:nvSpPr>
+          <p:cNvPr id="9" name="Benefit 2 detail"/>
+          <p:cNvSpPr txBox="1"/>
+          <p:nvPr/>
+        </p:nvSpPr>
+        <p:spPr>
+          <a:xfrm>
+            <a:off x="4892040" y="2880360"/>
+            <a:ext cx="3154680" cy="685800"/>
+          </a:xfrm>
+          <a:prstGeom prst="rect">
+            <a:avLst/>
+          </a:prstGeom>
+          <a:noFill/>
+          <a:ln/>
+        </p:spPr>
+        <p:txBody>
+          <a:bodyPr wrap="square" lIns="0" tIns="0" rIns="0" bIns="0" rtlCol="0" anchor="t"/>
+          <a:lstStyle/>
+          <a:p>
+            <a:pPr indent="0" marL="0">
+              <a:buNone/>
+            </a:pPr>
+            <a:r>
+              <a:rPr lang="en-US" sz="1400" dirty="0">
+                <a:solidFill>
+                  <a:schemeClr val="accent3"/>
+                </a:solidFill>
+              </a:rPr>
+              <a:t>Owners who see cash pressure early can act before it becomes a crisis.</a:t>
+            </a:r>
+            <a:endParaRPr lang="en-US" sz="1400" dirty="0"/>
+          </a:p>
+        </p:txBody>
+      </p:sp>
+      <p:sp>
+        <p:nvSpPr>
+          <p:cNvPr id="10" name="Benefit 3 card"/>
+          <p:cNvSpPr/>
+          <p:nvPr/>
+        </p:nvSpPr>
+        <p:spPr>
+          <a:xfrm>
+            <a:off x="685800" y="3886200"/>
+            <a:ext cx="3703320" cy="1691640"/>
+          </a:xfrm>
+          <a:prstGeom prst="roundRect">
+            <a:avLst>
+              <a:gd name="adj" fmla="val 8649"/>
+            </a:avLst>
+          </a:prstGeom>
+          <a:solidFill>
+            <a:srgbClr val="FFFFFF"/>
+          </a:solidFill>
+          <a:ln w="12700">
+            <a:solidFill>
+              <a:srgbClr val="E7DCE5"/>
+            </a:solidFill>
+            <a:prstDash val="solid"/>
+          </a:ln>
+        </p:spPr>
+      </p:sp>
+      <p:sp>
+        <p:nvSpPr>
+          <p:cNvPr id="11" name="Benefit 3 title"/>
+          <p:cNvSpPr txBox="1"/>
+          <p:nvPr/>
+        </p:nvSpPr>
+        <p:spPr>
+          <a:xfrm>
+            <a:off x="960120" y="4114800"/>
+            <a:ext cx="3154680" cy="685800"/>
+          </a:xfrm>
+          <a:prstGeom prst="rect">
+            <a:avLst/>
+          </a:prstGeom>
+          <a:noFill/>
+          <a:ln/>
+        </p:spPr>
+        <p:txBody>
+          <a:bodyPr wrap="square" lIns="0" tIns="0" rIns="0" bIns="0" rtlCol="0" anchor="t"/>
+          <a:lstStyle/>
+          <a:p>
+            <a:pPr indent="0" marL="0">
+              <a:buNone/>
+            </a:pPr>
+            <a:r>
+              <a:rPr lang="en-US" sz="1800" b="1" dirty="0">
+                <a:solidFill>
+                  <a:schemeClr val="tx1"/>
+                </a:solidFill>
+                <a:latin typeface="Century Gothic" pitchFamily="34" charset="0"/>
+                <a:ea typeface="Century Gothic" pitchFamily="34" charset="-122"/>
+                <a:cs typeface="Century Gothic" pitchFamily="34" charset="-120"/>
+              </a:rPr>
+              <a:t>A clearer view of SME activity</a:t>
+            </a:r>
+            <a:endParaRPr lang="en-US" sz="1800" dirty="0"/>
+          </a:p>
+        </p:txBody>
+      </p:sp>
+      <p:sp>
+        <p:nvSpPr>
+          <p:cNvPr id="12" name="Benefit 3 detail"/>
+          <p:cNvSpPr txBox="1"/>
+          <p:nvPr/>
+        </p:nvSpPr>
+        <p:spPr>
+          <a:xfrm>
+            <a:off x="960120" y="4800600"/>
+            <a:ext cx="3154680" cy="685800"/>
+          </a:xfrm>
+          <a:prstGeom prst="rect">
+            <a:avLst/>
+          </a:prstGeom>
+          <a:noFill/>
+          <a:ln/>
+        </p:spPr>
+        <p:txBody>
+          <a:bodyPr wrap="square" lIns="0" tIns="0" rIns="0" bIns="0" rtlCol="0" anchor="t"/>
+          <a:lstStyle/>
+          <a:p>
+            <a:pPr indent="0" marL="0">
+              <a:buNone/>
+            </a:pPr>
+            <a:r>
+              <a:rPr lang="en-US" sz="1400" dirty="0">
+                <a:solidFill>
+                  <a:schemeClr val="accent3"/>
+                </a:solidFill>
+              </a:rPr>
+              <a:t>With consent, insight into how small businesses are really doing.</a:t>
+            </a:r>
+            <a:endParaRPr lang="en-US" sz="1400" dirty="0"/>
+          </a:p>
+        </p:txBody>
+      </p:sp>
+      <p:sp>
+        <p:nvSpPr>
+          <p:cNvPr id="13" name="Benefit 4 card"/>
+          <p:cNvSpPr/>
+          <p:nvPr/>
+        </p:nvSpPr>
+        <p:spPr>
+          <a:xfrm>
+            <a:off x="4617720" y="3886200"/>
+            <a:ext cx="3703320" cy="1691640"/>
+          </a:xfrm>
+          <a:prstGeom prst="roundRect">
+            <a:avLst>
+              <a:gd name="adj" fmla="val 8649"/>
+            </a:avLst>
+          </a:prstGeom>
+          <a:solidFill>
+            <a:srgbClr val="FFFFFF"/>
+          </a:solidFill>
+          <a:ln w="12700">
+            <a:solidFill>
+              <a:srgbClr val="E7DCE5"/>
+            </a:solidFill>
+            <a:prstDash val="solid"/>
+          </a:ln>
+        </p:spPr>
+      </p:sp>
+      <p:sp>
+        <p:nvSpPr>
+          <p:cNvPr id="14" name="Benefit 4 title"/>
+          <p:cNvSpPr txBox="1"/>
+          <p:nvPr/>
+        </p:nvSpPr>
+        <p:spPr>
+          <a:xfrm>
+            <a:off x="4892040" y="4114800"/>
+            <a:ext cx="3154680" cy="685800"/>
+          </a:xfrm>
+          <a:prstGeom prst="rect">
+            <a:avLst/>
+          </a:prstGeom>
+          <a:noFill/>
+          <a:ln/>
+        </p:spPr>
+        <p:txBody>
+          <a:bodyPr wrap="square" lIns="0" tIns="0" rIns="0" bIns="0" rtlCol="0" anchor="t"/>
+          <a:lstStyle/>
+          <a:p>
+            <a:pPr indent="0" marL="0">
+              <a:buNone/>
+            </a:pPr>
+            <a:r>
+              <a:rPr lang="en-US" sz="1800" b="1" dirty="0">
+                <a:solidFill>
+                  <a:schemeClr val="tx1"/>
+                </a:solidFill>
+                <a:latin typeface="Century Gothic" pitchFamily="34" charset="0"/>
+                <a:ea typeface="Century Gothic" pitchFamily="34" charset="-122"/>
+                <a:cs typeface="Century Gothic" pitchFamily="34" charset="-120"/>
+              </a:rPr>
+              <a:t>A responsible path to products</a:t>
+            </a:r>
+            <a:endParaRPr lang="en-US" sz="1800" dirty="0"/>
+          </a:p>
+        </p:txBody>
+      </p:sp>
+      <p:sp>
+        <p:nvSpPr>
+          <p:cNvPr id="15" name="Benefit 4 detail"/>
+          <p:cNvSpPr txBox="1"/>
+          <p:nvPr/>
+        </p:nvSpPr>
+        <p:spPr>
+          <a:xfrm>
+            <a:off x="4892040" y="4800600"/>
+            <a:ext cx="3154680" cy="685800"/>
+          </a:xfrm>
+          <a:prstGeom prst="rect">
+            <a:avLst/>
+          </a:prstGeom>
+          <a:noFill/>
+          <a:ln/>
+        </p:spPr>
+        <p:txBody>
+          <a:bodyPr wrap="square" lIns="0" tIns="0" rIns="0" bIns="0" rtlCol="0" anchor="t"/>
+          <a:lstStyle/>
+          <a:p>
+            <a:pPr indent="0" marL="0">
+              <a:buNone/>
+            </a:pPr>
+            <a:r>
+              <a:rPr lang="en-US" sz="1400" dirty="0">
+                <a:solidFill>
+                  <a:schemeClr val="accent3"/>
+                </a:solidFill>
+              </a:rPr>
+              <a:t>Readiness signals show who is ready for more. Never an automatic loan decision.</a:t>
+            </a:r>
+            <a:endParaRPr lang="en-US" sz="1400" dirty="0"/>
+          </a:p>
+        </p:txBody>
+      </p:sp>
+      <p:sp>
+        <p:nvSpPr>
+          <p:cNvPr id="16" name="Wema card"/>
+          <p:cNvSpPr/>
+          <p:nvPr/>
+        </p:nvSpPr>
+        <p:spPr>
+          <a:xfrm>
+            <a:off x="8641080" y="1965960"/>
+            <a:ext cx="2864815" cy="3611880"/>
+          </a:xfrm>
+          <a:prstGeom prst="roundRect">
+            <a:avLst>
+              <a:gd name="adj" fmla="val 5107"/>
+            </a:avLst>
+          </a:prstGeom>
+          <a:solidFill>
+            <a:srgbClr val="FFFFFF"/>
+          </a:solidFill>
+          <a:ln w="12700">
+            <a:solidFill>
+              <a:srgbClr val="E7DCE5"/>
+            </a:solidFill>
+            <a:prstDash val="solid"/>
+          </a:ln>
+        </p:spPr>
+      </p:sp>
+      <p:pic>
+        <p:nvPicPr>
+          <p:cNvPr id="17" name="Wema logo" descr="Wema Bank logo">    </p:cNvPr>
+          <p:cNvPicPr>
+            <a:picLocks noChangeAspect="1"/>
+          </p:cNvPicPr>
+          <p:nvPr/>
+        </p:nvPicPr>
+        <p:blipFill>
+          <a:blip r:embed="rId1"/>
+          <a:stretch>
+            <a:fillRect/>
+          </a:stretch>
+        </p:blipFill>
+        <p:spPr>
+          <a:xfrm>
+            <a:off x="8961120" y="2331720"/>
+            <a:ext cx="1737360" cy="1012054"/>
+          </a:xfrm>
+          <a:prstGeom prst="rect">
+            <a:avLst/>
+          </a:prstGeom>
+        </p:spPr>
+      </p:pic>
+      <p:sp>
+        <p:nvSpPr>
+          <p:cNvPr id="18" name="Prototype note"/>
+          <p:cNvSpPr txBox="1"/>
+          <p:nvPr/>
+        </p:nvSpPr>
+        <p:spPr>
+          <a:xfrm>
+            <a:off x="8961120" y="3611880"/>
+            <a:ext cx="2224735" cy="1645920"/>
+          </a:xfrm>
+          <a:prstGeom prst="rect">
+            <a:avLst/>
+          </a:prstGeom>
+          <a:noFill/>
+          <a:ln/>
+        </p:spPr>
+        <p:txBody>
+          <a:bodyPr wrap="square" lIns="0" tIns="0" rIns="0" bIns="0" rtlCol="0" anchor="t"/>
+          <a:lstStyle/>
+          <a:p>
+            <a:pPr indent="0" marL="0">
+              <a:buNone/>
+            </a:pPr>
+            <a:r>
+              <a:rPr lang="en-US" sz="1400" dirty="0">
+                <a:solidFill>
+                  <a:schemeClr val="accent3"/>
+                </a:solidFill>
+              </a:rPr>
+              <a:t>Prototype: the Wema connection is simulated. In production, Aisha connects once, with consent, and her data stays up to date.</a:t>
+            </a:r>
+            <a:endParaRPr lang="en-US" sz="1400" dirty="0"/>
+          </a:p>
+        </p:txBody>
+      </p:sp>
+      <p:sp>
+        <p:nvSpPr>
+          <p:cNvPr id="25" name="Slide Number Placeholder 0"/>
+          <p:cNvSpPr>
+            <a:spLocks noGrp="1"/>
+          </p:cNvSpPr>
+          <p:nvPr>
+            <p:ph type="sldNum" sz="quarter" idx="4294967295"/>
+          </p:nvPr>
+        </p:nvSpPr>
+        <p:spPr>
+          <a:xfrm>
+            <a:off x="10972800" y="6263640"/>
+            <a:ext cx="530352" cy="320040"/>
+          </a:xfrm>
+          <a:prstGeom prst="rect">
+            <a:avLst/>
+          </a:prstGeom>
+          <a:extLst>
+            <a:ext uri="{C572A759-6A51-4108-AA02-DFA0A04FC94B}">
+              <ma14:wrappingTextBoxFlag xmlns:ma14="http://schemas.microsoft.com/office/mac/drawingml/2011/main" val="0"/>
+            </a:ext>
+          </a:extLst>
+        </p:spPr>
+        <p:txBody>
+          <a:bodyPr/>
+          <a:lstStyle>
+            <a:lvl1pPr>
+              <a:defRPr sz="1200">
+                <a:solidFill>
+                  <a:srgbClr val="6E6370"/>
+                </a:solidFill>
+              </a:defRPr>
+            </a:lvl1pPr>
+          </a:lstStyle>
+          <a:p>
+            <a:pPr algn="r"/>
+            <a:fld id="{F7021451-1387-4CA6-816F-3879F97B5CBC}" type="slidenum">
+              <a:rPr b="0" lang="en-US"/>
+              <a:t>12</a:t>
+            </a:fld>
+            <a:endParaRPr lang="en-US"/>
+          </a:p>
+        </p:txBody>
+      </p:sp>
+    </p:spTree>
+  </p:cSld>
+  <p:clrMapOvr>
+    <a:masterClrMapping/>
+  </p:clrMapOvr>
+</p:sld>
+</file>
+
+<file path=ppt/slides/slide13.xml><?xml version="1.0" encoding="utf-8"?>
+<p:sld xmlns:a="http://schemas.openxmlformats.org/drawingml/2006/main" xmlns:r="http://schemas.openxmlformats.org/officeDocument/2006/relationships" xmlns:p="http://schemas.openxmlformats.org/presentationml/2006/main">
+  <p:cSld name="Slide 13">
+    <p:spTree>
+      <p:nvGrpSpPr>
+        <p:cNvPr id="1" name=""/>
+        <p:cNvGrpSpPr/>
+        <p:nvPr/>
+      </p:nvGrpSpPr>
+      <p:grpSpPr>
+        <a:xfrm>
+          <a:off x="0" y="0"/>
+          <a:ext cx="0" cy="0"/>
+          <a:chOff x="0" y="0"/>
+          <a:chExt cx="0" cy="0"/>
+        </a:xfrm>
+      </p:grpSpPr>
+      <p:sp>
+        <p:nvSpPr>
+          <p:cNvPr id="2" name="Text 0"/>
+          <p:cNvSpPr/>
+          <p:nvPr>
+            <p:ph idx="100" type="body" hasCustomPrompt="1"/>
+          </p:nvPr>
+        </p:nvSpPr>
+        <p:spPr>
+          <a:xfrm>
+            <a:off x="685800" y="548640"/>
+            <a:ext cx="10820095" cy="365760"/>
+          </a:xfrm>
+          <a:prstGeom prst="rect">
+            <a:avLst/>
+          </a:prstGeom>
+          <a:noFill/>
+          <a:ln/>
+        </p:spPr>
+        <p:txBody>
+          <a:bodyPr wrap="square" lIns="0" tIns="0" rIns="0" bIns="0" rtlCol="0"/>
+          <a:lstStyle/>
+          <a:p>
+            <a:pPr indent="0" marL="0">
+              <a:buNone/>
+            </a:pPr>
+            <a:r>
+              <a:rPr lang="en-US" sz="1400" b="1" spc="200" kern="0" dirty="0">
+                <a:solidFill>
+                  <a:schemeClr val="accent1"/>
+                </a:solidFill>
+              </a:rPr>
+              <a:t>WHAT'S NEXT</a:t>
+            </a:r>
+            <a:endParaRPr lang="en-US" sz="1400" dirty="0"/>
+          </a:p>
+        </p:txBody>
+      </p:sp>
+      <p:sp>
+        <p:nvSpPr>
+          <p:cNvPr id="3" name="Text 0"/>
+          <p:cNvSpPr/>
+          <p:nvPr>
+            <p:ph idx="101" type="title" hasCustomPrompt="1"/>
+          </p:nvPr>
+        </p:nvSpPr>
+        <p:spPr>
+          <a:xfrm>
+            <a:off x="685800" y="914400"/>
+            <a:ext cx="10820095" cy="868680"/>
+          </a:xfrm>
+          <a:prstGeom prst="rect">
+            <a:avLst/>
+          </a:prstGeom>
+          <a:noFill/>
+          <a:ln/>
+        </p:spPr>
+        <p:txBody>
+          <a:bodyPr wrap="square" lIns="0" tIns="0" rIns="0" bIns="0" rtlCol="0" anchor="t"/>
+          <a:lstStyle/>
+          <a:p>
+            <a:pPr algn="l" indent="0" marL="0">
+              <a:buNone/>
+            </a:pPr>
+            <a:r>
+              <a:rPr lang="en-US" sz="3400" b="1" dirty="0">
+                <a:solidFill>
+                  <a:schemeClr val="tx1"/>
+                </a:solidFill>
+                <a:latin typeface="Century Gothic" pitchFamily="34" charset="0"/>
+                <a:ea typeface="Century Gothic" pitchFamily="34" charset="-122"/>
+                <a:cs typeface="Century Gothic" pitchFamily="34" charset="-120"/>
+              </a:rPr>
+              <a:t>From prototype to product</a:t>
+            </a:r>
+            <a:endParaRPr lang="en-US" sz="3400" dirty="0"/>
+          </a:p>
+        </p:txBody>
+      </p:sp>
+      <p:sp>
+        <p:nvSpPr>
+          <p:cNvPr id="4" name="Next card"/>
+          <p:cNvSpPr/>
+          <p:nvPr/>
+        </p:nvSpPr>
+        <p:spPr>
+          <a:xfrm>
+            <a:off x="685800" y="1965960"/>
+            <a:ext cx="3454298" cy="3520440"/>
+          </a:xfrm>
+          <a:prstGeom prst="roundRect">
+            <a:avLst>
+              <a:gd name="adj" fmla="val 4235"/>
+            </a:avLst>
+          </a:prstGeom>
+          <a:solidFill>
+            <a:srgbClr val="FFFFFF"/>
+          </a:solidFill>
+          <a:ln w="12700">
+            <a:solidFill>
+              <a:srgbClr val="E7DCE5"/>
+            </a:solidFill>
+            <a:prstDash val="solid"/>
+          </a:ln>
+        </p:spPr>
+      </p:sp>
+      <p:sp>
+        <p:nvSpPr>
+          <p:cNvPr id="5" name="Next label"/>
+          <p:cNvSpPr txBox="1"/>
+          <p:nvPr/>
+        </p:nvSpPr>
+        <p:spPr>
+          <a:xfrm>
+            <a:off x="1005840" y="2240280"/>
+            <a:ext cx="2814218" cy="274320"/>
+          </a:xfrm>
+          <a:prstGeom prst="rect">
+            <a:avLst/>
+          </a:prstGeom>
+          <a:noFill/>
+          <a:ln/>
+        </p:spPr>
+        <p:txBody>
+          <a:bodyPr wrap="square" lIns="0" tIns="0" rIns="0" bIns="0" rtlCol="0" anchor="t"/>
+          <a:lstStyle/>
+          <a:p>
+            <a:pPr indent="0" marL="0">
+              <a:buNone/>
+            </a:pPr>
+            <a:r>
+              <a:rPr lang="en-US" sz="1200" b="1" spc="200" kern="0" dirty="0">
+                <a:solidFill>
+                  <a:schemeClr val="accent1"/>
+                </a:solidFill>
+              </a:rPr>
+              <a:t>NEXT</a:t>
+            </a:r>
+            <a:endParaRPr lang="en-US" sz="1200" dirty="0"/>
+          </a:p>
+        </p:txBody>
+      </p:sp>
+      <p:sp>
+        <p:nvSpPr>
+          <p:cNvPr id="6" name="Next title"/>
+          <p:cNvSpPr txBox="1"/>
+          <p:nvPr/>
+        </p:nvSpPr>
+        <p:spPr>
+          <a:xfrm>
+            <a:off x="1005840" y="2560320"/>
+            <a:ext cx="2814218" cy="457200"/>
+          </a:xfrm>
+          <a:prstGeom prst="rect">
+            <a:avLst/>
+          </a:prstGeom>
+          <a:noFill/>
+          <a:ln/>
+        </p:spPr>
+        <p:txBody>
+          <a:bodyPr wrap="square" lIns="0" tIns="0" rIns="0" bIns="0" rtlCol="0" anchor="t"/>
+          <a:lstStyle/>
+          <a:p>
+            <a:pPr indent="0" marL="0">
+              <a:buNone/>
+            </a:pPr>
+            <a:r>
+              <a:rPr lang="en-US" sz="2200" b="1" dirty="0">
+                <a:solidFill>
+                  <a:schemeClr val="tx1"/>
+                </a:solidFill>
+                <a:latin typeface="Century Gothic" pitchFamily="34" charset="0"/>
+                <a:ea typeface="Century Gothic" pitchFamily="34" charset="-122"/>
+                <a:cs typeface="Century Gothic" pitchFamily="34" charset="-120"/>
+              </a:rPr>
+              <a:t>Go live</a:t>
+            </a:r>
+            <a:endParaRPr lang="en-US" sz="2200" dirty="0"/>
+          </a:p>
+        </p:txBody>
+      </p:sp>
+      <p:sp>
+        <p:nvSpPr>
+          <p:cNvPr id="7" name="Next items"/>
+          <p:cNvSpPr txBox="1"/>
+          <p:nvPr/>
+        </p:nvSpPr>
+        <p:spPr>
+          <a:xfrm>
+            <a:off x="1005840" y="3200400"/>
+            <a:ext cx="2814218" cy="2103120"/>
+          </a:xfrm>
+          <a:prstGeom prst="rect">
+            <a:avLst/>
+          </a:prstGeom>
+          <a:noFill/>
+          <a:ln/>
+        </p:spPr>
+        <p:txBody>
+          <a:bodyPr wrap="square" lIns="0" tIns="0" rIns="0" bIns="0" rtlCol="0" anchor="t"/>
+          <a:lstStyle/>
+          <a:p>
+            <a:pPr marL="342900" indent="-342900">
+              <a:spcAft>
+                <a:spcPts val="800"/>
+              </a:spcAft>
+              <a:buSzPct val="100000"/>
+              <a:buChar char="•"/>
+            </a:pPr>
+            <a:r>
+              <a:rPr lang="en-US" sz="1600" dirty="0">
+                <a:solidFill>
+                  <a:schemeClr val="accent3"/>
+                </a:solidFill>
+              </a:rPr>
+              <a:t>Real Wema connection, with consent</a:t>
+            </a:r>
+            <a:endParaRPr lang="en-US" sz="1600" dirty="0"/>
+          </a:p>
+          <a:p>
+            <a:pPr marL="342900" indent="-342900">
+              <a:spcAft>
+                <a:spcPts val="800"/>
+              </a:spcAft>
+              <a:buSzPct val="100000"/>
+              <a:buChar char="•"/>
+            </a:pPr>
+            <a:r>
+              <a:rPr lang="en-US" sz="1600" dirty="0">
+                <a:solidFill>
+                  <a:schemeClr val="accent3"/>
+                </a:solidFill>
+              </a:rPr>
+              <a:t>Live WhatsApp alerts</a:t>
+            </a:r>
+            <a:endParaRPr lang="en-US" sz="1600" dirty="0"/>
+          </a:p>
+          <a:p>
+            <a:pPr marL="342900" indent="-342900">
+              <a:spcAft>
+                <a:spcPts val="800"/>
+              </a:spcAft>
+              <a:buSzPct val="100000"/>
+              <a:buChar char="•"/>
+            </a:pPr>
+            <a:r>
+              <a:rPr lang="en-US" sz="1600" dirty="0">
+                <a:solidFill>
+                  <a:schemeClr val="accent3"/>
+                </a:solidFill>
+              </a:rPr>
+              <a:t>USSD for feature phones</a:t>
+            </a:r>
+            <a:endParaRPr lang="en-US" sz="1600" dirty="0"/>
+          </a:p>
+        </p:txBody>
+      </p:sp>
+      <p:sp>
+        <p:nvSpPr>
+          <p:cNvPr id="8" name="Then card"/>
+          <p:cNvSpPr/>
+          <p:nvPr/>
+        </p:nvSpPr>
+        <p:spPr>
+          <a:xfrm>
+            <a:off x="4368698" y="1965960"/>
+            <a:ext cx="3454298" cy="3520440"/>
+          </a:xfrm>
+          <a:prstGeom prst="roundRect">
+            <a:avLst>
+              <a:gd name="adj" fmla="val 4235"/>
+            </a:avLst>
+          </a:prstGeom>
+          <a:solidFill>
+            <a:srgbClr val="FFFFFF"/>
+          </a:solidFill>
+          <a:ln w="12700">
+            <a:solidFill>
+              <a:srgbClr val="E7DCE5"/>
+            </a:solidFill>
+            <a:prstDash val="solid"/>
+          </a:ln>
+        </p:spPr>
+      </p:sp>
+      <p:sp>
+        <p:nvSpPr>
+          <p:cNvPr id="9" name="Then label"/>
+          <p:cNvSpPr txBox="1"/>
+          <p:nvPr/>
+        </p:nvSpPr>
+        <p:spPr>
+          <a:xfrm>
+            <a:off x="4688738" y="2240280"/>
+            <a:ext cx="2814218" cy="274320"/>
+          </a:xfrm>
+          <a:prstGeom prst="rect">
+            <a:avLst/>
+          </a:prstGeom>
+          <a:noFill/>
+          <a:ln/>
+        </p:spPr>
+        <p:txBody>
+          <a:bodyPr wrap="square" lIns="0" tIns="0" rIns="0" bIns="0" rtlCol="0" anchor="t"/>
+          <a:lstStyle/>
+          <a:p>
+            <a:pPr indent="0" marL="0">
+              <a:buNone/>
+            </a:pPr>
+            <a:r>
+              <a:rPr lang="en-US" sz="1200" b="1" spc="200" kern="0" dirty="0">
+                <a:solidFill>
+                  <a:schemeClr val="accent1"/>
+                </a:solidFill>
+              </a:rPr>
+              <a:t>THEN</a:t>
+            </a:r>
+            <a:endParaRPr lang="en-US" sz="1200" dirty="0"/>
+          </a:p>
+        </p:txBody>
+      </p:sp>
+      <p:sp>
+        <p:nvSpPr>
+          <p:cNvPr id="10" name="Then title"/>
+          <p:cNvSpPr txBox="1"/>
+          <p:nvPr/>
+        </p:nvSpPr>
+        <p:spPr>
+          <a:xfrm>
+            <a:off x="4688738" y="2560320"/>
+            <a:ext cx="2814218" cy="457200"/>
+          </a:xfrm>
+          <a:prstGeom prst="rect">
+            <a:avLst/>
+          </a:prstGeom>
+          <a:noFill/>
+          <a:ln/>
+        </p:spPr>
+        <p:txBody>
+          <a:bodyPr wrap="square" lIns="0" tIns="0" rIns="0" bIns="0" rtlCol="0" anchor="t"/>
+          <a:lstStyle/>
+          <a:p>
+            <a:pPr indent="0" marL="0">
+              <a:buNone/>
+            </a:pPr>
+            <a:r>
+              <a:rPr lang="en-US" sz="2200" b="1" dirty="0">
+                <a:solidFill>
+                  <a:schemeClr val="tx1"/>
+                </a:solidFill>
+                <a:latin typeface="Century Gothic" pitchFamily="34" charset="0"/>
+                <a:ea typeface="Century Gothic" pitchFamily="34" charset="-122"/>
+                <a:cs typeface="Century Gothic" pitchFamily="34" charset="-120"/>
+              </a:rPr>
+              <a:t>Go deeper</a:t>
+            </a:r>
+            <a:endParaRPr lang="en-US" sz="2200" dirty="0"/>
+          </a:p>
+        </p:txBody>
+      </p:sp>
+      <p:sp>
+        <p:nvSpPr>
+          <p:cNvPr id="11" name="Then items"/>
+          <p:cNvSpPr txBox="1"/>
+          <p:nvPr/>
+        </p:nvSpPr>
+        <p:spPr>
+          <a:xfrm>
+            <a:off x="4688738" y="3200400"/>
+            <a:ext cx="2814218" cy="2103120"/>
+          </a:xfrm>
+          <a:prstGeom prst="rect">
+            <a:avLst/>
+          </a:prstGeom>
+          <a:noFill/>
+          <a:ln/>
+        </p:spPr>
+        <p:txBody>
+          <a:bodyPr wrap="square" lIns="0" tIns="0" rIns="0" bIns="0" rtlCol="0" anchor="t"/>
+          <a:lstStyle/>
+          <a:p>
+            <a:pPr marL="342900" indent="-342900">
+              <a:spcAft>
+                <a:spcPts val="800"/>
+              </a:spcAft>
+              <a:buSzPct val="100000"/>
+              <a:buChar char="•"/>
+            </a:pPr>
+            <a:r>
+              <a:rPr lang="en-US" sz="1600" dirty="0">
+                <a:solidFill>
+                  <a:schemeClr val="accent3"/>
+                </a:solidFill>
+              </a:rPr>
+              <a:t>Machine learning on real Wema data</a:t>
+            </a:r>
+            <a:endParaRPr lang="en-US" sz="1600" dirty="0"/>
+          </a:p>
+          <a:p>
+            <a:pPr marL="342900" indent="-342900">
+              <a:spcAft>
+                <a:spcPts val="800"/>
+              </a:spcAft>
+              <a:buSzPct val="100000"/>
+              <a:buChar char="•"/>
+            </a:pPr>
+            <a:r>
+              <a:rPr lang="en-US" sz="1600" dirty="0">
+                <a:solidFill>
+                  <a:schemeClr val="accent3"/>
+                </a:solidFill>
+              </a:rPr>
+              <a:t>Ask NaijaBiz IQ: chat that only quotes real numbers</a:t>
+            </a:r>
+            <a:endParaRPr lang="en-US" sz="1600" dirty="0"/>
+          </a:p>
+          <a:p>
+            <a:pPr marL="342900" indent="-342900">
+              <a:spcAft>
+                <a:spcPts val="800"/>
+              </a:spcAft>
+              <a:buSzPct val="100000"/>
+              <a:buChar char="•"/>
+            </a:pPr>
+            <a:r>
+              <a:rPr lang="en-US" sz="1600" dirty="0">
+                <a:solidFill>
+                  <a:schemeClr val="accent3"/>
+                </a:solidFill>
+              </a:rPr>
+              <a:t>Supplier and stock insights</a:t>
+            </a:r>
+            <a:endParaRPr lang="en-US" sz="1600" dirty="0"/>
+          </a:p>
+        </p:txBody>
+      </p:sp>
+      <p:sp>
+        <p:nvSpPr>
+          <p:cNvPr id="12" name="Later card"/>
+          <p:cNvSpPr/>
+          <p:nvPr/>
+        </p:nvSpPr>
+        <p:spPr>
+          <a:xfrm>
+            <a:off x="8051597" y="1965960"/>
+            <a:ext cx="3454298" cy="3520440"/>
+          </a:xfrm>
+          <a:prstGeom prst="roundRect">
+            <a:avLst>
+              <a:gd name="adj" fmla="val 4235"/>
+            </a:avLst>
+          </a:prstGeom>
+          <a:solidFill>
+            <a:srgbClr val="FFFFFF"/>
+          </a:solidFill>
+          <a:ln w="12700">
+            <a:solidFill>
+              <a:srgbClr val="E7DCE5"/>
+            </a:solidFill>
+            <a:prstDash val="solid"/>
+          </a:ln>
+        </p:spPr>
+      </p:sp>
+      <p:sp>
+        <p:nvSpPr>
+          <p:cNvPr id="13" name="Later label"/>
+          <p:cNvSpPr txBox="1"/>
+          <p:nvPr/>
+        </p:nvSpPr>
+        <p:spPr>
+          <a:xfrm>
+            <a:off x="8371637" y="2240280"/>
+            <a:ext cx="2814218" cy="274320"/>
+          </a:xfrm>
+          <a:prstGeom prst="rect">
+            <a:avLst/>
+          </a:prstGeom>
+          <a:noFill/>
+          <a:ln/>
+        </p:spPr>
+        <p:txBody>
+          <a:bodyPr wrap="square" lIns="0" tIns="0" rIns="0" bIns="0" rtlCol="0" anchor="t"/>
+          <a:lstStyle/>
+          <a:p>
+            <a:pPr indent="0" marL="0">
+              <a:buNone/>
+            </a:pPr>
+            <a:r>
+              <a:rPr lang="en-US" sz="1200" b="1" spc="200" kern="0" dirty="0">
+                <a:solidFill>
+                  <a:schemeClr val="accent1"/>
+                </a:solidFill>
+              </a:rPr>
+              <a:t>LATER</a:t>
+            </a:r>
+            <a:endParaRPr lang="en-US" sz="1200" dirty="0"/>
+          </a:p>
+        </p:txBody>
+      </p:sp>
+      <p:sp>
+        <p:nvSpPr>
+          <p:cNvPr id="14" name="Later title"/>
+          <p:cNvSpPr txBox="1"/>
+          <p:nvPr/>
+        </p:nvSpPr>
+        <p:spPr>
+          <a:xfrm>
+            <a:off x="8371637" y="2560320"/>
+            <a:ext cx="2814218" cy="457200"/>
+          </a:xfrm>
+          <a:prstGeom prst="rect">
+            <a:avLst/>
+          </a:prstGeom>
+          <a:noFill/>
+          <a:ln/>
+        </p:spPr>
+        <p:txBody>
+          <a:bodyPr wrap="square" lIns="0" tIns="0" rIns="0" bIns="0" rtlCol="0" anchor="t"/>
+          <a:lstStyle/>
+          <a:p>
+            <a:pPr indent="0" marL="0">
+              <a:buNone/>
+            </a:pPr>
+            <a:r>
+              <a:rPr lang="en-US" sz="2200" b="1" dirty="0">
+                <a:solidFill>
+                  <a:schemeClr val="tx1"/>
+                </a:solidFill>
+                <a:latin typeface="Century Gothic" pitchFamily="34" charset="0"/>
+                <a:ea typeface="Century Gothic" pitchFamily="34" charset="-122"/>
+                <a:cs typeface="Century Gothic" pitchFamily="34" charset="-120"/>
+              </a:rPr>
+              <a:t>Grow with Wema</a:t>
+            </a:r>
+            <a:endParaRPr lang="en-US" sz="2200" dirty="0"/>
+          </a:p>
+        </p:txBody>
+      </p:sp>
+      <p:sp>
+        <p:nvSpPr>
+          <p:cNvPr id="15" name="Later items"/>
+          <p:cNvSpPr txBox="1"/>
+          <p:nvPr/>
+        </p:nvSpPr>
+        <p:spPr>
+          <a:xfrm>
+            <a:off x="8371637" y="3200400"/>
+            <a:ext cx="2814218" cy="2103120"/>
+          </a:xfrm>
+          <a:prstGeom prst="rect">
+            <a:avLst/>
+          </a:prstGeom>
+          <a:noFill/>
+          <a:ln/>
+        </p:spPr>
+        <p:txBody>
+          <a:bodyPr wrap="square" lIns="0" tIns="0" rIns="0" bIns="0" rtlCol="0" anchor="t"/>
+          <a:lstStyle/>
+          <a:p>
+            <a:pPr marL="342900" indent="-342900">
+              <a:spcAft>
+                <a:spcPts val="800"/>
+              </a:spcAft>
+              <a:buSzPct val="100000"/>
+              <a:buChar char="•"/>
+            </a:pPr>
+            <a:r>
+              <a:rPr lang="en-US" sz="1600" dirty="0">
+                <a:solidFill>
+                  <a:schemeClr val="accent3"/>
+                </a:solidFill>
+              </a:rPr>
+              <a:t>Local languages: Pidgin, Yoruba, Hausa, Igbo</a:t>
+            </a:r>
+            <a:endParaRPr lang="en-US" sz="1600" dirty="0"/>
+          </a:p>
+          <a:p>
+            <a:pPr marL="342900" indent="-342900">
+              <a:spcAft>
+                <a:spcPts val="800"/>
+              </a:spcAft>
+              <a:buSzPct val="100000"/>
+              <a:buChar char="•"/>
+            </a:pPr>
+            <a:r>
+              <a:rPr lang="en-US" sz="1600" dirty="0">
+                <a:solidFill>
+                  <a:schemeClr val="accent3"/>
+                </a:solidFill>
+              </a:rPr>
+              <a:t>Personalized Wema services</a:t>
+            </a:r>
+            <a:endParaRPr lang="en-US" sz="1600" dirty="0"/>
+          </a:p>
+          <a:p>
+            <a:pPr marL="342900" indent="-342900">
+              <a:spcAft>
+                <a:spcPts val="800"/>
+              </a:spcAft>
+              <a:buSzPct val="100000"/>
+              <a:buChar char="•"/>
+            </a:pPr>
+            <a:r>
+              <a:rPr lang="en-US" sz="1600" dirty="0">
+                <a:solidFill>
+                  <a:schemeClr val="accent3"/>
+                </a:solidFill>
+              </a:rPr>
+              <a:t>Responsible financing pathways</a:t>
+            </a:r>
+            <a:endParaRPr lang="en-US" sz="1600" dirty="0"/>
+          </a:p>
+        </p:txBody>
+      </p:sp>
+      <p:sp>
+        <p:nvSpPr>
+          <p:cNvPr id="25" name="Slide Number Placeholder 0"/>
+          <p:cNvSpPr>
+            <a:spLocks noGrp="1"/>
+          </p:cNvSpPr>
+          <p:nvPr>
+            <p:ph type="sldNum" sz="quarter" idx="4294967295"/>
+          </p:nvPr>
+        </p:nvSpPr>
+        <p:spPr>
+          <a:xfrm>
+            <a:off x="10972800" y="6263640"/>
+            <a:ext cx="530352" cy="320040"/>
+          </a:xfrm>
+          <a:prstGeom prst="rect">
+            <a:avLst/>
+          </a:prstGeom>
+          <a:extLst>
+            <a:ext uri="{C572A759-6A51-4108-AA02-DFA0A04FC94B}">
+              <ma14:wrappingTextBoxFlag xmlns:ma14="http://schemas.microsoft.com/office/mac/drawingml/2011/main" val="0"/>
+            </a:ext>
+          </a:extLst>
+        </p:spPr>
+        <p:txBody>
+          <a:bodyPr/>
+          <a:lstStyle>
+            <a:lvl1pPr>
+              <a:defRPr sz="1200">
+                <a:solidFill>
+                  <a:srgbClr val="6E6370"/>
+                </a:solidFill>
+              </a:defRPr>
+            </a:lvl1pPr>
+          </a:lstStyle>
+          <a:p>
+            <a:pPr algn="r"/>
+            <a:fld id="{F7021451-1387-4CA6-816F-3879F97B5CBC}" type="slidenum">
+              <a:rPr b="0" lang="en-US"/>
+              <a:t>13</a:t>
+            </a:fld>
+            <a:endParaRPr lang="en-US"/>
+          </a:p>
+        </p:txBody>
+      </p:sp>
+    </p:spTree>
+  </p:cSld>
+  <p:clrMapOvr>
+    <a:masterClrMapping/>
+  </p:clrMapOvr>
+</p:sld>
+</file>
+
+<file path=ppt/slides/slide14.xml><?xml version="1.0" encoding="utf-8"?>
+<p:sld xmlns:a="http://schemas.openxmlformats.org/drawingml/2006/main" xmlns:r="http://schemas.openxmlformats.org/officeDocument/2006/relationships" xmlns:p="http://schemas.openxmlformats.org/presentationml/2006/main">
+  <p:cSld name="Slide 14">
     <p:spTree>
       <p:nvGrpSpPr>
         <p:cNvPr id="1" name=""/>
@@ -7541,7 +9584,7 @@
                   <a:schemeClr val="accent1"/>
                 </a:solidFill>
               </a:rPr>
-              <a:t>THE PRODUCT</a:t>
+              <a:t>THE INTELLIGENCE</a:t>
             </a:r>
             <a:endParaRPr lang="en-US" sz="1400" dirty="0"/>
           </a:p>
@@ -7582,53 +9625,562 @@
                 <a:ea typeface="Century Gothic" pitchFamily="34" charset="-122"/>
                 <a:cs typeface="Century Gothic" pitchFamily="34" charset="-120"/>
               </a:rPr>
-              <a:t>Aisha's business, in plain words</a:t>
+              <a:t>Explainable AI: calculated, never made up</a:t>
             </a:r>
             <a:endParaRPr lang="en-US" sz="3400" dirty="0"/>
           </a:p>
         </p:txBody>
       </p:sp>
-      <p:pic>
-        <p:nvPicPr>
-          <p:cNvPr id="4" name="Dashboard screenshot" descr="NaijaBiz IQ dashboard for Aisha Mini Mart: key insight, sales, spending, cash balance and Business Health Score">    </p:cNvPr>
-          <p:cNvPicPr>
-            <a:picLocks noChangeAspect="1"/>
-          </p:cNvPicPr>
-          <p:nvPr/>
-        </p:nvPicPr>
-        <p:blipFill>
-          <a:blip r:embed="rId1"/>
-          <a:stretch>
-            <a:fillRect/>
-          </a:stretch>
-        </p:blipFill>
-        <p:spPr>
-          <a:xfrm>
-            <a:off x="685800" y="1965960"/>
-            <a:ext cx="6766560" cy="3804332"/>
-          </a:xfrm>
-          <a:prstGeom prst="rect">
-            <a:avLst/>
-          </a:prstGeom>
-          <a:effectLst>
-            <a:outerShdw sx="100000" sy="100000" kx="0" ky="0" algn="bl" rotWithShape="0" blurRad="228600" dist="76200" dir="5400000">
-              <a:srgbClr val="3B1439">
-                <a:alpha val="18000"/>
-              </a:srgbClr>
-            </a:outerShdw>
-          </a:effectLst>
-        </p:spPr>
-      </p:pic>
-      <p:sp>
-        <p:nvSpPr>
-          <p:cNvPr id="5" name="Callout 1 figure"/>
+      <p:graphicFrame>
+        <p:nvGraphicFramePr>
+          <p:cNvPr id="7" name="How each part works"/>
+          <p:cNvGraphicFramePr>
+            <a:graphicFrameLocks noGrp="1"/>
+          </p:cNvGraphicFramePr>
+          <p:nvPr>
+            <p:extLst>
+              <p:ext uri="{D42A27DB-BD31-4B8C-83A1-F6EECF244321}">
+                <p14:modId xmlns:p14="http://schemas.microsoft.com/office/powerpoint/2010/main" val="1579011935"/>
+              </p:ext>
+            </p:extLst>
+          </p:nvPr>
+        </p:nvGraphicFramePr>
+        <p:xfrm>
+          <a:off x="685800" y="1965960"/>
+          <a:ext cx="10820095" cy="914400"/>
+        </p:xfrm>
+        <a:graphic>
+          <a:graphicData uri="http://schemas.openxmlformats.org/drawingml/2006/table">
+            <a:tbl>
+              <a:tblPr/>
+              <a:tblGrid>
+                <a:gridCol w="2377440"/>
+                <a:gridCol w="8442655"/>
+              </a:tblGrid>
+              <a:tr h="0">
+                <a:tc>
+                  <a:txBody>
+                    <a:bodyPr/>
+                    <a:lstStyle/>
+                    <a:p>
+                      <a:pPr indent="0" marL="0">
+                        <a:buNone/>
+                      </a:pPr>
+                      <a:r>
+                        <a:rPr lang="en-US" sz="1500" b="1" dirty="0">
+                          <a:solidFill>
+                            <a:schemeClr val="accent1"/>
+                          </a:solidFill>
+                          <a:latin typeface="Calibri" pitchFamily="34" charset="0"/>
+                          <a:ea typeface="Calibri" pitchFamily="34" charset="-122"/>
+                          <a:cs typeface="Calibri" pitchFamily="34" charset="-120"/>
+                        </a:rPr>
+                        <a:t>Categorize</a:t>
+                      </a:r>
+                      <a:endParaRPr lang="en-US" sz="1500" dirty="0">
+                        <a:latin typeface="Calibri" charset="0"/>
+                        <a:ea typeface="Calibri" charset="0"/>
+                        <a:cs typeface="Calibri" charset="0"/>
+                      </a:endParaRPr>
+                    </a:p>
+                  </a:txBody>
+                  <a:tcPr marL="0" marR="91440" marT="109728" marB="109728">
+                    <a:lnL w="0" cap="flat" cmpd="sng" algn="ctr">
+                      <a:noFill/>
+                    </a:lnL>
+                    <a:lnR w="0" cap="flat" cmpd="sng" algn="ctr">
+                      <a:noFill/>
+                    </a:lnR>
+                    <a:lnT w="0" cap="flat" cmpd="sng" algn="ctr">
+                      <a:noFill/>
+                    </a:lnT>
+                    <a:lnB w="12700" cap="flat" cmpd="sng" algn="ctr">
+                      <a:solidFill>
+                        <a:srgbClr val="E7DCE5"/>
+                      </a:solidFill>
+                      <a:prstDash val="solid"/>
+                      <a:round/>
+                      <a:headEnd type="none" w="med" len="med"/>
+                      <a:tailEnd type="none" w="med" len="med"/>
+                    </a:lnB>
+                    <a:solidFill>
+                      <a:srgbClr val="F4EDF3"/>
+                    </a:solidFill>
+                  </a:tcPr>
+                </a:tc>
+                <a:tc>
+                  <a:txBody>
+                    <a:bodyPr/>
+                    <a:lstStyle/>
+                    <a:p>
+                      <a:pPr indent="0" marL="0">
+                        <a:buNone/>
+                      </a:pPr>
+                      <a:r>
+                        <a:rPr lang="en-US" sz="1500" dirty="0">
+                          <a:solidFill>
+                            <a:schemeClr val="tx1"/>
+                          </a:solidFill>
+                          <a:latin typeface="Calibri" pitchFamily="34" charset="0"/>
+                          <a:ea typeface="Calibri" pitchFamily="34" charset="-122"/>
+                          <a:cs typeface="Calibri" pitchFamily="34" charset="-120"/>
+                        </a:rPr>
+                        <a:t>Scores 6 signals per transaction (description, who was paid, their history, channel, amount, timing) and learns from Aisha's answers. 97.6% correct; it asks when unsure.</a:t>
+                      </a:r>
+                      <a:endParaRPr lang="en-US" sz="1500" dirty="0">
+                        <a:latin typeface="Calibri" charset="0"/>
+                        <a:ea typeface="Calibri" charset="0"/>
+                        <a:cs typeface="Calibri" charset="0"/>
+                      </a:endParaRPr>
+                    </a:p>
+                  </a:txBody>
+                  <a:tcPr marL="0" marR="91440" marT="109728" marB="109728">
+                    <a:lnL w="0" cap="flat" cmpd="sng" algn="ctr">
+                      <a:noFill/>
+                    </a:lnL>
+                    <a:lnR w="0" cap="flat" cmpd="sng" algn="ctr">
+                      <a:noFill/>
+                    </a:lnR>
+                    <a:lnT w="0" cap="flat" cmpd="sng" algn="ctr">
+                      <a:noFill/>
+                    </a:lnT>
+                    <a:lnB w="12700" cap="flat" cmpd="sng" algn="ctr">
+                      <a:solidFill>
+                        <a:srgbClr val="E7DCE5"/>
+                      </a:solidFill>
+                      <a:prstDash val="solid"/>
+                      <a:round/>
+                      <a:headEnd type="none" w="med" len="med"/>
+                      <a:tailEnd type="none" w="med" len="med"/>
+                    </a:lnB>
+                    <a:solidFill>
+                      <a:srgbClr val="F4EDF3"/>
+                    </a:solidFill>
+                  </a:tcPr>
+                </a:tc>
+              </a:tr>
+              <a:tr h="0">
+                <a:tc>
+                  <a:txBody>
+                    <a:bodyPr/>
+                    <a:lstStyle/>
+                    <a:p>
+                      <a:pPr indent="0" marL="0">
+                        <a:buNone/>
+                      </a:pPr>
+                      <a:r>
+                        <a:rPr lang="en-US" sz="1500" b="1" dirty="0">
+                          <a:solidFill>
+                            <a:schemeClr val="accent1"/>
+                          </a:solidFill>
+                          <a:latin typeface="Calibri" pitchFamily="34" charset="0"/>
+                          <a:ea typeface="Calibri" pitchFamily="34" charset="-122"/>
+                          <a:cs typeface="Calibri" pitchFamily="34" charset="-120"/>
+                        </a:rPr>
+                        <a:t>Forecast</a:t>
+                      </a:r>
+                      <a:endParaRPr lang="en-US" sz="1500" dirty="0">
+                        <a:latin typeface="Calibri" charset="0"/>
+                        <a:ea typeface="Calibri" charset="0"/>
+                        <a:cs typeface="Calibri" charset="0"/>
+                      </a:endParaRPr>
+                    </a:p>
+                  </a:txBody>
+                  <a:tcPr marL="0" marR="91440" marT="109728" marB="109728">
+                    <a:lnL w="0" cap="flat" cmpd="sng" algn="ctr">
+                      <a:noFill/>
+                    </a:lnL>
+                    <a:lnR w="0" cap="flat" cmpd="sng" algn="ctr">
+                      <a:noFill/>
+                    </a:lnR>
+                    <a:lnT w="0" cap="flat" cmpd="sng" algn="ctr">
+                      <a:noFill/>
+                    </a:lnT>
+                    <a:lnB w="12700" cap="flat" cmpd="sng" algn="ctr">
+                      <a:solidFill>
+                        <a:srgbClr val="E7DCE5"/>
+                      </a:solidFill>
+                      <a:prstDash val="solid"/>
+                      <a:round/>
+                      <a:headEnd type="none" w="med" len="med"/>
+                      <a:tailEnd type="none" w="med" len="med"/>
+                    </a:lnB>
+                    <a:solidFill>
+                      <a:srgbClr val="F4EDF3"/>
+                    </a:solidFill>
+                  </a:tcPr>
+                </a:tc>
+                <a:tc>
+                  <a:txBody>
+                    <a:bodyPr/>
+                    <a:lstStyle/>
+                    <a:p>
+                      <a:pPr indent="0" marL="0">
+                        <a:buNone/>
+                      </a:pPr>
+                      <a:r>
+                        <a:rPr lang="en-US" sz="1500" dirty="0">
+                          <a:solidFill>
+                            <a:schemeClr val="tx1"/>
+                          </a:solidFill>
+                          <a:latin typeface="Calibri" pitchFamily="34" charset="0"/>
+                          <a:ea typeface="Calibri" pitchFamily="34" charset="-122"/>
+                          <a:cs typeface="Calibri" pitchFamily="34" charset="-120"/>
+                        </a:rPr>
+                        <a:t>Finds regular payments from their timing and amounts, then projects her cash day by day for 14 days against a safety reserve.</a:t>
+                      </a:r>
+                      <a:endParaRPr lang="en-US" sz="1500" dirty="0">
+                        <a:latin typeface="Calibri" charset="0"/>
+                        <a:ea typeface="Calibri" charset="0"/>
+                        <a:cs typeface="Calibri" charset="0"/>
+                      </a:endParaRPr>
+                    </a:p>
+                  </a:txBody>
+                  <a:tcPr marL="0" marR="91440" marT="109728" marB="109728">
+                    <a:lnL w="0" cap="flat" cmpd="sng" algn="ctr">
+                      <a:noFill/>
+                    </a:lnL>
+                    <a:lnR w="0" cap="flat" cmpd="sng" algn="ctr">
+                      <a:noFill/>
+                    </a:lnR>
+                    <a:lnT w="0" cap="flat" cmpd="sng" algn="ctr">
+                      <a:noFill/>
+                    </a:lnT>
+                    <a:lnB w="12700" cap="flat" cmpd="sng" algn="ctr">
+                      <a:solidFill>
+                        <a:srgbClr val="E7DCE5"/>
+                      </a:solidFill>
+                      <a:prstDash val="solid"/>
+                      <a:round/>
+                      <a:headEnd type="none" w="med" len="med"/>
+                      <a:tailEnd type="none" w="med" len="med"/>
+                    </a:lnB>
+                    <a:solidFill>
+                      <a:srgbClr val="F4EDF3"/>
+                    </a:solidFill>
+                  </a:tcPr>
+                </a:tc>
+              </a:tr>
+              <a:tr h="0">
+                <a:tc>
+                  <a:txBody>
+                    <a:bodyPr/>
+                    <a:lstStyle/>
+                    <a:p>
+                      <a:pPr indent="0" marL="0">
+                        <a:buNone/>
+                      </a:pPr>
+                      <a:r>
+                        <a:rPr lang="en-US" sz="1500" b="1" dirty="0">
+                          <a:solidFill>
+                            <a:schemeClr val="accent1"/>
+                          </a:solidFill>
+                          <a:latin typeface="Calibri" pitchFamily="34" charset="0"/>
+                          <a:ea typeface="Calibri" pitchFamily="34" charset="-122"/>
+                          <a:cs typeface="Calibri" pitchFamily="34" charset="-120"/>
+                        </a:rPr>
+                        <a:t>Health &amp; Readiness</a:t>
+                      </a:r>
+                      <a:endParaRPr lang="en-US" sz="1500" dirty="0">
+                        <a:latin typeface="Calibri" charset="0"/>
+                        <a:ea typeface="Calibri" charset="0"/>
+                        <a:cs typeface="Calibri" charset="0"/>
+                      </a:endParaRPr>
+                    </a:p>
+                  </a:txBody>
+                  <a:tcPr marL="0" marR="91440" marT="109728" marB="109728">
+                    <a:lnL w="0" cap="flat" cmpd="sng" algn="ctr">
+                      <a:noFill/>
+                    </a:lnL>
+                    <a:lnR w="0" cap="flat" cmpd="sng" algn="ctr">
+                      <a:noFill/>
+                    </a:lnR>
+                    <a:lnT w="0" cap="flat" cmpd="sng" algn="ctr">
+                      <a:noFill/>
+                    </a:lnT>
+                    <a:lnB w="12700" cap="flat" cmpd="sng" algn="ctr">
+                      <a:solidFill>
+                        <a:srgbClr val="E7DCE5"/>
+                      </a:solidFill>
+                      <a:prstDash val="solid"/>
+                      <a:round/>
+                      <a:headEnd type="none" w="med" len="med"/>
+                      <a:tailEnd type="none" w="med" len="med"/>
+                    </a:lnB>
+                    <a:solidFill>
+                      <a:srgbClr val="F4EDF3"/>
+                    </a:solidFill>
+                  </a:tcPr>
+                </a:tc>
+                <a:tc>
+                  <a:txBody>
+                    <a:bodyPr/>
+                    <a:lstStyle/>
+                    <a:p>
+                      <a:pPr indent="0" marL="0">
+                        <a:buNone/>
+                      </a:pPr>
+                      <a:r>
+                        <a:rPr lang="en-US" sz="1500" dirty="0">
+                          <a:solidFill>
+                            <a:schemeClr val="tx1"/>
+                          </a:solidFill>
+                          <a:latin typeface="Calibri" pitchFamily="34" charset="0"/>
+                          <a:ea typeface="Calibri" pitchFamily="34" charset="-122"/>
+                          <a:cs typeface="Calibri" pitchFamily="34" charset="-120"/>
+                        </a:rPr>
+                        <a:t>Weighted scores where every part has a written reason.</a:t>
+                      </a:r>
+                      <a:endParaRPr lang="en-US" sz="1500" dirty="0">
+                        <a:latin typeface="Calibri" charset="0"/>
+                        <a:ea typeface="Calibri" charset="0"/>
+                        <a:cs typeface="Calibri" charset="0"/>
+                      </a:endParaRPr>
+                    </a:p>
+                  </a:txBody>
+                  <a:tcPr marL="0" marR="91440" marT="109728" marB="109728">
+                    <a:lnL w="0" cap="flat" cmpd="sng" algn="ctr">
+                      <a:noFill/>
+                    </a:lnL>
+                    <a:lnR w="0" cap="flat" cmpd="sng" algn="ctr">
+                      <a:noFill/>
+                    </a:lnR>
+                    <a:lnT w="0" cap="flat" cmpd="sng" algn="ctr">
+                      <a:noFill/>
+                    </a:lnT>
+                    <a:lnB w="12700" cap="flat" cmpd="sng" algn="ctr">
+                      <a:solidFill>
+                        <a:srgbClr val="E7DCE5"/>
+                      </a:solidFill>
+                      <a:prstDash val="solid"/>
+                      <a:round/>
+                      <a:headEnd type="none" w="med" len="med"/>
+                      <a:tailEnd type="none" w="med" len="med"/>
+                    </a:lnB>
+                    <a:solidFill>
+                      <a:srgbClr val="F4EDF3"/>
+                    </a:solidFill>
+                  </a:tcPr>
+                </a:tc>
+              </a:tr>
+              <a:tr h="0">
+                <a:tc>
+                  <a:txBody>
+                    <a:bodyPr/>
+                    <a:lstStyle/>
+                    <a:p>
+                      <a:pPr indent="0" marL="0">
+                        <a:buNone/>
+                      </a:pPr>
+                      <a:r>
+                        <a:rPr lang="en-US" sz="1500" b="1" dirty="0">
+                          <a:solidFill>
+                            <a:schemeClr val="accent1"/>
+                          </a:solidFill>
+                          <a:latin typeface="Calibri" pitchFamily="34" charset="0"/>
+                          <a:ea typeface="Calibri" pitchFamily="34" charset="-122"/>
+                          <a:cs typeface="Calibri" pitchFamily="34" charset="-120"/>
+                        </a:rPr>
+                        <a:t>Recommend</a:t>
+                      </a:r>
+                      <a:endParaRPr lang="en-US" sz="1500" dirty="0">
+                        <a:latin typeface="Calibri" charset="0"/>
+                        <a:ea typeface="Calibri" charset="0"/>
+                        <a:cs typeface="Calibri" charset="0"/>
+                      </a:endParaRPr>
+                    </a:p>
+                  </a:txBody>
+                  <a:tcPr marL="0" marR="91440" marT="109728" marB="109728">
+                    <a:lnL w="0" cap="flat" cmpd="sng" algn="ctr">
+                      <a:noFill/>
+                    </a:lnL>
+                    <a:lnR w="0" cap="flat" cmpd="sng" algn="ctr">
+                      <a:noFill/>
+                    </a:lnR>
+                    <a:lnT w="0" cap="flat" cmpd="sng" algn="ctr">
+                      <a:noFill/>
+                    </a:lnT>
+                    <a:lnB w="12700" cap="flat" cmpd="sng" algn="ctr">
+                      <a:solidFill>
+                        <a:srgbClr val="E7DCE5"/>
+                      </a:solidFill>
+                      <a:prstDash val="solid"/>
+                      <a:round/>
+                      <a:headEnd type="none" w="med" len="med"/>
+                      <a:tailEnd type="none" w="med" len="med"/>
+                    </a:lnB>
+                    <a:solidFill>
+                      <a:srgbClr val="F4EDF3"/>
+                    </a:solidFill>
+                  </a:tcPr>
+                </a:tc>
+                <a:tc>
+                  <a:txBody>
+                    <a:bodyPr/>
+                    <a:lstStyle/>
+                    <a:p>
+                      <a:pPr indent="0" marL="0">
+                        <a:buNone/>
+                      </a:pPr>
+                      <a:r>
+                        <a:rPr lang="en-US" sz="1500" dirty="0">
+                          <a:solidFill>
+                            <a:schemeClr val="tx1"/>
+                          </a:solidFill>
+                          <a:latin typeface="Calibri" pitchFamily="34" charset="0"/>
+                          <a:ea typeface="Calibri" pitchFamily="34" charset="-122"/>
+                          <a:cs typeface="Calibri" pitchFamily="34" charset="-120"/>
+                        </a:rPr>
+                        <a:t>Rules fire on measured signals, and each recommendation shows the number behind it.</a:t>
+                      </a:r>
+                      <a:endParaRPr lang="en-US" sz="1500" dirty="0">
+                        <a:latin typeface="Calibri" charset="0"/>
+                        <a:ea typeface="Calibri" charset="0"/>
+                        <a:cs typeface="Calibri" charset="0"/>
+                      </a:endParaRPr>
+                    </a:p>
+                  </a:txBody>
+                  <a:tcPr marL="0" marR="91440" marT="109728" marB="109728">
+                    <a:lnL w="0" cap="flat" cmpd="sng" algn="ctr">
+                      <a:noFill/>
+                    </a:lnL>
+                    <a:lnR w="0" cap="flat" cmpd="sng" algn="ctr">
+                      <a:noFill/>
+                    </a:lnR>
+                    <a:lnT w="0" cap="flat" cmpd="sng" algn="ctr">
+                      <a:noFill/>
+                    </a:lnT>
+                    <a:lnB w="12700" cap="flat" cmpd="sng" algn="ctr">
+                      <a:solidFill>
+                        <a:srgbClr val="E7DCE5"/>
+                      </a:solidFill>
+                      <a:prstDash val="solid"/>
+                      <a:round/>
+                      <a:headEnd type="none" w="med" len="med"/>
+                      <a:tailEnd type="none" w="med" len="med"/>
+                    </a:lnB>
+                    <a:solidFill>
+                      <a:srgbClr val="F4EDF3"/>
+                    </a:solidFill>
+                  </a:tcPr>
+                </a:tc>
+              </a:tr>
+              <a:tr h="0">
+                <a:tc>
+                  <a:txBody>
+                    <a:bodyPr/>
+                    <a:lstStyle/>
+                    <a:p>
+                      <a:pPr indent="0" marL="0">
+                        <a:buNone/>
+                      </a:pPr>
+                      <a:r>
+                        <a:rPr lang="en-US" sz="1500" b="1" dirty="0">
+                          <a:solidFill>
+                            <a:schemeClr val="accent1"/>
+                          </a:solidFill>
+                          <a:latin typeface="Calibri" pitchFamily="34" charset="0"/>
+                          <a:ea typeface="Calibri" pitchFamily="34" charset="-122"/>
+                          <a:cs typeface="Calibri" pitchFamily="34" charset="-120"/>
+                        </a:rPr>
+                        <a:t>Explain</a:t>
+                      </a:r>
+                      <a:endParaRPr lang="en-US" sz="1500" dirty="0">
+                        <a:latin typeface="Calibri" charset="0"/>
+                        <a:ea typeface="Calibri" charset="0"/>
+                        <a:cs typeface="Calibri" charset="0"/>
+                      </a:endParaRPr>
+                    </a:p>
+                  </a:txBody>
+                  <a:tcPr marL="0" marR="91440" marT="109728" marB="109728">
+                    <a:lnL w="0" cap="flat" cmpd="sng" algn="ctr">
+                      <a:noFill/>
+                    </a:lnL>
+                    <a:lnR w="0" cap="flat" cmpd="sng" algn="ctr">
+                      <a:noFill/>
+                    </a:lnR>
+                    <a:lnT w="0" cap="flat" cmpd="sng" algn="ctr">
+                      <a:noFill/>
+                    </a:lnT>
+                    <a:lnB w="12700" cap="flat" cmpd="sng" algn="ctr">
+                      <a:solidFill>
+                        <a:srgbClr val="E7DCE5"/>
+                      </a:solidFill>
+                      <a:prstDash val="solid"/>
+                      <a:round/>
+                      <a:headEnd type="none" w="med" len="med"/>
+                      <a:tailEnd type="none" w="med" len="med"/>
+                    </a:lnB>
+                    <a:solidFill>
+                      <a:srgbClr val="F4EDF3"/>
+                    </a:solidFill>
+                  </a:tcPr>
+                </a:tc>
+                <a:tc>
+                  <a:txBody>
+                    <a:bodyPr/>
+                    <a:lstStyle/>
+                    <a:p>
+                      <a:pPr indent="0" marL="0">
+                        <a:buNone/>
+                      </a:pPr>
+                      <a:r>
+                        <a:rPr lang="en-US" sz="1500" dirty="0">
+                          <a:solidFill>
+                            <a:schemeClr val="tx1"/>
+                          </a:solidFill>
+                          <a:latin typeface="Calibri" pitchFamily="34" charset="0"/>
+                          <a:ea typeface="Calibri" pitchFamily="34" charset="-122"/>
+                          <a:cs typeface="Calibri" pitchFamily="34" charset="-120"/>
+                        </a:rPr>
+                        <a:t>Plain-English insights from templates; a checker rejects any number the engine didn't produce.</a:t>
+                      </a:r>
+                      <a:endParaRPr lang="en-US" sz="1500" dirty="0">
+                        <a:latin typeface="Calibri" charset="0"/>
+                        <a:ea typeface="Calibri" charset="0"/>
+                        <a:cs typeface="Calibri" charset="0"/>
+                      </a:endParaRPr>
+                    </a:p>
+                  </a:txBody>
+                  <a:tcPr marL="0" marR="91440" marT="109728" marB="109728">
+                    <a:lnL w="0" cap="flat" cmpd="sng" algn="ctr">
+                      <a:noFill/>
+                    </a:lnL>
+                    <a:lnR w="0" cap="flat" cmpd="sng" algn="ctr">
+                      <a:noFill/>
+                    </a:lnR>
+                    <a:lnT w="0" cap="flat" cmpd="sng" algn="ctr">
+                      <a:noFill/>
+                    </a:lnT>
+                    <a:lnB w="12700" cap="flat" cmpd="sng" algn="ctr">
+                      <a:solidFill>
+                        <a:srgbClr val="E7DCE5"/>
+                      </a:solidFill>
+                      <a:prstDash val="solid"/>
+                      <a:round/>
+                      <a:headEnd type="none" w="med" len="med"/>
+                      <a:tailEnd type="none" w="med" len="med"/>
+                    </a:lnB>
+                    <a:solidFill>
+                      <a:srgbClr val="F4EDF3"/>
+                    </a:solidFill>
+                  </a:tcPr>
+                </a:tc>
+              </a:tr>
+            </a:tbl>
+          </a:graphicData>
+        </a:graphic>
+      </p:graphicFrame>
+      <p:sp>
+        <p:nvSpPr>
+          <p:cNvPr id="5" name="Principle"/>
           <p:cNvSpPr txBox="1"/>
           <p:nvPr/>
         </p:nvSpPr>
         <p:spPr>
           <a:xfrm>
-            <a:off x="7909560" y="1965960"/>
-            <a:ext cx="3596335" cy="457200"/>
+            <a:off x="685800" y="5120640"/>
+            <a:ext cx="10820095" cy="548640"/>
           </a:xfrm>
           <a:prstGeom prst="rect">
             <a:avLst/>
@@ -7644,30 +10196,38 @@
               <a:buNone/>
             </a:pPr>
             <a:r>
-              <a:rPr lang="en-US" sz="2600" b="1" dirty="0">
-                <a:solidFill>
-                  <a:schemeClr val="accent1"/>
-                </a:solidFill>
-                <a:latin typeface="Century Gothic" pitchFamily="34" charset="0"/>
-                <a:ea typeface="Century Gothic" pitchFamily="34" charset="-122"/>
-                <a:cs typeface="Century Gothic" pitchFamily="34" charset="-120"/>
-              </a:rPr>
-              <a:t>+12% vs +31%</a:t>
-            </a:r>
-            <a:endParaRPr lang="en-US" sz="2600" dirty="0"/>
-          </a:p>
-        </p:txBody>
-      </p:sp>
-      <p:sp>
-        <p:nvSpPr>
-          <p:cNvPr id="6" name="Callout 1 label"/>
+              <a:rPr lang="en-US" sz="1700" b="1" dirty="0">
+                <a:solidFill>
+                  <a:schemeClr val="tx1"/>
+                </a:solidFill>
+              </a:rPr>
+              <a:t>No black box. </a:t>
+            </a:r>
+            <a:pPr indent="0" marL="0">
+              <a:buNone/>
+            </a:pPr>
+            <a:r>
+              <a:rPr lang="en-US" sz="1700" dirty="0">
+                <a:solidFill>
+                  <a:schemeClr val="tx1"/>
+                </a:solidFill>
+              </a:rPr>
+              <a:t>Every number is calculated, never generated, so a bank can audit why the app told a customer something.</a:t>
+            </a:r>
+            <a:endParaRPr lang="en-US" sz="1700" dirty="0"/>
+          </a:p>
+        </p:txBody>
+      </p:sp>
+      <p:sp>
+        <p:nvSpPr>
+          <p:cNvPr id="6" name="Honesty note"/>
           <p:cNvSpPr txBox="1"/>
           <p:nvPr/>
         </p:nvSpPr>
         <p:spPr>
           <a:xfrm>
-            <a:off x="7909560" y="2423160"/>
-            <a:ext cx="3596335" cy="411480"/>
+            <a:off x="685800" y="5760720"/>
+            <a:ext cx="10820095" cy="365760"/>
           </a:xfrm>
           <a:prstGeom prst="rect">
             <a:avLst/>
@@ -7683,239 +10243,14 @@
               <a:buNone/>
             </a:pPr>
             <a:r>
-              <a:rPr lang="en-US" sz="1400" dirty="0">
-                <a:solidFill>
-                  <a:schemeClr val="accent3"/>
-                </a:solidFill>
-              </a:rPr>
-              <a:t>sales vs stock spending, last 3 months</a:t>
-            </a:r>
-            <a:endParaRPr lang="en-US" sz="1400" dirty="0"/>
-          </a:p>
-        </p:txBody>
-      </p:sp>
-      <p:sp>
-        <p:nvSpPr>
-          <p:cNvPr id="7" name="Callout 2 figure"/>
-          <p:cNvSpPr txBox="1"/>
-          <p:nvPr/>
-        </p:nvSpPr>
-        <p:spPr>
-          <a:xfrm>
-            <a:off x="7909560" y="2926080"/>
-            <a:ext cx="3596335" cy="457200"/>
-          </a:xfrm>
-          <a:prstGeom prst="rect">
-            <a:avLst/>
-          </a:prstGeom>
-          <a:noFill/>
-          <a:ln/>
-        </p:spPr>
-        <p:txBody>
-          <a:bodyPr wrap="square" lIns="0" tIns="0" rIns="0" bIns="0" rtlCol="0" anchor="t"/>
-          <a:lstStyle/>
-          <a:p>
-            <a:pPr indent="0" marL="0">
-              <a:buNone/>
-            </a:pPr>
-            <a:r>
-              <a:rPr lang="en-US" sz="2600" b="1" dirty="0">
-                <a:solidFill>
-                  <a:schemeClr val="accent1"/>
-                </a:solidFill>
-                <a:latin typeface="Century Gothic" pitchFamily="34" charset="0"/>
-                <a:ea typeface="Century Gothic" pitchFamily="34" charset="-122"/>
-                <a:cs typeface="Century Gothic" pitchFamily="34" charset="-120"/>
-              </a:rPr>
-              <a:t>84 → 66</a:t>
-            </a:r>
-            <a:endParaRPr lang="en-US" sz="2600" dirty="0"/>
-          </a:p>
-        </p:txBody>
-      </p:sp>
-      <p:sp>
-        <p:nvSpPr>
-          <p:cNvPr id="8" name="Callout 2 label"/>
-          <p:cNvSpPr txBox="1"/>
-          <p:nvPr/>
-        </p:nvSpPr>
-        <p:spPr>
-          <a:xfrm>
-            <a:off x="7909560" y="3383280"/>
-            <a:ext cx="3596335" cy="411480"/>
-          </a:xfrm>
-          <a:prstGeom prst="rect">
-            <a:avLst/>
-          </a:prstGeom>
-          <a:noFill/>
-          <a:ln/>
-        </p:spPr>
-        <p:txBody>
-          <a:bodyPr wrap="square" lIns="0" tIns="0" rIns="0" bIns="0" rtlCol="0" anchor="t"/>
-          <a:lstStyle/>
-          <a:p>
-            <a:pPr indent="0" marL="0">
-              <a:buNone/>
-            </a:pPr>
-            <a:r>
-              <a:rPr lang="en-US" sz="1400" dirty="0">
-                <a:solidFill>
-                  <a:schemeClr val="accent3"/>
-                </a:solidFill>
-              </a:rPr>
-              <a:t>Business Health Score since 30 June</a:t>
-            </a:r>
-            <a:endParaRPr lang="en-US" sz="1400" dirty="0"/>
-          </a:p>
-        </p:txBody>
-      </p:sp>
-      <p:sp>
-        <p:nvSpPr>
-          <p:cNvPr id="9" name="Callout 3 figure"/>
-          <p:cNvSpPr txBox="1"/>
-          <p:nvPr/>
-        </p:nvSpPr>
-        <p:spPr>
-          <a:xfrm>
-            <a:off x="7909560" y="3886200"/>
-            <a:ext cx="3596335" cy="457200"/>
-          </a:xfrm>
-          <a:prstGeom prst="rect">
-            <a:avLst/>
-          </a:prstGeom>
-          <a:noFill/>
-          <a:ln/>
-        </p:spPr>
-        <p:txBody>
-          <a:bodyPr wrap="square" lIns="0" tIns="0" rIns="0" bIns="0" rtlCol="0" anchor="t"/>
-          <a:lstStyle/>
-          <a:p>
-            <a:pPr indent="0" marL="0">
-              <a:buNone/>
-            </a:pPr>
-            <a:r>
-              <a:rPr lang="en-US" sz="2600" b="1" dirty="0">
-                <a:solidFill>
-                  <a:schemeClr val="accent1"/>
-                </a:solidFill>
-                <a:latin typeface="Century Gothic" pitchFamily="34" charset="0"/>
-                <a:ea typeface="Century Gothic" pitchFamily="34" charset="-122"/>
-                <a:cs typeface="Century Gothic" pitchFamily="34" charset="-120"/>
-              </a:rPr>
-              <a:t>₦393K</a:t>
-            </a:r>
-            <a:endParaRPr lang="en-US" sz="2600" dirty="0"/>
-          </a:p>
-        </p:txBody>
-      </p:sp>
-      <p:sp>
-        <p:nvSpPr>
-          <p:cNvPr id="10" name="Callout 3 label"/>
-          <p:cNvSpPr txBox="1"/>
-          <p:nvPr/>
-        </p:nvSpPr>
-        <p:spPr>
-          <a:xfrm>
-            <a:off x="7909560" y="4343400"/>
-            <a:ext cx="3596335" cy="411480"/>
-          </a:xfrm>
-          <a:prstGeom prst="rect">
-            <a:avLst/>
-          </a:prstGeom>
-          <a:noFill/>
-          <a:ln/>
-        </p:spPr>
-        <p:txBody>
-          <a:bodyPr wrap="square" lIns="0" tIns="0" rIns="0" bIns="0" rtlCol="0" anchor="t"/>
-          <a:lstStyle/>
-          <a:p>
-            <a:pPr indent="0" marL="0">
-              <a:buNone/>
-            </a:pPr>
-            <a:r>
-              <a:rPr lang="en-US" sz="1400" dirty="0">
-                <a:solidFill>
-                  <a:schemeClr val="accent3"/>
-                </a:solidFill>
-              </a:rPr>
-              <a:t>expected lowest balance, around 12 Oct</a:t>
-            </a:r>
-            <a:endParaRPr lang="en-US" sz="1400" dirty="0"/>
-          </a:p>
-        </p:txBody>
-      </p:sp>
-      <p:sp>
-        <p:nvSpPr>
-          <p:cNvPr id="11" name="Callout 4 figure"/>
-          <p:cNvSpPr txBox="1"/>
-          <p:nvPr/>
-        </p:nvSpPr>
-        <p:spPr>
-          <a:xfrm>
-            <a:off x="7909560" y="4846320"/>
-            <a:ext cx="3596335" cy="457200"/>
-          </a:xfrm>
-          <a:prstGeom prst="rect">
-            <a:avLst/>
-          </a:prstGeom>
-          <a:noFill/>
-          <a:ln/>
-        </p:spPr>
-        <p:txBody>
-          <a:bodyPr wrap="square" lIns="0" tIns="0" rIns="0" bIns="0" rtlCol="0" anchor="t"/>
-          <a:lstStyle/>
-          <a:p>
-            <a:pPr indent="0" marL="0">
-              <a:buNone/>
-            </a:pPr>
-            <a:r>
-              <a:rPr lang="en-US" sz="2600" b="1" dirty="0">
-                <a:solidFill>
-                  <a:schemeClr val="accent1"/>
-                </a:solidFill>
-                <a:latin typeface="Century Gothic" pitchFamily="34" charset="0"/>
-                <a:ea typeface="Century Gothic" pitchFamily="34" charset="-122"/>
-                <a:cs typeface="Century Gothic" pitchFamily="34" charset="-120"/>
-              </a:rPr>
-              <a:t>7 → 2</a:t>
-            </a:r>
-            <a:endParaRPr lang="en-US" sz="2600" dirty="0"/>
-          </a:p>
-        </p:txBody>
-      </p:sp>
-      <p:sp>
-        <p:nvSpPr>
-          <p:cNvPr id="12" name="Callout 4 label"/>
-          <p:cNvSpPr txBox="1"/>
-          <p:nvPr/>
-        </p:nvSpPr>
-        <p:spPr>
-          <a:xfrm>
-            <a:off x="7909560" y="5303520"/>
-            <a:ext cx="3596335" cy="411480"/>
-          </a:xfrm>
-          <a:prstGeom prst="rect">
-            <a:avLst/>
-          </a:prstGeom>
-          <a:noFill/>
-          <a:ln/>
-        </p:spPr>
-        <p:txBody>
-          <a:bodyPr wrap="square" lIns="0" tIns="0" rIns="0" bIns="0" rtlCol="0" anchor="t"/>
-          <a:lstStyle/>
-          <a:p>
-            <a:pPr indent="0" marL="0">
-              <a:buNone/>
-            </a:pPr>
-            <a:r>
-              <a:rPr lang="en-US" sz="1400" dirty="0">
-                <a:solidFill>
-                  <a:schemeClr val="accent3"/>
-                </a:solidFill>
-              </a:rPr>
-              <a:t>transactions left to review after one answer: it learns</a:t>
-            </a:r>
-            <a:endParaRPr lang="en-US" sz="1400" dirty="0"/>
+              <a:rPr lang="en-US" sz="1200" dirty="0">
+                <a:solidFill>
+                  <a:srgbClr val="6E6370"/>
+                </a:solidFill>
+              </a:rPr>
+              <a:t>The prototype uses statistical and rule-based models, not an LLM or a trained machine-learning model. Next: models trained on real Wema data.</a:t>
+            </a:r>
+            <a:endParaRPr lang="en-US" sz="1200" dirty="0"/>
           </a:p>
         </p:txBody>
       </p:sp>
@@ -8021,7 +10356,7 @@
                   <a:schemeClr val="accent1"/>
                 </a:solidFill>
               </a:rPr>
-              <a:t>THE DECISION</a:t>
+              <a:t>THE PRODUCT</a:t>
             </a:r>
             <a:endParaRPr lang="en-US" sz="1400" dirty="0"/>
           </a:p>
@@ -8062,7 +10397,7 @@
                 <a:ea typeface="Century Gothic" pitchFamily="34" charset="-122"/>
                 <a:cs typeface="Century Gothic" pitchFamily="34" charset="-120"/>
               </a:rPr>
-              <a:t>Can Aisha afford ₦300,000 of stock?</a:t>
+              <a:t>Aisha's business, in plain words</a:t>
             </a:r>
             <a:endParaRPr lang="en-US" sz="3400" dirty="0"/>
           </a:p>
@@ -8070,7 +10405,7 @@
       </p:sp>
       <p:pic>
         <p:nvPicPr>
-          <p:cNvPr id="4" name="Phone screenshot" descr="Can I afford this? screen on a phone showing: You can, but be careful">    </p:cNvPr>
+          <p:cNvPr id="4" name="Dashboard screenshot" descr="NaijaBiz IQ dashboard for Aisha Mini Mart: key insight, sales, spending, cash balance and Business Health Score">    </p:cNvPr>
           <p:cNvPicPr>
             <a:picLocks noChangeAspect="1"/>
           </p:cNvPicPr>
@@ -8084,8 +10419,8 @@
         </p:blipFill>
         <p:spPr>
           <a:xfrm>
-            <a:off x="685800" y="1874520"/>
-            <a:ext cx="1880262" cy="4069080"/>
+            <a:off x="685800" y="1965960"/>
+            <a:ext cx="6766560" cy="3804332"/>
           </a:xfrm>
           <a:prstGeom prst="rect">
             <a:avLst/>
@@ -8101,14 +10436,14 @@
       </p:pic>
       <p:sp>
         <p:nvSpPr>
-          <p:cNvPr id="5" name="Verdict"/>
+          <p:cNvPr id="5" name="Callout 1 figure"/>
           <p:cNvSpPr txBox="1"/>
           <p:nvPr/>
         </p:nvSpPr>
         <p:spPr>
           <a:xfrm>
-            <a:off x="3114702" y="1874520"/>
-            <a:ext cx="8391193" cy="640080"/>
+            <a:off x="7909560" y="1965960"/>
+            <a:ext cx="3596335" cy="457200"/>
           </a:xfrm>
           <a:prstGeom prst="rect">
             <a:avLst/>
@@ -8124,7 +10459,7 @@
               <a:buNone/>
             </a:pPr>
             <a:r>
-              <a:rPr lang="en-US" sz="3200" b="1" dirty="0">
+              <a:rPr lang="en-US" sz="2600" b="1" dirty="0">
                 <a:solidFill>
                   <a:schemeClr val="accent1"/>
                 </a:solidFill>
@@ -8132,6 +10467,883 @@
                 <a:ea typeface="Century Gothic" pitchFamily="34" charset="-122"/>
                 <a:cs typeface="Century Gothic" pitchFamily="34" charset="-120"/>
               </a:rPr>
+              <a:t>+12% vs +31%</a:t>
+            </a:r>
+            <a:endParaRPr lang="en-US" sz="2600" dirty="0"/>
+          </a:p>
+        </p:txBody>
+      </p:sp>
+      <p:sp>
+        <p:nvSpPr>
+          <p:cNvPr id="6" name="Callout 1 label"/>
+          <p:cNvSpPr txBox="1"/>
+          <p:nvPr/>
+        </p:nvSpPr>
+        <p:spPr>
+          <a:xfrm>
+            <a:off x="7909560" y="2423160"/>
+            <a:ext cx="3596335" cy="411480"/>
+          </a:xfrm>
+          <a:prstGeom prst="rect">
+            <a:avLst/>
+          </a:prstGeom>
+          <a:noFill/>
+          <a:ln/>
+        </p:spPr>
+        <p:txBody>
+          <a:bodyPr wrap="square" lIns="0" tIns="0" rIns="0" bIns="0" rtlCol="0" anchor="t"/>
+          <a:lstStyle/>
+          <a:p>
+            <a:pPr indent="0" marL="0">
+              <a:buNone/>
+            </a:pPr>
+            <a:r>
+              <a:rPr lang="en-US" sz="1400" dirty="0">
+                <a:solidFill>
+                  <a:schemeClr val="accent3"/>
+                </a:solidFill>
+              </a:rPr>
+              <a:t>sales vs stock spending, last 3 months</a:t>
+            </a:r>
+            <a:endParaRPr lang="en-US" sz="1400" dirty="0"/>
+          </a:p>
+        </p:txBody>
+      </p:sp>
+      <p:sp>
+        <p:nvSpPr>
+          <p:cNvPr id="7" name="Callout 2 figure"/>
+          <p:cNvSpPr txBox="1"/>
+          <p:nvPr/>
+        </p:nvSpPr>
+        <p:spPr>
+          <a:xfrm>
+            <a:off x="7909560" y="2926080"/>
+            <a:ext cx="3596335" cy="457200"/>
+          </a:xfrm>
+          <a:prstGeom prst="rect">
+            <a:avLst/>
+          </a:prstGeom>
+          <a:noFill/>
+          <a:ln/>
+        </p:spPr>
+        <p:txBody>
+          <a:bodyPr wrap="square" lIns="0" tIns="0" rIns="0" bIns="0" rtlCol="0" anchor="t"/>
+          <a:lstStyle/>
+          <a:p>
+            <a:pPr indent="0" marL="0">
+              <a:buNone/>
+            </a:pPr>
+            <a:r>
+              <a:rPr lang="en-US" sz="2600" b="1" dirty="0">
+                <a:solidFill>
+                  <a:schemeClr val="accent1"/>
+                </a:solidFill>
+                <a:latin typeface="Century Gothic" pitchFamily="34" charset="0"/>
+                <a:ea typeface="Century Gothic" pitchFamily="34" charset="-122"/>
+                <a:cs typeface="Century Gothic" pitchFamily="34" charset="-120"/>
+              </a:rPr>
+              <a:t>84 → 66</a:t>
+            </a:r>
+            <a:endParaRPr lang="en-US" sz="2600" dirty="0"/>
+          </a:p>
+        </p:txBody>
+      </p:sp>
+      <p:sp>
+        <p:nvSpPr>
+          <p:cNvPr id="8" name="Callout 2 label"/>
+          <p:cNvSpPr txBox="1"/>
+          <p:nvPr/>
+        </p:nvSpPr>
+        <p:spPr>
+          <a:xfrm>
+            <a:off x="7909560" y="3383280"/>
+            <a:ext cx="3596335" cy="411480"/>
+          </a:xfrm>
+          <a:prstGeom prst="rect">
+            <a:avLst/>
+          </a:prstGeom>
+          <a:noFill/>
+          <a:ln/>
+        </p:spPr>
+        <p:txBody>
+          <a:bodyPr wrap="square" lIns="0" tIns="0" rIns="0" bIns="0" rtlCol="0" anchor="t"/>
+          <a:lstStyle/>
+          <a:p>
+            <a:pPr indent="0" marL="0">
+              <a:buNone/>
+            </a:pPr>
+            <a:r>
+              <a:rPr lang="en-US" sz="1400" dirty="0">
+                <a:solidFill>
+                  <a:schemeClr val="accent3"/>
+                </a:solidFill>
+              </a:rPr>
+              <a:t>Business Health Score since 30 June</a:t>
+            </a:r>
+            <a:endParaRPr lang="en-US" sz="1400" dirty="0"/>
+          </a:p>
+        </p:txBody>
+      </p:sp>
+      <p:sp>
+        <p:nvSpPr>
+          <p:cNvPr id="9" name="Callout 3 figure"/>
+          <p:cNvSpPr txBox="1"/>
+          <p:nvPr/>
+        </p:nvSpPr>
+        <p:spPr>
+          <a:xfrm>
+            <a:off x="7909560" y="3886200"/>
+            <a:ext cx="3596335" cy="457200"/>
+          </a:xfrm>
+          <a:prstGeom prst="rect">
+            <a:avLst/>
+          </a:prstGeom>
+          <a:noFill/>
+          <a:ln/>
+        </p:spPr>
+        <p:txBody>
+          <a:bodyPr wrap="square" lIns="0" tIns="0" rIns="0" bIns="0" rtlCol="0" anchor="t"/>
+          <a:lstStyle/>
+          <a:p>
+            <a:pPr indent="0" marL="0">
+              <a:buNone/>
+            </a:pPr>
+            <a:r>
+              <a:rPr lang="en-US" sz="2600" b="1" dirty="0">
+                <a:solidFill>
+                  <a:schemeClr val="accent1"/>
+                </a:solidFill>
+                <a:latin typeface="Century Gothic" pitchFamily="34" charset="0"/>
+                <a:ea typeface="Century Gothic" pitchFamily="34" charset="-122"/>
+                <a:cs typeface="Century Gothic" pitchFamily="34" charset="-120"/>
+              </a:rPr>
+              <a:t>₦393K</a:t>
+            </a:r>
+            <a:endParaRPr lang="en-US" sz="2600" dirty="0"/>
+          </a:p>
+        </p:txBody>
+      </p:sp>
+      <p:sp>
+        <p:nvSpPr>
+          <p:cNvPr id="10" name="Callout 3 label"/>
+          <p:cNvSpPr txBox="1"/>
+          <p:nvPr/>
+        </p:nvSpPr>
+        <p:spPr>
+          <a:xfrm>
+            <a:off x="7909560" y="4343400"/>
+            <a:ext cx="3596335" cy="411480"/>
+          </a:xfrm>
+          <a:prstGeom prst="rect">
+            <a:avLst/>
+          </a:prstGeom>
+          <a:noFill/>
+          <a:ln/>
+        </p:spPr>
+        <p:txBody>
+          <a:bodyPr wrap="square" lIns="0" tIns="0" rIns="0" bIns="0" rtlCol="0" anchor="t"/>
+          <a:lstStyle/>
+          <a:p>
+            <a:pPr indent="0" marL="0">
+              <a:buNone/>
+            </a:pPr>
+            <a:r>
+              <a:rPr lang="en-US" sz="1400" dirty="0">
+                <a:solidFill>
+                  <a:schemeClr val="accent3"/>
+                </a:solidFill>
+              </a:rPr>
+              <a:t>expected lowest balance, around 12 Oct</a:t>
+            </a:r>
+            <a:endParaRPr lang="en-US" sz="1400" dirty="0"/>
+          </a:p>
+        </p:txBody>
+      </p:sp>
+      <p:sp>
+        <p:nvSpPr>
+          <p:cNvPr id="11" name="Callout 4 figure"/>
+          <p:cNvSpPr txBox="1"/>
+          <p:nvPr/>
+        </p:nvSpPr>
+        <p:spPr>
+          <a:xfrm>
+            <a:off x="7909560" y="4846320"/>
+            <a:ext cx="3596335" cy="457200"/>
+          </a:xfrm>
+          <a:prstGeom prst="rect">
+            <a:avLst/>
+          </a:prstGeom>
+          <a:noFill/>
+          <a:ln/>
+        </p:spPr>
+        <p:txBody>
+          <a:bodyPr wrap="square" lIns="0" tIns="0" rIns="0" bIns="0" rtlCol="0" anchor="t"/>
+          <a:lstStyle/>
+          <a:p>
+            <a:pPr indent="0" marL="0">
+              <a:buNone/>
+            </a:pPr>
+            <a:r>
+              <a:rPr lang="en-US" sz="2600" b="1" dirty="0">
+                <a:solidFill>
+                  <a:schemeClr val="accent1"/>
+                </a:solidFill>
+                <a:latin typeface="Century Gothic" pitchFamily="34" charset="0"/>
+                <a:ea typeface="Century Gothic" pitchFamily="34" charset="-122"/>
+                <a:cs typeface="Century Gothic" pitchFamily="34" charset="-120"/>
+              </a:rPr>
+              <a:t>7 → 2</a:t>
+            </a:r>
+            <a:endParaRPr lang="en-US" sz="2600" dirty="0"/>
+          </a:p>
+        </p:txBody>
+      </p:sp>
+      <p:sp>
+        <p:nvSpPr>
+          <p:cNvPr id="12" name="Callout 4 label"/>
+          <p:cNvSpPr txBox="1"/>
+          <p:nvPr/>
+        </p:nvSpPr>
+        <p:spPr>
+          <a:xfrm>
+            <a:off x="7909560" y="5303520"/>
+            <a:ext cx="3596335" cy="411480"/>
+          </a:xfrm>
+          <a:prstGeom prst="rect">
+            <a:avLst/>
+          </a:prstGeom>
+          <a:noFill/>
+          <a:ln/>
+        </p:spPr>
+        <p:txBody>
+          <a:bodyPr wrap="square" lIns="0" tIns="0" rIns="0" bIns="0" rtlCol="0" anchor="t"/>
+          <a:lstStyle/>
+          <a:p>
+            <a:pPr indent="0" marL="0">
+              <a:buNone/>
+            </a:pPr>
+            <a:r>
+              <a:rPr lang="en-US" sz="1400" dirty="0">
+                <a:solidFill>
+                  <a:schemeClr val="accent3"/>
+                </a:solidFill>
+              </a:rPr>
+              <a:t>transactions left to review after one answer: it learns</a:t>
+            </a:r>
+            <a:endParaRPr lang="en-US" sz="1400" dirty="0"/>
+          </a:p>
+        </p:txBody>
+      </p:sp>
+      <p:sp>
+        <p:nvSpPr>
+          <p:cNvPr id="25" name="Slide Number Placeholder 0"/>
+          <p:cNvSpPr>
+            <a:spLocks noGrp="1"/>
+          </p:cNvSpPr>
+          <p:nvPr>
+            <p:ph type="sldNum" sz="quarter" idx="4294967295"/>
+          </p:nvPr>
+        </p:nvSpPr>
+        <p:spPr>
+          <a:xfrm>
+            <a:off x="10972800" y="6263640"/>
+            <a:ext cx="530352" cy="320040"/>
+          </a:xfrm>
+          <a:prstGeom prst="rect">
+            <a:avLst/>
+          </a:prstGeom>
+          <a:extLst>
+            <a:ext uri="{C572A759-6A51-4108-AA02-DFA0A04FC94B}">
+              <ma14:wrappingTextBoxFlag xmlns:ma14="http://schemas.microsoft.com/office/mac/drawingml/2011/main" val="0"/>
+            </a:ext>
+          </a:extLst>
+        </p:spPr>
+        <p:txBody>
+          <a:bodyPr/>
+          <a:lstStyle>
+            <a:lvl1pPr>
+              <a:defRPr sz="1200">
+                <a:solidFill>
+                  <a:srgbClr val="6E6370"/>
+                </a:solidFill>
+              </a:defRPr>
+            </a:lvl1pPr>
+          </a:lstStyle>
+          <a:p>
+            <a:pPr algn="r"/>
+            <a:fld id="{F7021451-1387-4CA6-816F-3879F97B5CBC}" type="slidenum">
+              <a:rPr b="0" lang="en-US"/>
+              <a:t>7</a:t>
+            </a:fld>
+            <a:endParaRPr lang="en-US"/>
+          </a:p>
+        </p:txBody>
+      </p:sp>
+    </p:spTree>
+  </p:cSld>
+  <p:clrMapOvr>
+    <a:masterClrMapping/>
+  </p:clrMapOvr>
+</p:sld>
+</file>
+
+<file path=ppt/slides/slide8.xml><?xml version="1.0" encoding="utf-8"?>
+<p:sld xmlns:a="http://schemas.openxmlformats.org/drawingml/2006/main" xmlns:r="http://schemas.openxmlformats.org/officeDocument/2006/relationships" xmlns:p="http://schemas.openxmlformats.org/presentationml/2006/main">
+  <p:cSld name="Slide 8">
+    <p:spTree>
+      <p:nvGrpSpPr>
+        <p:cNvPr id="1" name=""/>
+        <p:cNvGrpSpPr/>
+        <p:nvPr/>
+      </p:nvGrpSpPr>
+      <p:grpSpPr>
+        <a:xfrm>
+          <a:off x="0" y="0"/>
+          <a:ext cx="0" cy="0"/>
+          <a:chOff x="0" y="0"/>
+          <a:chExt cx="0" cy="0"/>
+        </a:xfrm>
+      </p:grpSpPr>
+      <p:sp>
+        <p:nvSpPr>
+          <p:cNvPr id="2" name="Text 0"/>
+          <p:cNvSpPr/>
+          <p:nvPr>
+            <p:ph idx="100" type="body" hasCustomPrompt="1"/>
+          </p:nvPr>
+        </p:nvSpPr>
+        <p:spPr>
+          <a:xfrm>
+            <a:off x="685800" y="548640"/>
+            <a:ext cx="10820095" cy="365760"/>
+          </a:xfrm>
+          <a:prstGeom prst="rect">
+            <a:avLst/>
+          </a:prstGeom>
+          <a:noFill/>
+          <a:ln/>
+        </p:spPr>
+        <p:txBody>
+          <a:bodyPr wrap="square" lIns="0" tIns="0" rIns="0" bIns="0" rtlCol="0"/>
+          <a:lstStyle/>
+          <a:p>
+            <a:pPr indent="0" marL="0">
+              <a:buNone/>
+            </a:pPr>
+            <a:r>
+              <a:rPr lang="en-US" sz="1400" b="1" spc="200" kern="0" dirty="0">
+                <a:solidFill>
+                  <a:schemeClr val="accent1"/>
+                </a:solidFill>
+              </a:rPr>
+              <a:t>SIMPLE AND IN-DEPTH</a:t>
+            </a:r>
+            <a:endParaRPr lang="en-US" sz="1400" dirty="0"/>
+          </a:p>
+        </p:txBody>
+      </p:sp>
+      <p:sp>
+        <p:nvSpPr>
+          <p:cNvPr id="3" name="Text 0"/>
+          <p:cNvSpPr/>
+          <p:nvPr>
+            <p:ph idx="101" type="title" hasCustomPrompt="1"/>
+          </p:nvPr>
+        </p:nvSpPr>
+        <p:spPr>
+          <a:xfrm>
+            <a:off x="685800" y="914400"/>
+            <a:ext cx="10820095" cy="868680"/>
+          </a:xfrm>
+          <a:prstGeom prst="rect">
+            <a:avLst/>
+          </a:prstGeom>
+          <a:noFill/>
+          <a:ln/>
+        </p:spPr>
+        <p:txBody>
+          <a:bodyPr wrap="square" lIns="0" tIns="0" rIns="0" bIns="0" rtlCol="0" anchor="t"/>
+          <a:lstStyle/>
+          <a:p>
+            <a:pPr algn="l" indent="0" marL="0">
+              <a:buNone/>
+            </a:pPr>
+            <a:r>
+              <a:rPr lang="en-US" sz="3400" b="1" dirty="0">
+                <a:solidFill>
+                  <a:schemeClr val="tx1"/>
+                </a:solidFill>
+                <a:latin typeface="Century Gothic" pitchFamily="34" charset="0"/>
+                <a:ea typeface="Century Gothic" pitchFamily="34" charset="-122"/>
+                <a:cs typeface="Century Gothic" pitchFamily="34" charset="-120"/>
+              </a:rPr>
+              <a:t>Simple first, detail on demand</a:t>
+            </a:r>
+            <a:endParaRPr lang="en-US" sz="3400" dirty="0"/>
+          </a:p>
+        </p:txBody>
+      </p:sp>
+      <p:sp>
+        <p:nvSpPr>
+          <p:cNvPr id="4" name="Simple (the default) label"/>
+          <p:cNvSpPr txBox="1"/>
+          <p:nvPr/>
+        </p:nvSpPr>
+        <p:spPr>
+          <a:xfrm>
+            <a:off x="685800" y="1920240"/>
+            <a:ext cx="5181448" cy="365760"/>
+          </a:xfrm>
+          <a:prstGeom prst="rect">
+            <a:avLst/>
+          </a:prstGeom>
+          <a:noFill/>
+          <a:ln/>
+        </p:spPr>
+        <p:txBody>
+          <a:bodyPr wrap="square" lIns="0" tIns="0" rIns="0" bIns="0" rtlCol="0" anchor="t"/>
+          <a:lstStyle/>
+          <a:p>
+            <a:pPr indent="0" marL="0">
+              <a:buNone/>
+            </a:pPr>
+            <a:r>
+              <a:rPr lang="en-US" sz="1800" b="1" dirty="0">
+                <a:solidFill>
+                  <a:schemeClr val="accent1"/>
+                </a:solidFill>
+                <a:latin typeface="Century Gothic" pitchFamily="34" charset="0"/>
+                <a:ea typeface="Century Gothic" pitchFamily="34" charset="-122"/>
+                <a:cs typeface="Century Gothic" pitchFamily="34" charset="-120"/>
+              </a:rPr>
+              <a:t>Simple (the default)</a:t>
+            </a:r>
+            <a:endParaRPr lang="en-US" sz="1800" dirty="0"/>
+          </a:p>
+        </p:txBody>
+      </p:sp>
+      <p:sp>
+        <p:nvSpPr>
+          <p:cNvPr id="5" name="Simple (the default) detail"/>
+          <p:cNvSpPr txBox="1"/>
+          <p:nvPr/>
+        </p:nvSpPr>
+        <p:spPr>
+          <a:xfrm>
+            <a:off x="685800" y="2286000"/>
+            <a:ext cx="5181448" cy="320040"/>
+          </a:xfrm>
+          <a:prstGeom prst="rect">
+            <a:avLst/>
+          </a:prstGeom>
+          <a:noFill/>
+          <a:ln/>
+        </p:spPr>
+        <p:txBody>
+          <a:bodyPr wrap="square" lIns="0" tIns="0" rIns="0" bIns="0" rtlCol="0" anchor="t"/>
+          <a:lstStyle/>
+          <a:p>
+            <a:pPr indent="0" marL="0">
+              <a:buNone/>
+            </a:pPr>
+            <a:r>
+              <a:rPr lang="en-US" sz="1400" dirty="0">
+                <a:solidFill>
+                  <a:schemeClr val="accent3"/>
+                </a:solidFill>
+              </a:rPr>
+              <a:t>Plain sentences: what she earned, spent and kept</a:t>
+            </a:r>
+            <a:endParaRPr lang="en-US" sz="1400" dirty="0"/>
+          </a:p>
+        </p:txBody>
+      </p:sp>
+      <p:pic>
+        <p:nvPicPr>
+          <p:cNvPr id="6" name="Simple (the default) screenshot" descr="NaijaBiz IQ dashboard, Simple (the default)">    </p:cNvPr>
+          <p:cNvPicPr>
+            <a:picLocks noChangeAspect="1"/>
+          </p:cNvPicPr>
+          <p:nvPr/>
+        </p:nvPicPr>
+        <p:blipFill>
+          <a:blip r:embed="rId1"/>
+          <a:stretch>
+            <a:fillRect/>
+          </a:stretch>
+        </p:blipFill>
+        <p:spPr>
+          <a:xfrm>
+            <a:off x="685800" y="2697480"/>
+            <a:ext cx="4663303" cy="2621828"/>
+          </a:xfrm>
+          <a:prstGeom prst="rect">
+            <a:avLst/>
+          </a:prstGeom>
+          <a:effectLst>
+            <a:outerShdw sx="100000" sy="100000" kx="0" ky="0" algn="bl" rotWithShape="0" blurRad="228600" dist="76200" dir="5400000">
+              <a:srgbClr val="3B1439">
+                <a:alpha val="18000"/>
+              </a:srgbClr>
+            </a:outerShdw>
+          </a:effectLst>
+        </p:spPr>
+      </p:pic>
+      <p:sp>
+        <p:nvSpPr>
+          <p:cNvPr id="7" name="In-depth (one tap away) label"/>
+          <p:cNvSpPr txBox="1"/>
+          <p:nvPr/>
+        </p:nvSpPr>
+        <p:spPr>
+          <a:xfrm>
+            <a:off x="6324448" y="1920240"/>
+            <a:ext cx="5181448" cy="365760"/>
+          </a:xfrm>
+          <a:prstGeom prst="rect">
+            <a:avLst/>
+          </a:prstGeom>
+          <a:noFill/>
+          <a:ln/>
+        </p:spPr>
+        <p:txBody>
+          <a:bodyPr wrap="square" lIns="0" tIns="0" rIns="0" bIns="0" rtlCol="0" anchor="t"/>
+          <a:lstStyle/>
+          <a:p>
+            <a:pPr indent="0" marL="0">
+              <a:buNone/>
+            </a:pPr>
+            <a:r>
+              <a:rPr lang="en-US" sz="1800" b="1" dirty="0">
+                <a:solidFill>
+                  <a:schemeClr val="accent1"/>
+                </a:solidFill>
+                <a:latin typeface="Century Gothic" pitchFamily="34" charset="0"/>
+                <a:ea typeface="Century Gothic" pitchFamily="34" charset="-122"/>
+                <a:cs typeface="Century Gothic" pitchFamily="34" charset="-120"/>
+              </a:rPr>
+              <a:t>In-depth (one tap away)</a:t>
+            </a:r>
+            <a:endParaRPr lang="en-US" sz="1800" dirty="0"/>
+          </a:p>
+        </p:txBody>
+      </p:sp>
+      <p:sp>
+        <p:nvSpPr>
+          <p:cNvPr id="8" name="In-depth (one tap away) detail"/>
+          <p:cNvSpPr txBox="1"/>
+          <p:nvPr/>
+        </p:nvSpPr>
+        <p:spPr>
+          <a:xfrm>
+            <a:off x="6324448" y="2286000"/>
+            <a:ext cx="5181448" cy="320040"/>
+          </a:xfrm>
+          <a:prstGeom prst="rect">
+            <a:avLst/>
+          </a:prstGeom>
+          <a:noFill/>
+          <a:ln/>
+        </p:spPr>
+        <p:txBody>
+          <a:bodyPr wrap="square" lIns="0" tIns="0" rIns="0" bIns="0" rtlCol="0" anchor="t"/>
+          <a:lstStyle/>
+          <a:p>
+            <a:pPr indent="0" marL="0">
+              <a:buNone/>
+            </a:pPr>
+            <a:r>
+              <a:rPr lang="en-US" sz="1400" dirty="0">
+                <a:solidFill>
+                  <a:schemeClr val="accent3"/>
+                </a:solidFill>
+              </a:rPr>
+              <a:t>Every statistic, chart and score breakdown</a:t>
+            </a:r>
+            <a:endParaRPr lang="en-US" sz="1400" dirty="0"/>
+          </a:p>
+        </p:txBody>
+      </p:sp>
+      <p:pic>
+        <p:nvPicPr>
+          <p:cNvPr id="9" name="In-depth (one tap away) screenshot" descr="NaijaBiz IQ dashboard, In-depth (one tap away)">    </p:cNvPr>
+          <p:cNvPicPr>
+            <a:picLocks noChangeAspect="1"/>
+          </p:cNvPicPr>
+          <p:nvPr/>
+        </p:nvPicPr>
+        <p:blipFill>
+          <a:blip r:embed="rId2"/>
+          <a:stretch>
+            <a:fillRect/>
+          </a:stretch>
+        </p:blipFill>
+        <p:spPr>
+          <a:xfrm>
+            <a:off x="6324448" y="2697480"/>
+            <a:ext cx="4663303" cy="2621828"/>
+          </a:xfrm>
+          <a:prstGeom prst="rect">
+            <a:avLst/>
+          </a:prstGeom>
+          <a:effectLst>
+            <a:outerShdw sx="100000" sy="100000" kx="0" ky="0" algn="bl" rotWithShape="0" blurRad="228600" dist="76200" dir="5400000">
+              <a:srgbClr val="3B1439">
+                <a:alpha val="18000"/>
+              </a:srgbClr>
+            </a:outerShdw>
+          </a:effectLst>
+        </p:spPr>
+      </p:pic>
+      <p:sp>
+        <p:nvSpPr>
+          <p:cNvPr id="10" name="Takeaway"/>
+          <p:cNvSpPr txBox="1"/>
+          <p:nvPr/>
+        </p:nvSpPr>
+        <p:spPr>
+          <a:xfrm>
+            <a:off x="685800" y="5715000"/>
+            <a:ext cx="10820095" cy="411480"/>
+          </a:xfrm>
+          <a:prstGeom prst="rect">
+            <a:avLst/>
+          </a:prstGeom>
+          <a:noFill/>
+          <a:ln/>
+        </p:spPr>
+        <p:txBody>
+          <a:bodyPr wrap="square" lIns="0" tIns="0" rIns="0" bIns="0" rtlCol="0" anchor="t"/>
+          <a:lstStyle/>
+          <a:p>
+            <a:pPr indent="0" marL="0">
+              <a:buNone/>
+            </a:pPr>
+            <a:r>
+              <a:rPr lang="en-US" sz="1700" dirty="0">
+                <a:solidFill>
+                  <a:schemeClr val="tx1"/>
+                </a:solidFill>
+              </a:rPr>
+              <a:t>The same numbers either way: owners get plain answers, and anyone who wants the detail is one tap from it.</a:t>
+            </a:r>
+            <a:endParaRPr lang="en-US" sz="1700" dirty="0"/>
+          </a:p>
+        </p:txBody>
+      </p:sp>
+      <p:sp>
+        <p:nvSpPr>
+          <p:cNvPr id="25" name="Slide Number Placeholder 0"/>
+          <p:cNvSpPr>
+            <a:spLocks noGrp="1"/>
+          </p:cNvSpPr>
+          <p:nvPr>
+            <p:ph type="sldNum" sz="quarter" idx="4294967295"/>
+          </p:nvPr>
+        </p:nvSpPr>
+        <p:spPr>
+          <a:xfrm>
+            <a:off x="10972800" y="6263640"/>
+            <a:ext cx="530352" cy="320040"/>
+          </a:xfrm>
+          <a:prstGeom prst="rect">
+            <a:avLst/>
+          </a:prstGeom>
+          <a:extLst>
+            <a:ext uri="{C572A759-6A51-4108-AA02-DFA0A04FC94B}">
+              <ma14:wrappingTextBoxFlag xmlns:ma14="http://schemas.microsoft.com/office/mac/drawingml/2011/main" val="0"/>
+            </a:ext>
+          </a:extLst>
+        </p:spPr>
+        <p:txBody>
+          <a:bodyPr/>
+          <a:lstStyle>
+            <a:lvl1pPr>
+              <a:defRPr sz="1200">
+                <a:solidFill>
+                  <a:srgbClr val="6E6370"/>
+                </a:solidFill>
+              </a:defRPr>
+            </a:lvl1pPr>
+          </a:lstStyle>
+          <a:p>
+            <a:pPr algn="r"/>
+            <a:fld id="{F7021451-1387-4CA6-816F-3879F97B5CBC}" type="slidenum">
+              <a:rPr b="0" lang="en-US"/>
+              <a:t>8</a:t>
+            </a:fld>
+            <a:endParaRPr lang="en-US"/>
+          </a:p>
+        </p:txBody>
+      </p:sp>
+    </p:spTree>
+  </p:cSld>
+  <p:clrMapOvr>
+    <a:masterClrMapping/>
+  </p:clrMapOvr>
+</p:sld>
+</file>
+
+<file path=ppt/slides/slide9.xml><?xml version="1.0" encoding="utf-8"?>
+<p:sld xmlns:a="http://schemas.openxmlformats.org/drawingml/2006/main" xmlns:r="http://schemas.openxmlformats.org/officeDocument/2006/relationships" xmlns:p="http://schemas.openxmlformats.org/presentationml/2006/main">
+  <p:cSld name="Slide 9">
+    <p:spTree>
+      <p:nvGrpSpPr>
+        <p:cNvPr id="1" name=""/>
+        <p:cNvGrpSpPr/>
+        <p:nvPr/>
+      </p:nvGrpSpPr>
+      <p:grpSpPr>
+        <a:xfrm>
+          <a:off x="0" y="0"/>
+          <a:ext cx="0" cy="0"/>
+          <a:chOff x="0" y="0"/>
+          <a:chExt cx="0" cy="0"/>
+        </a:xfrm>
+      </p:grpSpPr>
+      <p:sp>
+        <p:nvSpPr>
+          <p:cNvPr id="2" name="Text 0"/>
+          <p:cNvSpPr/>
+          <p:nvPr>
+            <p:ph idx="100" type="body" hasCustomPrompt="1"/>
+          </p:nvPr>
+        </p:nvSpPr>
+        <p:spPr>
+          <a:xfrm>
+            <a:off x="685800" y="548640"/>
+            <a:ext cx="10820095" cy="365760"/>
+          </a:xfrm>
+          <a:prstGeom prst="rect">
+            <a:avLst/>
+          </a:prstGeom>
+          <a:noFill/>
+          <a:ln/>
+        </p:spPr>
+        <p:txBody>
+          <a:bodyPr wrap="square" lIns="0" tIns="0" rIns="0" bIns="0" rtlCol="0"/>
+          <a:lstStyle/>
+          <a:p>
+            <a:pPr indent="0" marL="0">
+              <a:buNone/>
+            </a:pPr>
+            <a:r>
+              <a:rPr lang="en-US" sz="1400" b="1" spc="200" kern="0" dirty="0">
+                <a:solidFill>
+                  <a:schemeClr val="accent1"/>
+                </a:solidFill>
+              </a:rPr>
+              <a:t>THE DECISION</a:t>
+            </a:r>
+            <a:endParaRPr lang="en-US" sz="1400" dirty="0"/>
+          </a:p>
+        </p:txBody>
+      </p:sp>
+      <p:sp>
+        <p:nvSpPr>
+          <p:cNvPr id="3" name="Text 0"/>
+          <p:cNvSpPr/>
+          <p:nvPr>
+            <p:ph idx="101" type="title" hasCustomPrompt="1"/>
+          </p:nvPr>
+        </p:nvSpPr>
+        <p:spPr>
+          <a:xfrm>
+            <a:off x="685800" y="914400"/>
+            <a:ext cx="10820095" cy="868680"/>
+          </a:xfrm>
+          <a:prstGeom prst="rect">
+            <a:avLst/>
+          </a:prstGeom>
+          <a:noFill/>
+          <a:ln/>
+        </p:spPr>
+        <p:txBody>
+          <a:bodyPr wrap="square" lIns="0" tIns="0" rIns="0" bIns="0" rtlCol="0" anchor="t"/>
+          <a:lstStyle/>
+          <a:p>
+            <a:pPr algn="l" indent="0" marL="0">
+              <a:buNone/>
+            </a:pPr>
+            <a:r>
+              <a:rPr lang="en-US" sz="3400" b="1" dirty="0">
+                <a:solidFill>
+                  <a:schemeClr val="tx1"/>
+                </a:solidFill>
+                <a:latin typeface="Century Gothic" pitchFamily="34" charset="0"/>
+                <a:ea typeface="Century Gothic" pitchFamily="34" charset="-122"/>
+                <a:cs typeface="Century Gothic" pitchFamily="34" charset="-120"/>
+              </a:rPr>
+              <a:t>Can Aisha afford ₦300,000 of stock?</a:t>
+            </a:r>
+            <a:endParaRPr lang="en-US" sz="3400" dirty="0"/>
+          </a:p>
+        </p:txBody>
+      </p:sp>
+      <p:pic>
+        <p:nvPicPr>
+          <p:cNvPr id="4" name="Phone screenshot" descr="Can I afford this? screen on a phone showing: You can, but be careful">    </p:cNvPr>
+          <p:cNvPicPr>
+            <a:picLocks noChangeAspect="1"/>
+          </p:cNvPicPr>
+          <p:nvPr/>
+        </p:nvPicPr>
+        <p:blipFill>
+          <a:blip r:embed="rId1"/>
+          <a:stretch>
+            <a:fillRect/>
+          </a:stretch>
+        </p:blipFill>
+        <p:spPr>
+          <a:xfrm>
+            <a:off x="685800" y="1874520"/>
+            <a:ext cx="1880262" cy="4069080"/>
+          </a:xfrm>
+          <a:prstGeom prst="rect">
+            <a:avLst/>
+          </a:prstGeom>
+          <a:effectLst>
+            <a:outerShdw sx="100000" sy="100000" kx="0" ky="0" algn="bl" rotWithShape="0" blurRad="228600" dist="76200" dir="5400000">
+              <a:srgbClr val="3B1439">
+                <a:alpha val="18000"/>
+              </a:srgbClr>
+            </a:outerShdw>
+          </a:effectLst>
+        </p:spPr>
+      </p:pic>
+      <p:sp>
+        <p:nvSpPr>
+          <p:cNvPr id="5" name="Verdict"/>
+          <p:cNvSpPr txBox="1"/>
+          <p:nvPr/>
+        </p:nvSpPr>
+        <p:spPr>
+          <a:xfrm>
+            <a:off x="3114702" y="1874520"/>
+            <a:ext cx="8391193" cy="640080"/>
+          </a:xfrm>
+          <a:prstGeom prst="rect">
+            <a:avLst/>
+          </a:prstGeom>
+          <a:noFill/>
+          <a:ln/>
+        </p:spPr>
+        <p:txBody>
+          <a:bodyPr wrap="square" lIns="0" tIns="0" rIns="0" bIns="0" rtlCol="0" anchor="t"/>
+          <a:lstStyle/>
+          <a:p>
+            <a:pPr indent="0" marL="0">
+              <a:buNone/>
+            </a:pPr>
+            <a:r>
+              <a:rPr lang="en-US" sz="3200" b="1" dirty="0">
+                <a:solidFill>
+                  <a:schemeClr val="accent1"/>
+                </a:solidFill>
+                <a:latin typeface="Century Gothic" pitchFamily="34" charset="0"/>
+                <a:ea typeface="Century Gothic" pitchFamily="34" charset="-122"/>
+                <a:cs typeface="Century Gothic" pitchFamily="34" charset="-120"/>
+              </a:rPr>
               <a:t>You can, but be careful.</a:t>
             </a:r>
             <a:endParaRPr lang="en-US" sz="3200" dirty="0"/>
@@ -8140,7 +11352,7 @@
       </p:sp>
       <p:graphicFrame>
         <p:nvGraphicFramePr>
-          <p:cNvPr id="8" name="Affordability sum"/>
+          <p:cNvPr id="10" name="Affordability sum"/>
           <p:cNvGraphicFramePr>
             <a:graphicFrameLocks noGrp="1"/>
           </p:cNvGraphicFramePr>
@@ -8696,1279 +11908,6 @@
             <a:pPr algn="r"/>
             <a:fld id="{F7021451-1387-4CA6-816F-3879F97B5CBC}" type="slidenum">
               <a:rPr b="0" lang="en-US"/>
-              <a:t>7</a:t>
-            </a:fld>
-            <a:endParaRPr lang="en-US"/>
-          </a:p>
-        </p:txBody>
-      </p:sp>
-    </p:spTree>
-  </p:cSld>
-  <p:clrMapOvr>
-    <a:masterClrMapping/>
-  </p:clrMapOvr>
-</p:sld>
-</file>
-
-<file path=ppt/slides/slide8.xml><?xml version="1.0" encoding="utf-8"?>
-<p:sld xmlns:a="http://schemas.openxmlformats.org/drawingml/2006/main" xmlns:r="http://schemas.openxmlformats.org/officeDocument/2006/relationships" xmlns:p="http://schemas.openxmlformats.org/presentationml/2006/main">
-  <p:cSld name="Slide 8">
-    <p:spTree>
-      <p:nvGrpSpPr>
-        <p:cNvPr id="1" name=""/>
-        <p:cNvGrpSpPr/>
-        <p:nvPr/>
-      </p:nvGrpSpPr>
-      <p:grpSpPr>
-        <a:xfrm>
-          <a:off x="0" y="0"/>
-          <a:ext cx="0" cy="0"/>
-          <a:chOff x="0" y="0"/>
-          <a:chExt cx="0" cy="0"/>
-        </a:xfrm>
-      </p:grpSpPr>
-      <p:sp>
-        <p:nvSpPr>
-          <p:cNvPr id="2" name="Text 0"/>
-          <p:cNvSpPr/>
-          <p:nvPr>
-            <p:ph idx="100" type="body" hasCustomPrompt="1"/>
-          </p:nvPr>
-        </p:nvSpPr>
-        <p:spPr>
-          <a:xfrm>
-            <a:off x="685800" y="548640"/>
-            <a:ext cx="10820095" cy="365760"/>
-          </a:xfrm>
-          <a:prstGeom prst="rect">
-            <a:avLst/>
-          </a:prstGeom>
-          <a:noFill/>
-          <a:ln/>
-        </p:spPr>
-        <p:txBody>
-          <a:bodyPr wrap="square" lIns="0" tIns="0" rIns="0" bIns="0" rtlCol="0"/>
-          <a:lstStyle/>
-          <a:p>
-            <a:pPr indent="0" marL="0">
-              <a:buNone/>
-            </a:pPr>
-            <a:r>
-              <a:rPr lang="en-US" sz="1400" b="1" spc="200" kern="0" dirty="0">
-                <a:solidFill>
-                  <a:schemeClr val="accent1"/>
-                </a:solidFill>
-              </a:rPr>
-              <a:t>WORKING TODAY</a:t>
-            </a:r>
-            <a:endParaRPr lang="en-US" sz="1400" dirty="0"/>
-          </a:p>
-        </p:txBody>
-      </p:sp>
-      <p:sp>
-        <p:nvSpPr>
-          <p:cNvPr id="3" name="Text 0"/>
-          <p:cNvSpPr/>
-          <p:nvPr>
-            <p:ph idx="101" type="title" hasCustomPrompt="1"/>
-          </p:nvPr>
-        </p:nvSpPr>
-        <p:spPr>
-          <a:xfrm>
-            <a:off x="685800" y="914400"/>
-            <a:ext cx="10820095" cy="868680"/>
-          </a:xfrm>
-          <a:prstGeom prst="rect">
-            <a:avLst/>
-          </a:prstGeom>
-          <a:noFill/>
-          <a:ln/>
-        </p:spPr>
-        <p:txBody>
-          <a:bodyPr wrap="square" lIns="0" tIns="0" rIns="0" bIns="0" rtlCol="0" anchor="t"/>
-          <a:lstStyle/>
-          <a:p>
-            <a:pPr algn="l" indent="0" marL="0">
-              <a:buNone/>
-            </a:pPr>
-            <a:r>
-              <a:rPr lang="en-US" sz="3400" b="1" dirty="0">
-                <a:solidFill>
-                  <a:schemeClr val="tx1"/>
-                </a:solidFill>
-                <a:latin typeface="Century Gothic" pitchFamily="34" charset="0"/>
-                <a:ea typeface="Century Gothic" pitchFamily="34" charset="-122"/>
-                <a:cs typeface="Century Gothic" pitchFamily="34" charset="-120"/>
-              </a:rPr>
-              <a:t>What the prototype already does</a:t>
-            </a:r>
-            <a:endParaRPr lang="en-US" sz="3400" dirty="0"/>
-          </a:p>
-        </p:txBody>
-      </p:sp>
-      <p:sp>
-        <p:nvSpPr>
-          <p:cNvPr id="4" name="Stat 1 card"/>
-          <p:cNvSpPr/>
-          <p:nvPr/>
-        </p:nvSpPr>
-        <p:spPr>
-          <a:xfrm>
-            <a:off x="685800" y="1965960"/>
-            <a:ext cx="2533574" cy="2103120"/>
-          </a:xfrm>
-          <a:prstGeom prst="roundRect">
-            <a:avLst>
-              <a:gd name="adj" fmla="val 6957"/>
-            </a:avLst>
-          </a:prstGeom>
-          <a:solidFill>
-            <a:srgbClr val="FFFFFF"/>
-          </a:solidFill>
-          <a:ln w="12700">
-            <a:solidFill>
-              <a:srgbClr val="E7DCE5"/>
-            </a:solidFill>
-            <a:prstDash val="solid"/>
-          </a:ln>
-        </p:spPr>
-      </p:sp>
-      <p:sp>
-        <p:nvSpPr>
-          <p:cNvPr id="5" name="Stat 1 figure"/>
-          <p:cNvSpPr txBox="1"/>
-          <p:nvPr/>
-        </p:nvSpPr>
-        <p:spPr>
-          <a:xfrm>
-            <a:off x="960120" y="2240280"/>
-            <a:ext cx="1984934" cy="685800"/>
-          </a:xfrm>
-          <a:prstGeom prst="rect">
-            <a:avLst/>
-          </a:prstGeom>
-          <a:noFill/>
-          <a:ln/>
-        </p:spPr>
-        <p:txBody>
-          <a:bodyPr wrap="square" lIns="0" tIns="0" rIns="0" bIns="0" rtlCol="0" anchor="t"/>
-          <a:lstStyle/>
-          <a:p>
-            <a:pPr indent="0" marL="0">
-              <a:buNone/>
-            </a:pPr>
-            <a:r>
-              <a:rPr lang="en-US" sz="4000" b="1" dirty="0">
-                <a:solidFill>
-                  <a:schemeClr val="accent1"/>
-                </a:solidFill>
-                <a:latin typeface="Century Gothic" pitchFamily="34" charset="0"/>
-                <a:ea typeface="Century Gothic" pitchFamily="34" charset="-122"/>
-                <a:cs typeface="Century Gothic" pitchFamily="34" charset="-120"/>
-              </a:rPr>
-              <a:t>247</a:t>
-            </a:r>
-            <a:endParaRPr lang="en-US" sz="4000" dirty="0"/>
-          </a:p>
-        </p:txBody>
-      </p:sp>
-      <p:sp>
-        <p:nvSpPr>
-          <p:cNvPr id="6" name="Stat 1 label"/>
-          <p:cNvSpPr txBox="1"/>
-          <p:nvPr/>
-        </p:nvSpPr>
-        <p:spPr>
-          <a:xfrm>
-            <a:off x="960120" y="3017520"/>
-            <a:ext cx="1984934" cy="914400"/>
-          </a:xfrm>
-          <a:prstGeom prst="rect">
-            <a:avLst/>
-          </a:prstGeom>
-          <a:noFill/>
-          <a:ln/>
-        </p:spPr>
-        <p:txBody>
-          <a:bodyPr wrap="square" lIns="0" tIns="0" rIns="0" bIns="0" rtlCol="0" anchor="t"/>
-          <a:lstStyle/>
-          <a:p>
-            <a:pPr indent="0" marL="0">
-              <a:buNone/>
-            </a:pPr>
-            <a:r>
-              <a:rPr lang="en-US" sz="1600" dirty="0">
-                <a:solidFill>
-                  <a:schemeClr val="tx1"/>
-                </a:solidFill>
-              </a:rPr>
-              <a:t>transactions understood in seconds</a:t>
-            </a:r>
-            <a:endParaRPr lang="en-US" sz="1600" dirty="0"/>
-          </a:p>
-        </p:txBody>
-      </p:sp>
-      <p:sp>
-        <p:nvSpPr>
-          <p:cNvPr id="7" name="Stat 2 card"/>
-          <p:cNvSpPr/>
-          <p:nvPr/>
-        </p:nvSpPr>
-        <p:spPr>
-          <a:xfrm>
-            <a:off x="3447974" y="1965960"/>
-            <a:ext cx="2533574" cy="2103120"/>
-          </a:xfrm>
-          <a:prstGeom prst="roundRect">
-            <a:avLst>
-              <a:gd name="adj" fmla="val 6957"/>
-            </a:avLst>
-          </a:prstGeom>
-          <a:solidFill>
-            <a:srgbClr val="FFFFFF"/>
-          </a:solidFill>
-          <a:ln w="12700">
-            <a:solidFill>
-              <a:srgbClr val="E7DCE5"/>
-            </a:solidFill>
-            <a:prstDash val="solid"/>
-          </a:ln>
-        </p:spPr>
-      </p:sp>
-      <p:sp>
-        <p:nvSpPr>
-          <p:cNvPr id="8" name="Stat 2 figure"/>
-          <p:cNvSpPr txBox="1"/>
-          <p:nvPr/>
-        </p:nvSpPr>
-        <p:spPr>
-          <a:xfrm>
-            <a:off x="3722294" y="2240280"/>
-            <a:ext cx="1984934" cy="685800"/>
-          </a:xfrm>
-          <a:prstGeom prst="rect">
-            <a:avLst/>
-          </a:prstGeom>
-          <a:noFill/>
-          <a:ln/>
-        </p:spPr>
-        <p:txBody>
-          <a:bodyPr wrap="square" lIns="0" tIns="0" rIns="0" bIns="0" rtlCol="0" anchor="t"/>
-          <a:lstStyle/>
-          <a:p>
-            <a:pPr indent="0" marL="0">
-              <a:buNone/>
-            </a:pPr>
-            <a:r>
-              <a:rPr lang="en-US" sz="4000" b="1" dirty="0">
-                <a:solidFill>
-                  <a:schemeClr val="accent1"/>
-                </a:solidFill>
-                <a:latin typeface="Century Gothic" pitchFamily="34" charset="0"/>
-                <a:ea typeface="Century Gothic" pitchFamily="34" charset="-122"/>
-                <a:cs typeface="Century Gothic" pitchFamily="34" charset="-120"/>
-              </a:rPr>
-              <a:t>97.6%</a:t>
-            </a:r>
-            <a:endParaRPr lang="en-US" sz="4000" dirty="0"/>
-          </a:p>
-        </p:txBody>
-      </p:sp>
-      <p:sp>
-        <p:nvSpPr>
-          <p:cNvPr id="9" name="Stat 2 label"/>
-          <p:cNvSpPr txBox="1"/>
-          <p:nvPr/>
-        </p:nvSpPr>
-        <p:spPr>
-          <a:xfrm>
-            <a:off x="3722294" y="3017520"/>
-            <a:ext cx="1984934" cy="914400"/>
-          </a:xfrm>
-          <a:prstGeom prst="rect">
-            <a:avLst/>
-          </a:prstGeom>
-          <a:noFill/>
-          <a:ln/>
-        </p:spPr>
-        <p:txBody>
-          <a:bodyPr wrap="square" lIns="0" tIns="0" rIns="0" bIns="0" rtlCol="0" anchor="t"/>
-          <a:lstStyle/>
-          <a:p>
-            <a:pPr indent="0" marL="0">
-              <a:buNone/>
-            </a:pPr>
-            <a:r>
-              <a:rPr lang="en-US" sz="1600" dirty="0">
-                <a:solidFill>
-                  <a:schemeClr val="tx1"/>
-                </a:solidFill>
-              </a:rPr>
-              <a:t>categorized correctly, with no confident mistakes</a:t>
-            </a:r>
-            <a:endParaRPr lang="en-US" sz="1600" dirty="0"/>
-          </a:p>
-        </p:txBody>
-      </p:sp>
-      <p:sp>
-        <p:nvSpPr>
-          <p:cNvPr id="10" name="Stat 3 card"/>
-          <p:cNvSpPr/>
-          <p:nvPr/>
-        </p:nvSpPr>
-        <p:spPr>
-          <a:xfrm>
-            <a:off x="6210148" y="1965960"/>
-            <a:ext cx="2533574" cy="2103120"/>
-          </a:xfrm>
-          <a:prstGeom prst="roundRect">
-            <a:avLst>
-              <a:gd name="adj" fmla="val 6957"/>
-            </a:avLst>
-          </a:prstGeom>
-          <a:solidFill>
-            <a:srgbClr val="FFFFFF"/>
-          </a:solidFill>
-          <a:ln w="12700">
-            <a:solidFill>
-              <a:srgbClr val="E7DCE5"/>
-            </a:solidFill>
-            <a:prstDash val="solid"/>
-          </a:ln>
-        </p:spPr>
-      </p:sp>
-      <p:sp>
-        <p:nvSpPr>
-          <p:cNvPr id="11" name="Stat 3 figure"/>
-          <p:cNvSpPr txBox="1"/>
-          <p:nvPr/>
-        </p:nvSpPr>
-        <p:spPr>
-          <a:xfrm>
-            <a:off x="6484468" y="2240280"/>
-            <a:ext cx="1984934" cy="685800"/>
-          </a:xfrm>
-          <a:prstGeom prst="rect">
-            <a:avLst/>
-          </a:prstGeom>
-          <a:noFill/>
-          <a:ln/>
-        </p:spPr>
-        <p:txBody>
-          <a:bodyPr wrap="square" lIns="0" tIns="0" rIns="0" bIns="0" rtlCol="0" anchor="t"/>
-          <a:lstStyle/>
-          <a:p>
-            <a:pPr indent="0" marL="0">
-              <a:buNone/>
-            </a:pPr>
-            <a:r>
-              <a:rPr lang="en-US" sz="4000" b="1" dirty="0">
-                <a:solidFill>
-                  <a:schemeClr val="accent1"/>
-                </a:solidFill>
-                <a:latin typeface="Century Gothic" pitchFamily="34" charset="0"/>
-                <a:ea typeface="Century Gothic" pitchFamily="34" charset="-122"/>
-                <a:cs typeface="Century Gothic" pitchFamily="34" charset="-120"/>
-              </a:rPr>
-              <a:t>14 days</a:t>
-            </a:r>
-            <a:endParaRPr lang="en-US" sz="4000" dirty="0"/>
-          </a:p>
-        </p:txBody>
-      </p:sp>
-      <p:sp>
-        <p:nvSpPr>
-          <p:cNvPr id="12" name="Stat 3 label"/>
-          <p:cNvSpPr txBox="1"/>
-          <p:nvPr/>
-        </p:nvSpPr>
-        <p:spPr>
-          <a:xfrm>
-            <a:off x="6484468" y="3017520"/>
-            <a:ext cx="1984934" cy="914400"/>
-          </a:xfrm>
-          <a:prstGeom prst="rect">
-            <a:avLst/>
-          </a:prstGeom>
-          <a:noFill/>
-          <a:ln/>
-        </p:spPr>
-        <p:txBody>
-          <a:bodyPr wrap="square" lIns="0" tIns="0" rIns="0" bIns="0" rtlCol="0" anchor="t"/>
-          <a:lstStyle/>
-          <a:p>
-            <a:pPr indent="0" marL="0">
-              <a:buNone/>
-            </a:pPr>
-            <a:r>
-              <a:rPr lang="en-US" sz="1600" dirty="0">
-                <a:solidFill>
-                  <a:schemeClr val="tx1"/>
-                </a:solidFill>
-              </a:rPr>
-              <a:t>of cash pressure seen ahead</a:t>
-            </a:r>
-            <a:endParaRPr lang="en-US" sz="1600" dirty="0"/>
-          </a:p>
-        </p:txBody>
-      </p:sp>
-      <p:sp>
-        <p:nvSpPr>
-          <p:cNvPr id="13" name="Stat 4 card"/>
-          <p:cNvSpPr/>
-          <p:nvPr/>
-        </p:nvSpPr>
-        <p:spPr>
-          <a:xfrm>
-            <a:off x="8972321" y="1965960"/>
-            <a:ext cx="2533574" cy="2103120"/>
-          </a:xfrm>
-          <a:prstGeom prst="roundRect">
-            <a:avLst>
-              <a:gd name="adj" fmla="val 6957"/>
-            </a:avLst>
-          </a:prstGeom>
-          <a:solidFill>
-            <a:srgbClr val="FFFFFF"/>
-          </a:solidFill>
-          <a:ln w="12700">
-            <a:solidFill>
-              <a:srgbClr val="E7DCE5"/>
-            </a:solidFill>
-            <a:prstDash val="solid"/>
-          </a:ln>
-        </p:spPr>
-      </p:sp>
-      <p:sp>
-        <p:nvSpPr>
-          <p:cNvPr id="14" name="Stat 4 figure"/>
-          <p:cNvSpPr txBox="1"/>
-          <p:nvPr/>
-        </p:nvSpPr>
-        <p:spPr>
-          <a:xfrm>
-            <a:off x="9246641" y="2240280"/>
-            <a:ext cx="1984934" cy="685800"/>
-          </a:xfrm>
-          <a:prstGeom prst="rect">
-            <a:avLst/>
-          </a:prstGeom>
-          <a:noFill/>
-          <a:ln/>
-        </p:spPr>
-        <p:txBody>
-          <a:bodyPr wrap="square" lIns="0" tIns="0" rIns="0" bIns="0" rtlCol="0" anchor="t"/>
-          <a:lstStyle/>
-          <a:p>
-            <a:pPr indent="0" marL="0">
-              <a:buNone/>
-            </a:pPr>
-            <a:r>
-              <a:rPr lang="en-US" sz="4000" b="1" dirty="0">
-                <a:solidFill>
-                  <a:schemeClr val="accent1"/>
-                </a:solidFill>
-                <a:latin typeface="Century Gothic" pitchFamily="34" charset="0"/>
-                <a:ea typeface="Century Gothic" pitchFamily="34" charset="-122"/>
-                <a:cs typeface="Century Gothic" pitchFamily="34" charset="-120"/>
-              </a:rPr>
-              <a:t>100%</a:t>
-            </a:r>
-            <a:endParaRPr lang="en-US" sz="4000" dirty="0"/>
-          </a:p>
-        </p:txBody>
-      </p:sp>
-      <p:sp>
-        <p:nvSpPr>
-          <p:cNvPr id="15" name="Stat 4 label"/>
-          <p:cNvSpPr txBox="1"/>
-          <p:nvPr/>
-        </p:nvSpPr>
-        <p:spPr>
-          <a:xfrm>
-            <a:off x="9246641" y="3017520"/>
-            <a:ext cx="1984934" cy="914400"/>
-          </a:xfrm>
-          <a:prstGeom prst="rect">
-            <a:avLst/>
-          </a:prstGeom>
-          <a:noFill/>
-          <a:ln/>
-        </p:spPr>
-        <p:txBody>
-          <a:bodyPr wrap="square" lIns="0" tIns="0" rIns="0" bIns="0" rtlCol="0" anchor="t"/>
-          <a:lstStyle/>
-          <a:p>
-            <a:pPr indent="0" marL="0">
-              <a:buNone/>
-            </a:pPr>
-            <a:r>
-              <a:rPr lang="en-US" sz="1600" dirty="0">
-                <a:solidFill>
-                  <a:schemeClr val="tx1"/>
-                </a:solidFill>
-              </a:rPr>
-              <a:t>of numbers in explanations checked against the engine</a:t>
-            </a:r>
-            <a:endParaRPr lang="en-US" sz="1600" dirty="0"/>
-          </a:p>
-        </p:txBody>
-      </p:sp>
-      <p:sp>
-        <p:nvSpPr>
-          <p:cNvPr id="16" name="Also built"/>
-          <p:cNvSpPr txBox="1"/>
-          <p:nvPr/>
-        </p:nvSpPr>
-        <p:spPr>
-          <a:xfrm>
-            <a:off x="685800" y="4434840"/>
-            <a:ext cx="10820095" cy="457200"/>
-          </a:xfrm>
-          <a:prstGeom prst="rect">
-            <a:avLst/>
-          </a:prstGeom>
-          <a:noFill/>
-          <a:ln/>
-        </p:spPr>
-        <p:txBody>
-          <a:bodyPr wrap="square" lIns="0" tIns="0" rIns="0" bIns="0" rtlCol="0" anchor="t"/>
-          <a:lstStyle/>
-          <a:p>
-            <a:pPr indent="0" marL="0">
-              <a:buNone/>
-            </a:pPr>
-            <a:r>
-              <a:rPr lang="en-US" sz="1700" dirty="0">
-                <a:solidFill>
-                  <a:schemeClr val="accent3"/>
-                </a:solidFill>
-              </a:rPr>
-              <a:t>Also built in: works fully offline · designed for phones first · accessibility-checked (WCAG 2.1 AA) · 94 automated tests</a:t>
-            </a:r>
-            <a:endParaRPr lang="en-US" sz="1700" dirty="0"/>
-          </a:p>
-        </p:txBody>
-      </p:sp>
-      <p:sp>
-        <p:nvSpPr>
-          <p:cNvPr id="17" name="Source"/>
-          <p:cNvSpPr txBox="1"/>
-          <p:nvPr/>
-        </p:nvSpPr>
-        <p:spPr>
-          <a:xfrm>
-            <a:off x="685800" y="5806440"/>
-            <a:ext cx="7315200" cy="365760"/>
-          </a:xfrm>
-          <a:prstGeom prst="rect">
-            <a:avLst/>
-          </a:prstGeom>
-          <a:noFill/>
-          <a:ln/>
-        </p:spPr>
-        <p:txBody>
-          <a:bodyPr wrap="square" lIns="0" tIns="0" rIns="0" bIns="0" rtlCol="0" anchor="t"/>
-          <a:lstStyle/>
-          <a:p>
-            <a:pPr indent="0" marL="0">
-              <a:buNone/>
-            </a:pPr>
-            <a:r>
-              <a:rPr lang="en-US" sz="1200" dirty="0">
-                <a:solidFill>
-                  <a:srgbClr val="6E6370"/>
-                </a:solidFill>
-              </a:rPr>
-              <a:t>Figures measured on the 6-month demo dataset.</a:t>
-            </a:r>
-            <a:endParaRPr lang="en-US" sz="1200" dirty="0"/>
-          </a:p>
-        </p:txBody>
-      </p:sp>
-      <p:sp>
-        <p:nvSpPr>
-          <p:cNvPr id="25" name="Slide Number Placeholder 0"/>
-          <p:cNvSpPr>
-            <a:spLocks noGrp="1"/>
-          </p:cNvSpPr>
-          <p:nvPr>
-            <p:ph type="sldNum" sz="quarter" idx="4294967295"/>
-          </p:nvPr>
-        </p:nvSpPr>
-        <p:spPr>
-          <a:xfrm>
-            <a:off x="10972800" y="6263640"/>
-            <a:ext cx="530352" cy="320040"/>
-          </a:xfrm>
-          <a:prstGeom prst="rect">
-            <a:avLst/>
-          </a:prstGeom>
-          <a:extLst>
-            <a:ext uri="{C572A759-6A51-4108-AA02-DFA0A04FC94B}">
-              <ma14:wrappingTextBoxFlag xmlns:ma14="http://schemas.microsoft.com/office/mac/drawingml/2011/main" val="0"/>
-            </a:ext>
-          </a:extLst>
-        </p:spPr>
-        <p:txBody>
-          <a:bodyPr/>
-          <a:lstStyle>
-            <a:lvl1pPr>
-              <a:defRPr sz="1200">
-                <a:solidFill>
-                  <a:srgbClr val="6E6370"/>
-                </a:solidFill>
-              </a:defRPr>
-            </a:lvl1pPr>
-          </a:lstStyle>
-          <a:p>
-            <a:pPr algn="r"/>
-            <a:fld id="{F7021451-1387-4CA6-816F-3879F97B5CBC}" type="slidenum">
-              <a:rPr b="0" lang="en-US"/>
-              <a:t>8</a:t>
-            </a:fld>
-            <a:endParaRPr lang="en-US"/>
-          </a:p>
-        </p:txBody>
-      </p:sp>
-    </p:spTree>
-  </p:cSld>
-  <p:clrMapOvr>
-    <a:masterClrMapping/>
-  </p:clrMapOvr>
-</p:sld>
-</file>
-
-<file path=ppt/slides/slide9.xml><?xml version="1.0" encoding="utf-8"?>
-<p:sld xmlns:a="http://schemas.openxmlformats.org/drawingml/2006/main" xmlns:r="http://schemas.openxmlformats.org/officeDocument/2006/relationships" xmlns:p="http://schemas.openxmlformats.org/presentationml/2006/main">
-  <p:cSld name="Slide 9">
-    <p:spTree>
-      <p:nvGrpSpPr>
-        <p:cNvPr id="1" name=""/>
-        <p:cNvGrpSpPr/>
-        <p:nvPr/>
-      </p:nvGrpSpPr>
-      <p:grpSpPr>
-        <a:xfrm>
-          <a:off x="0" y="0"/>
-          <a:ext cx="0" cy="0"/>
-          <a:chOff x="0" y="0"/>
-          <a:chExt cx="0" cy="0"/>
-        </a:xfrm>
-      </p:grpSpPr>
-      <p:sp>
-        <p:nvSpPr>
-          <p:cNvPr id="2" name="Text 0"/>
-          <p:cNvSpPr/>
-          <p:nvPr>
-            <p:ph idx="100" type="body" hasCustomPrompt="1"/>
-          </p:nvPr>
-        </p:nvSpPr>
-        <p:spPr>
-          <a:xfrm>
-            <a:off x="685800" y="548640"/>
-            <a:ext cx="10820095" cy="365760"/>
-          </a:xfrm>
-          <a:prstGeom prst="rect">
-            <a:avLst/>
-          </a:prstGeom>
-          <a:noFill/>
-          <a:ln/>
-        </p:spPr>
-        <p:txBody>
-          <a:bodyPr wrap="square" lIns="0" tIns="0" rIns="0" bIns="0" rtlCol="0"/>
-          <a:lstStyle/>
-          <a:p>
-            <a:pPr indent="0" marL="0">
-              <a:buNone/>
-            </a:pPr>
-            <a:r>
-              <a:rPr lang="en-US" sz="1400" b="1" spc="200" kern="0" dirty="0">
-                <a:solidFill>
-                  <a:schemeClr val="accent1"/>
-                </a:solidFill>
-              </a:rPr>
-              <a:t>WHY IT MATTERS TO WEMA</a:t>
-            </a:r>
-            <a:endParaRPr lang="en-US" sz="1400" dirty="0"/>
-          </a:p>
-        </p:txBody>
-      </p:sp>
-      <p:sp>
-        <p:nvSpPr>
-          <p:cNvPr id="3" name="Text 0"/>
-          <p:cNvSpPr/>
-          <p:nvPr>
-            <p:ph idx="101" type="title" hasCustomPrompt="1"/>
-          </p:nvPr>
-        </p:nvSpPr>
-        <p:spPr>
-          <a:xfrm>
-            <a:off x="685800" y="914400"/>
-            <a:ext cx="10820095" cy="868680"/>
-          </a:xfrm>
-          <a:prstGeom prst="rect">
-            <a:avLst/>
-          </a:prstGeom>
-          <a:noFill/>
-          <a:ln/>
-        </p:spPr>
-        <p:txBody>
-          <a:bodyPr wrap="square" lIns="0" tIns="0" rIns="0" bIns="0" rtlCol="0" anchor="t"/>
-          <a:lstStyle/>
-          <a:p>
-            <a:pPr algn="l" indent="0" marL="0">
-              <a:buNone/>
-            </a:pPr>
-            <a:r>
-              <a:rPr lang="en-US" sz="3400" b="1" dirty="0">
-                <a:solidFill>
-                  <a:schemeClr val="tx1"/>
-                </a:solidFill>
-                <a:latin typeface="Century Gothic" pitchFamily="34" charset="0"/>
-                <a:ea typeface="Century Gothic" pitchFamily="34" charset="-122"/>
-                <a:cs typeface="Century Gothic" pitchFamily="34" charset="-120"/>
-              </a:rPr>
-              <a:t>Built on data Wema already has</a:t>
-            </a:r>
-            <a:endParaRPr lang="en-US" sz="3400" dirty="0"/>
-          </a:p>
-        </p:txBody>
-      </p:sp>
-      <p:sp>
-        <p:nvSpPr>
-          <p:cNvPr id="4" name="Benefit 1 card"/>
-          <p:cNvSpPr/>
-          <p:nvPr/>
-        </p:nvSpPr>
-        <p:spPr>
-          <a:xfrm>
-            <a:off x="685800" y="1965960"/>
-            <a:ext cx="3703320" cy="1691640"/>
-          </a:xfrm>
-          <a:prstGeom prst="roundRect">
-            <a:avLst>
-              <a:gd name="adj" fmla="val 8649"/>
-            </a:avLst>
-          </a:prstGeom>
-          <a:solidFill>
-            <a:srgbClr val="FFFFFF"/>
-          </a:solidFill>
-          <a:ln w="12700">
-            <a:solidFill>
-              <a:srgbClr val="E7DCE5"/>
-            </a:solidFill>
-            <a:prstDash val="solid"/>
-          </a:ln>
-        </p:spPr>
-      </p:sp>
-      <p:sp>
-        <p:nvSpPr>
-          <p:cNvPr id="5" name="Benefit 1 title"/>
-          <p:cNvSpPr txBox="1"/>
-          <p:nvPr/>
-        </p:nvSpPr>
-        <p:spPr>
-          <a:xfrm>
-            <a:off x="960120" y="2194560"/>
-            <a:ext cx="3154680" cy="685800"/>
-          </a:xfrm>
-          <a:prstGeom prst="rect">
-            <a:avLst/>
-          </a:prstGeom>
-          <a:noFill/>
-          <a:ln/>
-        </p:spPr>
-        <p:txBody>
-          <a:bodyPr wrap="square" lIns="0" tIns="0" rIns="0" bIns="0" rtlCol="0" anchor="t"/>
-          <a:lstStyle/>
-          <a:p>
-            <a:pPr indent="0" marL="0">
-              <a:buNone/>
-            </a:pPr>
-            <a:r>
-              <a:rPr lang="en-US" sz="1800" b="1" dirty="0">
-                <a:solidFill>
-                  <a:schemeClr val="tx1"/>
-                </a:solidFill>
-                <a:latin typeface="Century Gothic" pitchFamily="34" charset="0"/>
-                <a:ea typeface="Century Gothic" pitchFamily="34" charset="-122"/>
-                <a:cs typeface="Century Gothic" pitchFamily="34" charset="-120"/>
-              </a:rPr>
-              <a:t>A reason to open the app every week</a:t>
-            </a:r>
-            <a:endParaRPr lang="en-US" sz="1800" dirty="0"/>
-          </a:p>
-        </p:txBody>
-      </p:sp>
-      <p:sp>
-        <p:nvSpPr>
-          <p:cNvPr id="6" name="Benefit 1 detail"/>
-          <p:cNvSpPr txBox="1"/>
-          <p:nvPr/>
-        </p:nvSpPr>
-        <p:spPr>
-          <a:xfrm>
-            <a:off x="960120" y="2880360"/>
-            <a:ext cx="3154680" cy="685800"/>
-          </a:xfrm>
-          <a:prstGeom prst="rect">
-            <a:avLst/>
-          </a:prstGeom>
-          <a:noFill/>
-          <a:ln/>
-        </p:spPr>
-        <p:txBody>
-          <a:bodyPr wrap="square" lIns="0" tIns="0" rIns="0" bIns="0" rtlCol="0" anchor="t"/>
-          <a:lstStyle/>
-          <a:p>
-            <a:pPr indent="0" marL="0">
-              <a:buNone/>
-            </a:pPr>
-            <a:r>
-              <a:rPr lang="en-US" sz="1400" dirty="0">
-                <a:solidFill>
-                  <a:schemeClr val="accent3"/>
-                </a:solidFill>
-              </a:rPr>
-              <a:t>Owners come back for answers, not just balances.</a:t>
-            </a:r>
-            <a:endParaRPr lang="en-US" sz="1400" dirty="0"/>
-          </a:p>
-        </p:txBody>
-      </p:sp>
-      <p:sp>
-        <p:nvSpPr>
-          <p:cNvPr id="7" name="Benefit 2 card"/>
-          <p:cNvSpPr/>
-          <p:nvPr/>
-        </p:nvSpPr>
-        <p:spPr>
-          <a:xfrm>
-            <a:off x="4617720" y="1965960"/>
-            <a:ext cx="3703320" cy="1691640"/>
-          </a:xfrm>
-          <a:prstGeom prst="roundRect">
-            <a:avLst>
-              <a:gd name="adj" fmla="val 8649"/>
-            </a:avLst>
-          </a:prstGeom>
-          <a:solidFill>
-            <a:srgbClr val="FFFFFF"/>
-          </a:solidFill>
-          <a:ln w="12700">
-            <a:solidFill>
-              <a:srgbClr val="E7DCE5"/>
-            </a:solidFill>
-            <a:prstDash val="solid"/>
-          </a:ln>
-        </p:spPr>
-      </p:sp>
-      <p:sp>
-        <p:nvSpPr>
-          <p:cNvPr id="8" name="Benefit 2 title"/>
-          <p:cNvSpPr txBox="1"/>
-          <p:nvPr/>
-        </p:nvSpPr>
-        <p:spPr>
-          <a:xfrm>
-            <a:off x="4892040" y="2194560"/>
-            <a:ext cx="3154680" cy="685800"/>
-          </a:xfrm>
-          <a:prstGeom prst="rect">
-            <a:avLst/>
-          </a:prstGeom>
-          <a:noFill/>
-          <a:ln/>
-        </p:spPr>
-        <p:txBody>
-          <a:bodyPr wrap="square" lIns="0" tIns="0" rIns="0" bIns="0" rtlCol="0" anchor="t"/>
-          <a:lstStyle/>
-          <a:p>
-            <a:pPr indent="0" marL="0">
-              <a:buNone/>
-            </a:pPr>
-            <a:r>
-              <a:rPr lang="en-US" sz="1800" b="1" dirty="0">
-                <a:solidFill>
-                  <a:schemeClr val="tx1"/>
-                </a:solidFill>
-                <a:latin typeface="Century Gothic" pitchFamily="34" charset="0"/>
-                <a:ea typeface="Century Gothic" pitchFamily="34" charset="-122"/>
-                <a:cs typeface="Century Gothic" pitchFamily="34" charset="-120"/>
-              </a:rPr>
-              <a:t>Healthier SME customers</a:t>
-            </a:r>
-            <a:endParaRPr lang="en-US" sz="1800" dirty="0"/>
-          </a:p>
-        </p:txBody>
-      </p:sp>
-      <p:sp>
-        <p:nvSpPr>
-          <p:cNvPr id="9" name="Benefit 2 detail"/>
-          <p:cNvSpPr txBox="1"/>
-          <p:nvPr/>
-        </p:nvSpPr>
-        <p:spPr>
-          <a:xfrm>
-            <a:off x="4892040" y="2880360"/>
-            <a:ext cx="3154680" cy="685800"/>
-          </a:xfrm>
-          <a:prstGeom prst="rect">
-            <a:avLst/>
-          </a:prstGeom>
-          <a:noFill/>
-          <a:ln/>
-        </p:spPr>
-        <p:txBody>
-          <a:bodyPr wrap="square" lIns="0" tIns="0" rIns="0" bIns="0" rtlCol="0" anchor="t"/>
-          <a:lstStyle/>
-          <a:p>
-            <a:pPr indent="0" marL="0">
-              <a:buNone/>
-            </a:pPr>
-            <a:r>
-              <a:rPr lang="en-US" sz="1400" dirty="0">
-                <a:solidFill>
-                  <a:schemeClr val="accent3"/>
-                </a:solidFill>
-              </a:rPr>
-              <a:t>Owners who see cash pressure early can act before it becomes a crisis.</a:t>
-            </a:r>
-            <a:endParaRPr lang="en-US" sz="1400" dirty="0"/>
-          </a:p>
-        </p:txBody>
-      </p:sp>
-      <p:sp>
-        <p:nvSpPr>
-          <p:cNvPr id="10" name="Benefit 3 card"/>
-          <p:cNvSpPr/>
-          <p:nvPr/>
-        </p:nvSpPr>
-        <p:spPr>
-          <a:xfrm>
-            <a:off x="685800" y="3886200"/>
-            <a:ext cx="3703320" cy="1691640"/>
-          </a:xfrm>
-          <a:prstGeom prst="roundRect">
-            <a:avLst>
-              <a:gd name="adj" fmla="val 8649"/>
-            </a:avLst>
-          </a:prstGeom>
-          <a:solidFill>
-            <a:srgbClr val="FFFFFF"/>
-          </a:solidFill>
-          <a:ln w="12700">
-            <a:solidFill>
-              <a:srgbClr val="E7DCE5"/>
-            </a:solidFill>
-            <a:prstDash val="solid"/>
-          </a:ln>
-        </p:spPr>
-      </p:sp>
-      <p:sp>
-        <p:nvSpPr>
-          <p:cNvPr id="11" name="Benefit 3 title"/>
-          <p:cNvSpPr txBox="1"/>
-          <p:nvPr/>
-        </p:nvSpPr>
-        <p:spPr>
-          <a:xfrm>
-            <a:off x="960120" y="4114800"/>
-            <a:ext cx="3154680" cy="685800"/>
-          </a:xfrm>
-          <a:prstGeom prst="rect">
-            <a:avLst/>
-          </a:prstGeom>
-          <a:noFill/>
-          <a:ln/>
-        </p:spPr>
-        <p:txBody>
-          <a:bodyPr wrap="square" lIns="0" tIns="0" rIns="0" bIns="0" rtlCol="0" anchor="t"/>
-          <a:lstStyle/>
-          <a:p>
-            <a:pPr indent="0" marL="0">
-              <a:buNone/>
-            </a:pPr>
-            <a:r>
-              <a:rPr lang="en-US" sz="1800" b="1" dirty="0">
-                <a:solidFill>
-                  <a:schemeClr val="tx1"/>
-                </a:solidFill>
-                <a:latin typeface="Century Gothic" pitchFamily="34" charset="0"/>
-                <a:ea typeface="Century Gothic" pitchFamily="34" charset="-122"/>
-                <a:cs typeface="Century Gothic" pitchFamily="34" charset="-120"/>
-              </a:rPr>
-              <a:t>A clearer view of SME activity</a:t>
-            </a:r>
-            <a:endParaRPr lang="en-US" sz="1800" dirty="0"/>
-          </a:p>
-        </p:txBody>
-      </p:sp>
-      <p:sp>
-        <p:nvSpPr>
-          <p:cNvPr id="12" name="Benefit 3 detail"/>
-          <p:cNvSpPr txBox="1"/>
-          <p:nvPr/>
-        </p:nvSpPr>
-        <p:spPr>
-          <a:xfrm>
-            <a:off x="960120" y="4800600"/>
-            <a:ext cx="3154680" cy="685800"/>
-          </a:xfrm>
-          <a:prstGeom prst="rect">
-            <a:avLst/>
-          </a:prstGeom>
-          <a:noFill/>
-          <a:ln/>
-        </p:spPr>
-        <p:txBody>
-          <a:bodyPr wrap="square" lIns="0" tIns="0" rIns="0" bIns="0" rtlCol="0" anchor="t"/>
-          <a:lstStyle/>
-          <a:p>
-            <a:pPr indent="0" marL="0">
-              <a:buNone/>
-            </a:pPr>
-            <a:r>
-              <a:rPr lang="en-US" sz="1400" dirty="0">
-                <a:solidFill>
-                  <a:schemeClr val="accent3"/>
-                </a:solidFill>
-              </a:rPr>
-              <a:t>With consent, insight into how small businesses are really doing.</a:t>
-            </a:r>
-            <a:endParaRPr lang="en-US" sz="1400" dirty="0"/>
-          </a:p>
-        </p:txBody>
-      </p:sp>
-      <p:sp>
-        <p:nvSpPr>
-          <p:cNvPr id="13" name="Benefit 4 card"/>
-          <p:cNvSpPr/>
-          <p:nvPr/>
-        </p:nvSpPr>
-        <p:spPr>
-          <a:xfrm>
-            <a:off x="4617720" y="3886200"/>
-            <a:ext cx="3703320" cy="1691640"/>
-          </a:xfrm>
-          <a:prstGeom prst="roundRect">
-            <a:avLst>
-              <a:gd name="adj" fmla="val 8649"/>
-            </a:avLst>
-          </a:prstGeom>
-          <a:solidFill>
-            <a:srgbClr val="FFFFFF"/>
-          </a:solidFill>
-          <a:ln w="12700">
-            <a:solidFill>
-              <a:srgbClr val="E7DCE5"/>
-            </a:solidFill>
-            <a:prstDash val="solid"/>
-          </a:ln>
-        </p:spPr>
-      </p:sp>
-      <p:sp>
-        <p:nvSpPr>
-          <p:cNvPr id="14" name="Benefit 4 title"/>
-          <p:cNvSpPr txBox="1"/>
-          <p:nvPr/>
-        </p:nvSpPr>
-        <p:spPr>
-          <a:xfrm>
-            <a:off x="4892040" y="4114800"/>
-            <a:ext cx="3154680" cy="685800"/>
-          </a:xfrm>
-          <a:prstGeom prst="rect">
-            <a:avLst/>
-          </a:prstGeom>
-          <a:noFill/>
-          <a:ln/>
-        </p:spPr>
-        <p:txBody>
-          <a:bodyPr wrap="square" lIns="0" tIns="0" rIns="0" bIns="0" rtlCol="0" anchor="t"/>
-          <a:lstStyle/>
-          <a:p>
-            <a:pPr indent="0" marL="0">
-              <a:buNone/>
-            </a:pPr>
-            <a:r>
-              <a:rPr lang="en-US" sz="1800" b="1" dirty="0">
-                <a:solidFill>
-                  <a:schemeClr val="tx1"/>
-                </a:solidFill>
-                <a:latin typeface="Century Gothic" pitchFamily="34" charset="0"/>
-                <a:ea typeface="Century Gothic" pitchFamily="34" charset="-122"/>
-                <a:cs typeface="Century Gothic" pitchFamily="34" charset="-120"/>
-              </a:rPr>
-              <a:t>A responsible path to products</a:t>
-            </a:r>
-            <a:endParaRPr lang="en-US" sz="1800" dirty="0"/>
-          </a:p>
-        </p:txBody>
-      </p:sp>
-      <p:sp>
-        <p:nvSpPr>
-          <p:cNvPr id="15" name="Benefit 4 detail"/>
-          <p:cNvSpPr txBox="1"/>
-          <p:nvPr/>
-        </p:nvSpPr>
-        <p:spPr>
-          <a:xfrm>
-            <a:off x="4892040" y="4800600"/>
-            <a:ext cx="3154680" cy="685800"/>
-          </a:xfrm>
-          <a:prstGeom prst="rect">
-            <a:avLst/>
-          </a:prstGeom>
-          <a:noFill/>
-          <a:ln/>
-        </p:spPr>
-        <p:txBody>
-          <a:bodyPr wrap="square" lIns="0" tIns="0" rIns="0" bIns="0" rtlCol="0" anchor="t"/>
-          <a:lstStyle/>
-          <a:p>
-            <a:pPr indent="0" marL="0">
-              <a:buNone/>
-            </a:pPr>
-            <a:r>
-              <a:rPr lang="en-US" sz="1400" dirty="0">
-                <a:solidFill>
-                  <a:schemeClr val="accent3"/>
-                </a:solidFill>
-              </a:rPr>
-              <a:t>Readiness signals show who is ready for more. Never an automatic loan decision.</a:t>
-            </a:r>
-            <a:endParaRPr lang="en-US" sz="1400" dirty="0"/>
-          </a:p>
-        </p:txBody>
-      </p:sp>
-      <p:sp>
-        <p:nvSpPr>
-          <p:cNvPr id="16" name="Wema card"/>
-          <p:cNvSpPr/>
-          <p:nvPr/>
-        </p:nvSpPr>
-        <p:spPr>
-          <a:xfrm>
-            <a:off x="8641080" y="1965960"/>
-            <a:ext cx="2864815" cy="3611880"/>
-          </a:xfrm>
-          <a:prstGeom prst="roundRect">
-            <a:avLst>
-              <a:gd name="adj" fmla="val 5107"/>
-            </a:avLst>
-          </a:prstGeom>
-          <a:solidFill>
-            <a:srgbClr val="FFFFFF"/>
-          </a:solidFill>
-          <a:ln w="12700">
-            <a:solidFill>
-              <a:srgbClr val="E7DCE5"/>
-            </a:solidFill>
-            <a:prstDash val="solid"/>
-          </a:ln>
-        </p:spPr>
-      </p:sp>
-      <p:pic>
-        <p:nvPicPr>
-          <p:cNvPr id="17" name="Wema logo" descr="Wema Bank logo">    </p:cNvPr>
-          <p:cNvPicPr>
-            <a:picLocks noChangeAspect="1"/>
-          </p:cNvPicPr>
-          <p:nvPr/>
-        </p:nvPicPr>
-        <p:blipFill>
-          <a:blip r:embed="rId1"/>
-          <a:stretch>
-            <a:fillRect/>
-          </a:stretch>
-        </p:blipFill>
-        <p:spPr>
-          <a:xfrm>
-            <a:off x="8961120" y="2331720"/>
-            <a:ext cx="1737360" cy="1012054"/>
-          </a:xfrm>
-          <a:prstGeom prst="rect">
-            <a:avLst/>
-          </a:prstGeom>
-        </p:spPr>
-      </p:pic>
-      <p:sp>
-        <p:nvSpPr>
-          <p:cNvPr id="18" name="Prototype note"/>
-          <p:cNvSpPr txBox="1"/>
-          <p:nvPr/>
-        </p:nvSpPr>
-        <p:spPr>
-          <a:xfrm>
-            <a:off x="8961120" y="3611880"/>
-            <a:ext cx="2224735" cy="1645920"/>
-          </a:xfrm>
-          <a:prstGeom prst="rect">
-            <a:avLst/>
-          </a:prstGeom>
-          <a:noFill/>
-          <a:ln/>
-        </p:spPr>
-        <p:txBody>
-          <a:bodyPr wrap="square" lIns="0" tIns="0" rIns="0" bIns="0" rtlCol="0" anchor="t"/>
-          <a:lstStyle/>
-          <a:p>
-            <a:pPr indent="0" marL="0">
-              <a:buNone/>
-            </a:pPr>
-            <a:r>
-              <a:rPr lang="en-US" sz="1400" dirty="0">
-                <a:solidFill>
-                  <a:schemeClr val="accent3"/>
-                </a:solidFill>
-              </a:rPr>
-              <a:t>Prototype: the Wema connection is simulated. In production, Aisha connects once, with consent, and her data stays up to date.</a:t>
-            </a:r>
-            <a:endParaRPr lang="en-US" sz="1400" dirty="0"/>
-          </a:p>
-        </p:txBody>
-      </p:sp>
-      <p:sp>
-        <p:nvSpPr>
-          <p:cNvPr id="25" name="Slide Number Placeholder 0"/>
-          <p:cNvSpPr>
-            <a:spLocks noGrp="1"/>
-          </p:cNvSpPr>
-          <p:nvPr>
-            <p:ph type="sldNum" sz="quarter" idx="4294967295"/>
-          </p:nvPr>
-        </p:nvSpPr>
-        <p:spPr>
-          <a:xfrm>
-            <a:off x="10972800" y="6263640"/>
-            <a:ext cx="530352" cy="320040"/>
-          </a:xfrm>
-          <a:prstGeom prst="rect">
-            <a:avLst/>
-          </a:prstGeom>
-          <a:extLst>
-            <a:ext uri="{C572A759-6A51-4108-AA02-DFA0A04FC94B}">
-              <ma14:wrappingTextBoxFlag xmlns:ma14="http://schemas.microsoft.com/office/mac/drawingml/2011/main" val="0"/>
-            </a:ext>
-          </a:extLst>
-        </p:spPr>
-        <p:txBody>
-          <a:bodyPr/>
-          <a:lstStyle>
-            <a:lvl1pPr>
-              <a:defRPr sz="1200">
-                <a:solidFill>
-                  <a:srgbClr val="6E6370"/>
-                </a:solidFill>
-              </a:defRPr>
-            </a:lvl1pPr>
-          </a:lstStyle>
-          <a:p>
-            <a:pPr algn="r"/>
-            <a:fld id="{F7021451-1387-4CA6-816F-3879F97B5CBC}" type="slidenum">
-              <a:rPr b="0" lang="en-US"/>
               <a:t>9</a:t>
             </a:fld>
             <a:endParaRPr lang="en-US"/>
